--- a/1_basics/git_basic.pptx
+++ b/1_basics/git_basic.pptx
@@ -5,7 +5,7 @@
     <p:sldMasterId id="2147483648" r:id="rId1"/>
   </p:sldMasterIdLst>
   <p:notesMasterIdLst>
-    <p:notesMasterId r:id="rId69"/>
+    <p:notesMasterId r:id="rId70"/>
   </p:notesMasterIdLst>
   <p:sldIdLst>
     <p:sldId id="256" r:id="rId2"/>
@@ -20,61 +20,62 @@
     <p:sldId id="445" r:id="rId11"/>
     <p:sldId id="446" r:id="rId12"/>
     <p:sldId id="380" r:id="rId13"/>
-    <p:sldId id="364" r:id="rId14"/>
-    <p:sldId id="447" r:id="rId15"/>
-    <p:sldId id="448" r:id="rId16"/>
-    <p:sldId id="449" r:id="rId17"/>
-    <p:sldId id="268" r:id="rId18"/>
-    <p:sldId id="367" r:id="rId19"/>
-    <p:sldId id="369" r:id="rId20"/>
-    <p:sldId id="370" r:id="rId21"/>
-    <p:sldId id="427" r:id="rId22"/>
-    <p:sldId id="428" r:id="rId23"/>
-    <p:sldId id="379" r:id="rId24"/>
-    <p:sldId id="401" r:id="rId25"/>
-    <p:sldId id="402" r:id="rId26"/>
-    <p:sldId id="381" r:id="rId27"/>
-    <p:sldId id="399" r:id="rId28"/>
-    <p:sldId id="400" r:id="rId29"/>
-    <p:sldId id="385" r:id="rId30"/>
-    <p:sldId id="386" r:id="rId31"/>
-    <p:sldId id="406" r:id="rId32"/>
-    <p:sldId id="357" r:id="rId33"/>
-    <p:sldId id="429" r:id="rId34"/>
-    <p:sldId id="359" r:id="rId35"/>
-    <p:sldId id="390" r:id="rId36"/>
-    <p:sldId id="372" r:id="rId37"/>
-    <p:sldId id="453" r:id="rId38"/>
-    <p:sldId id="389" r:id="rId39"/>
-    <p:sldId id="391" r:id="rId40"/>
-    <p:sldId id="392" r:id="rId41"/>
-    <p:sldId id="393" r:id="rId42"/>
-    <p:sldId id="408" r:id="rId43"/>
-    <p:sldId id="394" r:id="rId44"/>
-    <p:sldId id="396" r:id="rId45"/>
-    <p:sldId id="405" r:id="rId46"/>
-    <p:sldId id="454" r:id="rId47"/>
-    <p:sldId id="397" r:id="rId48"/>
-    <p:sldId id="398" r:id="rId49"/>
-    <p:sldId id="410" r:id="rId50"/>
-    <p:sldId id="409" r:id="rId51"/>
-    <p:sldId id="404" r:id="rId52"/>
-    <p:sldId id="411" r:id="rId53"/>
-    <p:sldId id="412" r:id="rId54"/>
-    <p:sldId id="413" r:id="rId55"/>
-    <p:sldId id="414" r:id="rId56"/>
-    <p:sldId id="431" r:id="rId57"/>
-    <p:sldId id="432" r:id="rId58"/>
-    <p:sldId id="433" r:id="rId59"/>
-    <p:sldId id="430" r:id="rId60"/>
-    <p:sldId id="416" r:id="rId61"/>
-    <p:sldId id="415" r:id="rId62"/>
-    <p:sldId id="450" r:id="rId63"/>
-    <p:sldId id="452" r:id="rId64"/>
-    <p:sldId id="420" r:id="rId65"/>
-    <p:sldId id="421" r:id="rId66"/>
-    <p:sldId id="436" r:id="rId67"/>
-    <p:sldId id="437" r:id="rId68"/>
+    <p:sldId id="455" r:id="rId14"/>
+    <p:sldId id="364" r:id="rId15"/>
+    <p:sldId id="447" r:id="rId16"/>
+    <p:sldId id="448" r:id="rId17"/>
+    <p:sldId id="449" r:id="rId18"/>
+    <p:sldId id="268" r:id="rId19"/>
+    <p:sldId id="367" r:id="rId20"/>
+    <p:sldId id="369" r:id="rId21"/>
+    <p:sldId id="370" r:id="rId22"/>
+    <p:sldId id="427" r:id="rId23"/>
+    <p:sldId id="428" r:id="rId24"/>
+    <p:sldId id="379" r:id="rId25"/>
+    <p:sldId id="401" r:id="rId26"/>
+    <p:sldId id="402" r:id="rId27"/>
+    <p:sldId id="381" r:id="rId28"/>
+    <p:sldId id="399" r:id="rId29"/>
+    <p:sldId id="400" r:id="rId30"/>
+    <p:sldId id="385" r:id="rId31"/>
+    <p:sldId id="386" r:id="rId32"/>
+    <p:sldId id="406" r:id="rId33"/>
+    <p:sldId id="357" r:id="rId34"/>
+    <p:sldId id="429" r:id="rId35"/>
+    <p:sldId id="359" r:id="rId36"/>
+    <p:sldId id="390" r:id="rId37"/>
+    <p:sldId id="372" r:id="rId38"/>
+    <p:sldId id="453" r:id="rId39"/>
+    <p:sldId id="389" r:id="rId40"/>
+    <p:sldId id="391" r:id="rId41"/>
+    <p:sldId id="392" r:id="rId42"/>
+    <p:sldId id="393" r:id="rId43"/>
+    <p:sldId id="408" r:id="rId44"/>
+    <p:sldId id="394" r:id="rId45"/>
+    <p:sldId id="396" r:id="rId46"/>
+    <p:sldId id="405" r:id="rId47"/>
+    <p:sldId id="454" r:id="rId48"/>
+    <p:sldId id="397" r:id="rId49"/>
+    <p:sldId id="398" r:id="rId50"/>
+    <p:sldId id="410" r:id="rId51"/>
+    <p:sldId id="409" r:id="rId52"/>
+    <p:sldId id="404" r:id="rId53"/>
+    <p:sldId id="411" r:id="rId54"/>
+    <p:sldId id="412" r:id="rId55"/>
+    <p:sldId id="413" r:id="rId56"/>
+    <p:sldId id="414" r:id="rId57"/>
+    <p:sldId id="431" r:id="rId58"/>
+    <p:sldId id="432" r:id="rId59"/>
+    <p:sldId id="433" r:id="rId60"/>
+    <p:sldId id="430" r:id="rId61"/>
+    <p:sldId id="416" r:id="rId62"/>
+    <p:sldId id="415" r:id="rId63"/>
+    <p:sldId id="450" r:id="rId64"/>
+    <p:sldId id="452" r:id="rId65"/>
+    <p:sldId id="420" r:id="rId66"/>
+    <p:sldId id="421" r:id="rId67"/>
+    <p:sldId id="436" r:id="rId68"/>
+    <p:sldId id="437" r:id="rId69"/>
   </p:sldIdLst>
   <p:sldSz cx="12192000" cy="6858000"/>
   <p:notesSz cx="6858000" cy="9144000"/>
@@ -263,7 +264,7 @@
           <a:p>
             <a:fld id="{3BADDCAA-88FC-44D4-A91A-DD0530AB88E0}" type="datetimeFigureOut">
               <a:rPr lang="en-NL" smtClean="0"/>
-              <a:t>28/09/2026</a:t>
+              <a:t>29/09/2026</a:t>
             </a:fld>
             <a:endParaRPr lang="en-NL"/>
           </a:p>
@@ -623,6 +624,125 @@
         <p:cNvPr id="1" name="">
           <a:extLst>
             <a:ext uri="{FF2B5EF4-FFF2-40B4-BE49-F238E27FC236}">
+              <a16:creationId xmlns:a16="http://schemas.microsoft.com/office/drawing/2014/main" id="{7ECE5BA3-5B01-FC49-A6E2-C21F670586C2}"/>
+            </a:ext>
+          </a:extLst>
+        </p:cNvPr>
+        <p:cNvGrpSpPr/>
+        <p:nvPr/>
+      </p:nvGrpSpPr>
+      <p:grpSpPr>
+        <a:xfrm>
+          <a:off x="0" y="0"/>
+          <a:ext cx="0" cy="0"/>
+          <a:chOff x="0" y="0"/>
+          <a:chExt cx="0" cy="0"/>
+        </a:xfrm>
+      </p:grpSpPr>
+      <p:sp>
+        <p:nvSpPr>
+          <p:cNvPr id="2" name="Slide Image Placeholder 1">
+            <a:extLst>
+              <a:ext uri="{FF2B5EF4-FFF2-40B4-BE49-F238E27FC236}">
+                <a16:creationId xmlns:a16="http://schemas.microsoft.com/office/drawing/2014/main" id="{7BB7ADC2-C34D-62F6-65C5-6C7D85E25235}"/>
+              </a:ext>
+            </a:extLst>
+          </p:cNvPr>
+          <p:cNvSpPr>
+            <a:spLocks noGrp="1" noRot="1" noChangeAspect="1"/>
+          </p:cNvSpPr>
+          <p:nvPr>
+            <p:ph type="sldImg"/>
+          </p:nvPr>
+        </p:nvSpPr>
+        <p:spPr/>
+      </p:sp>
+      <p:sp>
+        <p:nvSpPr>
+          <p:cNvPr id="3" name="Notes Placeholder 2">
+            <a:extLst>
+              <a:ext uri="{FF2B5EF4-FFF2-40B4-BE49-F238E27FC236}">
+                <a16:creationId xmlns:a16="http://schemas.microsoft.com/office/drawing/2014/main" id="{503F7035-9115-EECC-6A6C-440A64DCDA83}"/>
+              </a:ext>
+            </a:extLst>
+          </p:cNvPr>
+          <p:cNvSpPr>
+            <a:spLocks noGrp="1"/>
+          </p:cNvSpPr>
+          <p:nvPr>
+            <p:ph type="body" idx="1"/>
+          </p:nvPr>
+        </p:nvSpPr>
+        <p:spPr/>
+        <p:txBody>
+          <a:bodyPr/>
+          <a:lstStyle/>
+          <a:p>
+            <a:r>
+              <a:rPr lang="nl-NL" dirty="0"/>
+              <a:t>Demo: </a:t>
+            </a:r>
+            <a:r>
+              <a:rPr lang="nl-NL" dirty="0" err="1"/>
+              <a:t>Create</a:t>
+            </a:r>
+            <a:r>
+              <a:rPr lang="nl-NL" dirty="0"/>
+              <a:t> repository</a:t>
+            </a:r>
+          </a:p>
+        </p:txBody>
+      </p:sp>
+      <p:sp>
+        <p:nvSpPr>
+          <p:cNvPr id="4" name="Slide Number Placeholder 3">
+            <a:extLst>
+              <a:ext uri="{FF2B5EF4-FFF2-40B4-BE49-F238E27FC236}">
+                <a16:creationId xmlns:a16="http://schemas.microsoft.com/office/drawing/2014/main" id="{BD7A0FD2-729D-4321-2AB7-652B656A9B51}"/>
+              </a:ext>
+            </a:extLst>
+          </p:cNvPr>
+          <p:cNvSpPr>
+            <a:spLocks noGrp="1"/>
+          </p:cNvSpPr>
+          <p:nvPr>
+            <p:ph type="sldNum" sz="quarter" idx="5"/>
+          </p:nvPr>
+        </p:nvSpPr>
+        <p:spPr/>
+        <p:txBody>
+          <a:bodyPr/>
+          <a:lstStyle/>
+          <a:p>
+            <a:fld id="{9583DEA5-E342-4DB2-B087-D0B9C490B19E}" type="slidenum">
+              <a:rPr lang="nl-NL" smtClean="0"/>
+              <a:t>14</a:t>
+            </a:fld>
+            <a:endParaRPr lang="nl-NL"/>
+          </a:p>
+        </p:txBody>
+      </p:sp>
+    </p:spTree>
+    <p:extLst>
+      <p:ext uri="{BB962C8B-B14F-4D97-AF65-F5344CB8AC3E}">
+        <p14:creationId xmlns:p14="http://schemas.microsoft.com/office/powerpoint/2010/main" val="72217907"/>
+      </p:ext>
+    </p:extLst>
+  </p:cSld>
+  <p:clrMapOvr>
+    <a:masterClrMapping/>
+  </p:clrMapOvr>
+</p:notes>
+</file>
+
+<file path=ppt/notesSlides/notesSlide11.xml><?xml version="1.0" encoding="utf-8"?>
+<p:notes xmlns:a="http://schemas.openxmlformats.org/drawingml/2006/main" xmlns:r="http://schemas.openxmlformats.org/officeDocument/2006/relationships" xmlns:p="http://schemas.openxmlformats.org/presentationml/2006/main">
+  <p:cSld>
+    <p:spTree>
+      <p:nvGrpSpPr>
+        <p:cNvPr id="1" name="">
+          <a:extLst>
+            <a:ext uri="{FF2B5EF4-FFF2-40B4-BE49-F238E27FC236}">
               <a16:creationId xmlns:a16="http://schemas.microsoft.com/office/drawing/2014/main" id="{3E80D452-DC2C-C84C-FEA5-97162581DEC1}"/>
             </a:ext>
           </a:extLst>
@@ -704,7 +824,7 @@
           <a:p>
             <a:fld id="{9583DEA5-E342-4DB2-B087-D0B9C490B19E}" type="slidenum">
               <a:rPr lang="nl-NL" smtClean="0"/>
-              <a:t>14</a:t>
+              <a:t>15</a:t>
             </a:fld>
             <a:endParaRPr lang="nl-NL"/>
           </a:p>
@@ -723,7 +843,7 @@
 </p:notes>
 </file>
 
-<file path=ppt/notesSlides/notesSlide11.xml><?xml version="1.0" encoding="utf-8"?>
+<file path=ppt/notesSlides/notesSlide12.xml><?xml version="1.0" encoding="utf-8"?>
 <p:notes xmlns:a="http://schemas.openxmlformats.org/drawingml/2006/main" xmlns:r="http://schemas.openxmlformats.org/officeDocument/2006/relationships" xmlns:p="http://schemas.openxmlformats.org/presentationml/2006/main">
   <p:cSld>
     <p:spTree>
@@ -812,7 +932,7 @@
           <a:p>
             <a:fld id="{9583DEA5-E342-4DB2-B087-D0B9C490B19E}" type="slidenum">
               <a:rPr lang="nl-NL" smtClean="0"/>
-              <a:t>15</a:t>
+              <a:t>16</a:t>
             </a:fld>
             <a:endParaRPr lang="nl-NL"/>
           </a:p>
@@ -831,7 +951,7 @@
 </p:notes>
 </file>
 
-<file path=ppt/notesSlides/notesSlide12.xml><?xml version="1.0" encoding="utf-8"?>
+<file path=ppt/notesSlides/notesSlide13.xml><?xml version="1.0" encoding="utf-8"?>
 <p:notes xmlns:a="http://schemas.openxmlformats.org/drawingml/2006/main" xmlns:r="http://schemas.openxmlformats.org/officeDocument/2006/relationships" xmlns:p="http://schemas.openxmlformats.org/presentationml/2006/main">
   <p:cSld>
     <p:spTree>
@@ -936,7 +1056,7 @@
           <a:p>
             <a:fld id="{9583DEA5-E342-4DB2-B087-D0B9C490B19E}" type="slidenum">
               <a:rPr lang="nl-NL" smtClean="0"/>
-              <a:t>16</a:t>
+              <a:t>17</a:t>
             </a:fld>
             <a:endParaRPr lang="nl-NL"/>
           </a:p>
@@ -955,7 +1075,7 @@
 </p:notes>
 </file>
 
-<file path=ppt/notesSlides/notesSlide13.xml><?xml version="1.0" encoding="utf-8"?>
+<file path=ppt/notesSlides/notesSlide14.xml><?xml version="1.0" encoding="utf-8"?>
 <p:notes xmlns:a="http://schemas.openxmlformats.org/drawingml/2006/main" xmlns:r="http://schemas.openxmlformats.org/officeDocument/2006/relationships" xmlns:p="http://schemas.openxmlformats.org/presentationml/2006/main">
   <p:cSld>
     <p:spTree>
@@ -1020,7 +1140,7 @@
           <a:p>
             <a:fld id="{4BAF0DEA-1372-46C0-8FC9-2869E9CCF7DA}" type="slidenum">
               <a:rPr lang="en-NL" smtClean="0"/>
-              <a:t>17</a:t>
+              <a:t>18</a:t>
             </a:fld>
             <a:endParaRPr lang="en-NL"/>
           </a:p>
@@ -1039,7 +1159,7 @@
 </p:notes>
 </file>
 
-<file path=ppt/notesSlides/notesSlide14.xml><?xml version="1.0" encoding="utf-8"?>
+<file path=ppt/notesSlides/notesSlide15.xml><?xml version="1.0" encoding="utf-8"?>
 <p:notes xmlns:a="http://schemas.openxmlformats.org/drawingml/2006/main" xmlns:r="http://schemas.openxmlformats.org/officeDocument/2006/relationships" xmlns:p="http://schemas.openxmlformats.org/presentationml/2006/main">
   <p:cSld>
     <p:spTree>
@@ -1147,7 +1267,7 @@
           <a:p>
             <a:fld id="{9583DEA5-E342-4DB2-B087-D0B9C490B19E}" type="slidenum">
               <a:rPr lang="nl-NL" smtClean="0"/>
-              <a:t>18</a:t>
+              <a:t>19</a:t>
             </a:fld>
             <a:endParaRPr lang="nl-NL"/>
           </a:p>
@@ -1166,7 +1286,7 @@
 </p:notes>
 </file>
 
-<file path=ppt/notesSlides/notesSlide15.xml><?xml version="1.0" encoding="utf-8"?>
+<file path=ppt/notesSlides/notesSlide16.xml><?xml version="1.0" encoding="utf-8"?>
 <p:notes xmlns:a="http://schemas.openxmlformats.org/drawingml/2006/main" xmlns:r="http://schemas.openxmlformats.org/officeDocument/2006/relationships" xmlns:p="http://schemas.openxmlformats.org/presentationml/2006/main">
   <p:cSld>
     <p:spTree>
@@ -1255,7 +1375,7 @@
           <a:p>
             <a:fld id="{9583DEA5-E342-4DB2-B087-D0B9C490B19E}" type="slidenum">
               <a:rPr lang="nl-NL" smtClean="0"/>
-              <a:t>19</a:t>
+              <a:t>20</a:t>
             </a:fld>
             <a:endParaRPr lang="nl-NL"/>
           </a:p>
@@ -1274,7 +1394,7 @@
 </p:notes>
 </file>
 
-<file path=ppt/notesSlides/notesSlide16.xml><?xml version="1.0" encoding="utf-8"?>
+<file path=ppt/notesSlides/notesSlide17.xml><?xml version="1.0" encoding="utf-8"?>
 <p:notes xmlns:a="http://schemas.openxmlformats.org/drawingml/2006/main" xmlns:r="http://schemas.openxmlformats.org/officeDocument/2006/relationships" xmlns:p="http://schemas.openxmlformats.org/presentationml/2006/main">
   <p:cSld>
     <p:spTree>
@@ -1363,7 +1483,7 @@
           <a:p>
             <a:fld id="{9583DEA5-E342-4DB2-B087-D0B9C490B19E}" type="slidenum">
               <a:rPr lang="nl-NL" smtClean="0"/>
-              <a:t>20</a:t>
+              <a:t>21</a:t>
             </a:fld>
             <a:endParaRPr lang="nl-NL"/>
           </a:p>
@@ -1382,7 +1502,7 @@
 </p:notes>
 </file>
 
-<file path=ppt/notesSlides/notesSlide17.xml><?xml version="1.0" encoding="utf-8"?>
+<file path=ppt/notesSlides/notesSlide18.xml><?xml version="1.0" encoding="utf-8"?>
 <p:notes xmlns:a="http://schemas.openxmlformats.org/drawingml/2006/main" xmlns:r="http://schemas.openxmlformats.org/officeDocument/2006/relationships" xmlns:p="http://schemas.openxmlformats.org/presentationml/2006/main">
   <p:cSld>
     <p:spTree>
@@ -1471,7 +1591,7 @@
           <a:p>
             <a:fld id="{9583DEA5-E342-4DB2-B087-D0B9C490B19E}" type="slidenum">
               <a:rPr lang="nl-NL" smtClean="0"/>
-              <a:t>21</a:t>
+              <a:t>22</a:t>
             </a:fld>
             <a:endParaRPr lang="nl-NL"/>
           </a:p>
@@ -1490,7 +1610,7 @@
 </p:notes>
 </file>
 
-<file path=ppt/notesSlides/notesSlide18.xml><?xml version="1.0" encoding="utf-8"?>
+<file path=ppt/notesSlides/notesSlide19.xml><?xml version="1.0" encoding="utf-8"?>
 <p:notes xmlns:a="http://schemas.openxmlformats.org/drawingml/2006/main" xmlns:r="http://schemas.openxmlformats.org/officeDocument/2006/relationships" xmlns:p="http://schemas.openxmlformats.org/presentationml/2006/main">
   <p:cSld>
     <p:spTree>
@@ -1598,7 +1718,7 @@
           <a:p>
             <a:fld id="{9583DEA5-E342-4DB2-B087-D0B9C490B19E}" type="slidenum">
               <a:rPr lang="nl-NL" smtClean="0"/>
-              <a:t>22</a:t>
+              <a:t>23</a:t>
             </a:fld>
             <a:endParaRPr lang="nl-NL"/>
           </a:p>
@@ -1608,114 +1728,6 @@
     <p:extLst>
       <p:ext uri="{BB962C8B-B14F-4D97-AF65-F5344CB8AC3E}">
         <p14:creationId xmlns:p14="http://schemas.microsoft.com/office/powerpoint/2010/main" val="3531885093"/>
-      </p:ext>
-    </p:extLst>
-  </p:cSld>
-  <p:clrMapOvr>
-    <a:masterClrMapping/>
-  </p:clrMapOvr>
-</p:notes>
-</file>
-
-<file path=ppt/notesSlides/notesSlide19.xml><?xml version="1.0" encoding="utf-8"?>
-<p:notes xmlns:a="http://schemas.openxmlformats.org/drawingml/2006/main" xmlns:r="http://schemas.openxmlformats.org/officeDocument/2006/relationships" xmlns:p="http://schemas.openxmlformats.org/presentationml/2006/main">
-  <p:cSld>
-    <p:spTree>
-      <p:nvGrpSpPr>
-        <p:cNvPr id="1" name="">
-          <a:extLst>
-            <a:ext uri="{FF2B5EF4-FFF2-40B4-BE49-F238E27FC236}">
-              <a16:creationId xmlns:a16="http://schemas.microsoft.com/office/drawing/2014/main" id="{FD96686E-96C7-9213-C3F5-DB15686E6BB6}"/>
-            </a:ext>
-          </a:extLst>
-        </p:cNvPr>
-        <p:cNvGrpSpPr/>
-        <p:nvPr/>
-      </p:nvGrpSpPr>
-      <p:grpSpPr>
-        <a:xfrm>
-          <a:off x="0" y="0"/>
-          <a:ext cx="0" cy="0"/>
-          <a:chOff x="0" y="0"/>
-          <a:chExt cx="0" cy="0"/>
-        </a:xfrm>
-      </p:grpSpPr>
-      <p:sp>
-        <p:nvSpPr>
-          <p:cNvPr id="2" name="Slide Image Placeholder 1">
-            <a:extLst>
-              <a:ext uri="{FF2B5EF4-FFF2-40B4-BE49-F238E27FC236}">
-                <a16:creationId xmlns:a16="http://schemas.microsoft.com/office/drawing/2014/main" id="{68C25D0B-20C1-08BA-70FB-20E3C3523B3D}"/>
-              </a:ext>
-            </a:extLst>
-          </p:cNvPr>
-          <p:cNvSpPr>
-            <a:spLocks noGrp="1" noRot="1" noChangeAspect="1"/>
-          </p:cNvSpPr>
-          <p:nvPr>
-            <p:ph type="sldImg"/>
-          </p:nvPr>
-        </p:nvSpPr>
-        <p:spPr/>
-      </p:sp>
-      <p:sp>
-        <p:nvSpPr>
-          <p:cNvPr id="3" name="Notes Placeholder 2">
-            <a:extLst>
-              <a:ext uri="{FF2B5EF4-FFF2-40B4-BE49-F238E27FC236}">
-                <a16:creationId xmlns:a16="http://schemas.microsoft.com/office/drawing/2014/main" id="{7C8AA036-DBE5-310D-57CE-5EA5BDD38AB7}"/>
-              </a:ext>
-            </a:extLst>
-          </p:cNvPr>
-          <p:cNvSpPr>
-            <a:spLocks noGrp="1"/>
-          </p:cNvSpPr>
-          <p:nvPr>
-            <p:ph type="body" idx="1"/>
-          </p:nvPr>
-        </p:nvSpPr>
-        <p:spPr/>
-        <p:txBody>
-          <a:bodyPr/>
-          <a:lstStyle/>
-          <a:p>
-            <a:endParaRPr lang="nl-NL" dirty="0"/>
-          </a:p>
-        </p:txBody>
-      </p:sp>
-      <p:sp>
-        <p:nvSpPr>
-          <p:cNvPr id="4" name="Slide Number Placeholder 3">
-            <a:extLst>
-              <a:ext uri="{FF2B5EF4-FFF2-40B4-BE49-F238E27FC236}">
-                <a16:creationId xmlns:a16="http://schemas.microsoft.com/office/drawing/2014/main" id="{1DEC5B85-101B-2858-27A1-D721FF94E60A}"/>
-              </a:ext>
-            </a:extLst>
-          </p:cNvPr>
-          <p:cNvSpPr>
-            <a:spLocks noGrp="1"/>
-          </p:cNvSpPr>
-          <p:nvPr>
-            <p:ph type="sldNum" sz="quarter" idx="5"/>
-          </p:nvPr>
-        </p:nvSpPr>
-        <p:spPr/>
-        <p:txBody>
-          <a:bodyPr/>
-          <a:lstStyle/>
-          <a:p>
-            <a:fld id="{9583DEA5-E342-4DB2-B087-D0B9C490B19E}" type="slidenum">
-              <a:rPr lang="nl-NL" smtClean="0"/>
-              <a:t>23</a:t>
-            </a:fld>
-            <a:endParaRPr lang="nl-NL"/>
-          </a:p>
-        </p:txBody>
-      </p:sp>
-    </p:spTree>
-    <p:extLst>
-      <p:ext uri="{BB962C8B-B14F-4D97-AF65-F5344CB8AC3E}">
-        <p14:creationId xmlns:p14="http://schemas.microsoft.com/office/powerpoint/2010/main" val="2669879187"/>
       </p:ext>
     </p:extLst>
   </p:cSld>
@@ -1841,6 +1853,114 @@
         <p:cNvPr id="1" name="">
           <a:extLst>
             <a:ext uri="{FF2B5EF4-FFF2-40B4-BE49-F238E27FC236}">
+              <a16:creationId xmlns:a16="http://schemas.microsoft.com/office/drawing/2014/main" id="{FD96686E-96C7-9213-C3F5-DB15686E6BB6}"/>
+            </a:ext>
+          </a:extLst>
+        </p:cNvPr>
+        <p:cNvGrpSpPr/>
+        <p:nvPr/>
+      </p:nvGrpSpPr>
+      <p:grpSpPr>
+        <a:xfrm>
+          <a:off x="0" y="0"/>
+          <a:ext cx="0" cy="0"/>
+          <a:chOff x="0" y="0"/>
+          <a:chExt cx="0" cy="0"/>
+        </a:xfrm>
+      </p:grpSpPr>
+      <p:sp>
+        <p:nvSpPr>
+          <p:cNvPr id="2" name="Slide Image Placeholder 1">
+            <a:extLst>
+              <a:ext uri="{FF2B5EF4-FFF2-40B4-BE49-F238E27FC236}">
+                <a16:creationId xmlns:a16="http://schemas.microsoft.com/office/drawing/2014/main" id="{68C25D0B-20C1-08BA-70FB-20E3C3523B3D}"/>
+              </a:ext>
+            </a:extLst>
+          </p:cNvPr>
+          <p:cNvSpPr>
+            <a:spLocks noGrp="1" noRot="1" noChangeAspect="1"/>
+          </p:cNvSpPr>
+          <p:nvPr>
+            <p:ph type="sldImg"/>
+          </p:nvPr>
+        </p:nvSpPr>
+        <p:spPr/>
+      </p:sp>
+      <p:sp>
+        <p:nvSpPr>
+          <p:cNvPr id="3" name="Notes Placeholder 2">
+            <a:extLst>
+              <a:ext uri="{FF2B5EF4-FFF2-40B4-BE49-F238E27FC236}">
+                <a16:creationId xmlns:a16="http://schemas.microsoft.com/office/drawing/2014/main" id="{7C8AA036-DBE5-310D-57CE-5EA5BDD38AB7}"/>
+              </a:ext>
+            </a:extLst>
+          </p:cNvPr>
+          <p:cNvSpPr>
+            <a:spLocks noGrp="1"/>
+          </p:cNvSpPr>
+          <p:nvPr>
+            <p:ph type="body" idx="1"/>
+          </p:nvPr>
+        </p:nvSpPr>
+        <p:spPr/>
+        <p:txBody>
+          <a:bodyPr/>
+          <a:lstStyle/>
+          <a:p>
+            <a:endParaRPr lang="nl-NL" dirty="0"/>
+          </a:p>
+        </p:txBody>
+      </p:sp>
+      <p:sp>
+        <p:nvSpPr>
+          <p:cNvPr id="4" name="Slide Number Placeholder 3">
+            <a:extLst>
+              <a:ext uri="{FF2B5EF4-FFF2-40B4-BE49-F238E27FC236}">
+                <a16:creationId xmlns:a16="http://schemas.microsoft.com/office/drawing/2014/main" id="{1DEC5B85-101B-2858-27A1-D721FF94E60A}"/>
+              </a:ext>
+            </a:extLst>
+          </p:cNvPr>
+          <p:cNvSpPr>
+            <a:spLocks noGrp="1"/>
+          </p:cNvSpPr>
+          <p:nvPr>
+            <p:ph type="sldNum" sz="quarter" idx="5"/>
+          </p:nvPr>
+        </p:nvSpPr>
+        <p:spPr/>
+        <p:txBody>
+          <a:bodyPr/>
+          <a:lstStyle/>
+          <a:p>
+            <a:fld id="{9583DEA5-E342-4DB2-B087-D0B9C490B19E}" type="slidenum">
+              <a:rPr lang="nl-NL" smtClean="0"/>
+              <a:t>24</a:t>
+            </a:fld>
+            <a:endParaRPr lang="nl-NL"/>
+          </a:p>
+        </p:txBody>
+      </p:sp>
+    </p:spTree>
+    <p:extLst>
+      <p:ext uri="{BB962C8B-B14F-4D97-AF65-F5344CB8AC3E}">
+        <p14:creationId xmlns:p14="http://schemas.microsoft.com/office/powerpoint/2010/main" val="2669879187"/>
+      </p:ext>
+    </p:extLst>
+  </p:cSld>
+  <p:clrMapOvr>
+    <a:masterClrMapping/>
+  </p:clrMapOvr>
+</p:notes>
+</file>
+
+<file path=ppt/notesSlides/notesSlide21.xml><?xml version="1.0" encoding="utf-8"?>
+<p:notes xmlns:a="http://schemas.openxmlformats.org/drawingml/2006/main" xmlns:r="http://schemas.openxmlformats.org/officeDocument/2006/relationships" xmlns:p="http://schemas.openxmlformats.org/presentationml/2006/main">
+  <p:cSld>
+    <p:spTree>
+      <p:nvGrpSpPr>
+        <p:cNvPr id="1" name="">
+          <a:extLst>
+            <a:ext uri="{FF2B5EF4-FFF2-40B4-BE49-F238E27FC236}">
               <a16:creationId xmlns:a16="http://schemas.microsoft.com/office/drawing/2014/main" id="{E846A9C1-EA00-0BC9-38F1-1A5FA2AEF353}"/>
             </a:ext>
           </a:extLst>
@@ -1947,7 +2067,7 @@
           <a:p>
             <a:fld id="{9583DEA5-E342-4DB2-B087-D0B9C490B19E}" type="slidenum">
               <a:rPr lang="nl-NL" smtClean="0"/>
-              <a:t>24</a:t>
+              <a:t>25</a:t>
             </a:fld>
             <a:endParaRPr lang="nl-NL"/>
           </a:p>
@@ -1966,7 +2086,7 @@
 </p:notes>
 </file>
 
-<file path=ppt/notesSlides/notesSlide21.xml><?xml version="1.0" encoding="utf-8"?>
+<file path=ppt/notesSlides/notesSlide22.xml><?xml version="1.0" encoding="utf-8"?>
 <p:notes xmlns:a="http://schemas.openxmlformats.org/drawingml/2006/main" xmlns:r="http://schemas.openxmlformats.org/officeDocument/2006/relationships" xmlns:p="http://schemas.openxmlformats.org/presentationml/2006/main">
   <p:cSld>
     <p:spTree>
@@ -2072,7 +2192,7 @@
           <a:p>
             <a:fld id="{9583DEA5-E342-4DB2-B087-D0B9C490B19E}" type="slidenum">
               <a:rPr lang="nl-NL" smtClean="0"/>
-              <a:t>25</a:t>
+              <a:t>26</a:t>
             </a:fld>
             <a:endParaRPr lang="nl-NL"/>
           </a:p>
@@ -2091,7 +2211,7 @@
 </p:notes>
 </file>
 
-<file path=ppt/notesSlides/notesSlide22.xml><?xml version="1.0" encoding="utf-8"?>
+<file path=ppt/notesSlides/notesSlide23.xml><?xml version="1.0" encoding="utf-8"?>
 <p:notes xmlns:a="http://schemas.openxmlformats.org/drawingml/2006/main" xmlns:r="http://schemas.openxmlformats.org/officeDocument/2006/relationships" xmlns:p="http://schemas.openxmlformats.org/presentationml/2006/main">
   <p:cSld>
     <p:spTree>
@@ -2180,7 +2300,7 @@
           <a:p>
             <a:fld id="{9583DEA5-E342-4DB2-B087-D0B9C490B19E}" type="slidenum">
               <a:rPr lang="nl-NL" smtClean="0"/>
-              <a:t>27</a:t>
+              <a:t>28</a:t>
             </a:fld>
             <a:endParaRPr lang="nl-NL"/>
           </a:p>
@@ -2199,7 +2319,7 @@
 </p:notes>
 </file>
 
-<file path=ppt/notesSlides/notesSlide23.xml><?xml version="1.0" encoding="utf-8"?>
+<file path=ppt/notesSlides/notesSlide24.xml><?xml version="1.0" encoding="utf-8"?>
 <p:notes xmlns:a="http://schemas.openxmlformats.org/drawingml/2006/main" xmlns:r="http://schemas.openxmlformats.org/officeDocument/2006/relationships" xmlns:p="http://schemas.openxmlformats.org/presentationml/2006/main">
   <p:cSld>
     <p:spTree>
@@ -2313,7 +2433,7 @@
           <a:p>
             <a:fld id="{9583DEA5-E342-4DB2-B087-D0B9C490B19E}" type="slidenum">
               <a:rPr lang="nl-NL" smtClean="0"/>
-              <a:t>28</a:t>
+              <a:t>29</a:t>
             </a:fld>
             <a:endParaRPr lang="nl-NL"/>
           </a:p>
@@ -2332,7 +2452,7 @@
 </p:notes>
 </file>
 
-<file path=ppt/notesSlides/notesSlide24.xml><?xml version="1.0" encoding="utf-8"?>
+<file path=ppt/notesSlides/notesSlide25.xml><?xml version="1.0" encoding="utf-8"?>
 <p:notes xmlns:a="http://schemas.openxmlformats.org/drawingml/2006/main" xmlns:r="http://schemas.openxmlformats.org/officeDocument/2006/relationships" xmlns:p="http://schemas.openxmlformats.org/presentationml/2006/main">
   <p:cSld>
     <p:spTree>
@@ -2432,7 +2552,7 @@
           <a:p>
             <a:fld id="{9583DEA5-E342-4DB2-B087-D0B9C490B19E}" type="slidenum">
               <a:rPr lang="nl-NL" smtClean="0"/>
-              <a:t>29</a:t>
+              <a:t>30</a:t>
             </a:fld>
             <a:endParaRPr lang="nl-NL"/>
           </a:p>
@@ -2451,7 +2571,7 @@
 </p:notes>
 </file>
 
-<file path=ppt/notesSlides/notesSlide25.xml><?xml version="1.0" encoding="utf-8"?>
+<file path=ppt/notesSlides/notesSlide26.xml><?xml version="1.0" encoding="utf-8"?>
 <p:notes xmlns:a="http://schemas.openxmlformats.org/drawingml/2006/main" xmlns:r="http://schemas.openxmlformats.org/officeDocument/2006/relationships" xmlns:p="http://schemas.openxmlformats.org/presentationml/2006/main">
   <p:cSld>
     <p:spTree>
@@ -2543,7 +2663,7 @@
           <a:p>
             <a:fld id="{9583DEA5-E342-4DB2-B087-D0B9C490B19E}" type="slidenum">
               <a:rPr lang="nl-NL" smtClean="0"/>
-              <a:t>30</a:t>
+              <a:t>31</a:t>
             </a:fld>
             <a:endParaRPr lang="nl-NL"/>
           </a:p>
@@ -2562,7 +2682,7 @@
 </p:notes>
 </file>
 
-<file path=ppt/notesSlides/notesSlide26.xml><?xml version="1.0" encoding="utf-8"?>
+<file path=ppt/notesSlides/notesSlide27.xml><?xml version="1.0" encoding="utf-8"?>
 <p:notes xmlns:a="http://schemas.openxmlformats.org/drawingml/2006/main" xmlns:r="http://schemas.openxmlformats.org/officeDocument/2006/relationships" xmlns:p="http://schemas.openxmlformats.org/presentationml/2006/main">
   <p:cSld>
     <p:spTree>
@@ -2667,7 +2787,7 @@
           <a:p>
             <a:fld id="{9583DEA5-E342-4DB2-B087-D0B9C490B19E}" type="slidenum">
               <a:rPr lang="nl-NL" smtClean="0"/>
-              <a:t>31</a:t>
+              <a:t>32</a:t>
             </a:fld>
             <a:endParaRPr lang="nl-NL"/>
           </a:p>
@@ -2686,7 +2806,7 @@
 </p:notes>
 </file>
 
-<file path=ppt/notesSlides/notesSlide27.xml><?xml version="1.0" encoding="utf-8"?>
+<file path=ppt/notesSlides/notesSlide28.xml><?xml version="1.0" encoding="utf-8"?>
 <p:notes xmlns:a="http://schemas.openxmlformats.org/drawingml/2006/main" xmlns:r="http://schemas.openxmlformats.org/officeDocument/2006/relationships" xmlns:p="http://schemas.openxmlformats.org/presentationml/2006/main">
   <p:cSld>
     <p:spTree>
@@ -2775,7 +2895,7 @@
           <a:p>
             <a:fld id="{9583DEA5-E342-4DB2-B087-D0B9C490B19E}" type="slidenum">
               <a:rPr lang="nl-NL" smtClean="0"/>
-              <a:t>33</a:t>
+              <a:t>34</a:t>
             </a:fld>
             <a:endParaRPr lang="nl-NL"/>
           </a:p>
@@ -2794,7 +2914,7 @@
 </p:notes>
 </file>
 
-<file path=ppt/notesSlides/notesSlide28.xml><?xml version="1.0" encoding="utf-8"?>
+<file path=ppt/notesSlides/notesSlide29.xml><?xml version="1.0" encoding="utf-8"?>
 <p:notes xmlns:a="http://schemas.openxmlformats.org/drawingml/2006/main" xmlns:r="http://schemas.openxmlformats.org/officeDocument/2006/relationships" xmlns:p="http://schemas.openxmlformats.org/presentationml/2006/main">
   <p:cSld>
     <p:spTree>
@@ -2883,7 +3003,7 @@
           <a:p>
             <a:fld id="{9583DEA5-E342-4DB2-B087-D0B9C490B19E}" type="slidenum">
               <a:rPr lang="nl-NL" smtClean="0"/>
-              <a:t>34</a:t>
+              <a:t>35</a:t>
             </a:fld>
             <a:endParaRPr lang="nl-NL"/>
           </a:p>
@@ -2893,114 +3013,6 @@
     <p:extLst>
       <p:ext uri="{BB962C8B-B14F-4D97-AF65-F5344CB8AC3E}">
         <p14:creationId xmlns:p14="http://schemas.microsoft.com/office/powerpoint/2010/main" val="4146083503"/>
-      </p:ext>
-    </p:extLst>
-  </p:cSld>
-  <p:clrMapOvr>
-    <a:masterClrMapping/>
-  </p:clrMapOvr>
-</p:notes>
-</file>
-
-<file path=ppt/notesSlides/notesSlide29.xml><?xml version="1.0" encoding="utf-8"?>
-<p:notes xmlns:a="http://schemas.openxmlformats.org/drawingml/2006/main" xmlns:r="http://schemas.openxmlformats.org/officeDocument/2006/relationships" xmlns:p="http://schemas.openxmlformats.org/presentationml/2006/main">
-  <p:cSld>
-    <p:spTree>
-      <p:nvGrpSpPr>
-        <p:cNvPr id="1" name="">
-          <a:extLst>
-            <a:ext uri="{FF2B5EF4-FFF2-40B4-BE49-F238E27FC236}">
-              <a16:creationId xmlns:a16="http://schemas.microsoft.com/office/drawing/2014/main" id="{7CE2BA4A-6834-D4DA-176F-13BBA01BD76A}"/>
-            </a:ext>
-          </a:extLst>
-        </p:cNvPr>
-        <p:cNvGrpSpPr/>
-        <p:nvPr/>
-      </p:nvGrpSpPr>
-      <p:grpSpPr>
-        <a:xfrm>
-          <a:off x="0" y="0"/>
-          <a:ext cx="0" cy="0"/>
-          <a:chOff x="0" y="0"/>
-          <a:chExt cx="0" cy="0"/>
-        </a:xfrm>
-      </p:grpSpPr>
-      <p:sp>
-        <p:nvSpPr>
-          <p:cNvPr id="2" name="Slide Image Placeholder 1">
-            <a:extLst>
-              <a:ext uri="{FF2B5EF4-FFF2-40B4-BE49-F238E27FC236}">
-                <a16:creationId xmlns:a16="http://schemas.microsoft.com/office/drawing/2014/main" id="{0947D8DD-6C23-73F1-5CA4-4EE718A8F999}"/>
-              </a:ext>
-            </a:extLst>
-          </p:cNvPr>
-          <p:cNvSpPr>
-            <a:spLocks noGrp="1" noRot="1" noChangeAspect="1"/>
-          </p:cNvSpPr>
-          <p:nvPr>
-            <p:ph type="sldImg"/>
-          </p:nvPr>
-        </p:nvSpPr>
-        <p:spPr/>
-      </p:sp>
-      <p:sp>
-        <p:nvSpPr>
-          <p:cNvPr id="3" name="Notes Placeholder 2">
-            <a:extLst>
-              <a:ext uri="{FF2B5EF4-FFF2-40B4-BE49-F238E27FC236}">
-                <a16:creationId xmlns:a16="http://schemas.microsoft.com/office/drawing/2014/main" id="{EFE798B5-5DDE-A401-DED1-D6239EBFC1EC}"/>
-              </a:ext>
-            </a:extLst>
-          </p:cNvPr>
-          <p:cNvSpPr>
-            <a:spLocks noGrp="1"/>
-          </p:cNvSpPr>
-          <p:nvPr>
-            <p:ph type="body" idx="1"/>
-          </p:nvPr>
-        </p:nvSpPr>
-        <p:spPr/>
-        <p:txBody>
-          <a:bodyPr/>
-          <a:lstStyle/>
-          <a:p>
-            <a:endParaRPr lang="nl-NL" dirty="0"/>
-          </a:p>
-        </p:txBody>
-      </p:sp>
-      <p:sp>
-        <p:nvSpPr>
-          <p:cNvPr id="4" name="Slide Number Placeholder 3">
-            <a:extLst>
-              <a:ext uri="{FF2B5EF4-FFF2-40B4-BE49-F238E27FC236}">
-                <a16:creationId xmlns:a16="http://schemas.microsoft.com/office/drawing/2014/main" id="{F86933D6-500C-7BAF-0080-8C39A4476EE3}"/>
-              </a:ext>
-            </a:extLst>
-          </p:cNvPr>
-          <p:cNvSpPr>
-            <a:spLocks noGrp="1"/>
-          </p:cNvSpPr>
-          <p:nvPr>
-            <p:ph type="sldNum" sz="quarter" idx="5"/>
-          </p:nvPr>
-        </p:nvSpPr>
-        <p:spPr/>
-        <p:txBody>
-          <a:bodyPr/>
-          <a:lstStyle/>
-          <a:p>
-            <a:fld id="{9583DEA5-E342-4DB2-B087-D0B9C490B19E}" type="slidenum">
-              <a:rPr lang="nl-NL" smtClean="0"/>
-              <a:t>35</a:t>
-            </a:fld>
-            <a:endParaRPr lang="nl-NL"/>
-          </a:p>
-        </p:txBody>
-      </p:sp>
-    </p:spTree>
-    <p:extLst>
-      <p:ext uri="{BB962C8B-B14F-4D97-AF65-F5344CB8AC3E}">
-        <p14:creationId xmlns:p14="http://schemas.microsoft.com/office/powerpoint/2010/main" val="2518536096"/>
       </p:ext>
     </p:extLst>
   </p:cSld>
@@ -3102,6 +3114,114 @@
         <p:cNvPr id="1" name="">
           <a:extLst>
             <a:ext uri="{FF2B5EF4-FFF2-40B4-BE49-F238E27FC236}">
+              <a16:creationId xmlns:a16="http://schemas.microsoft.com/office/drawing/2014/main" id="{7CE2BA4A-6834-D4DA-176F-13BBA01BD76A}"/>
+            </a:ext>
+          </a:extLst>
+        </p:cNvPr>
+        <p:cNvGrpSpPr/>
+        <p:nvPr/>
+      </p:nvGrpSpPr>
+      <p:grpSpPr>
+        <a:xfrm>
+          <a:off x="0" y="0"/>
+          <a:ext cx="0" cy="0"/>
+          <a:chOff x="0" y="0"/>
+          <a:chExt cx="0" cy="0"/>
+        </a:xfrm>
+      </p:grpSpPr>
+      <p:sp>
+        <p:nvSpPr>
+          <p:cNvPr id="2" name="Slide Image Placeholder 1">
+            <a:extLst>
+              <a:ext uri="{FF2B5EF4-FFF2-40B4-BE49-F238E27FC236}">
+                <a16:creationId xmlns:a16="http://schemas.microsoft.com/office/drawing/2014/main" id="{0947D8DD-6C23-73F1-5CA4-4EE718A8F999}"/>
+              </a:ext>
+            </a:extLst>
+          </p:cNvPr>
+          <p:cNvSpPr>
+            <a:spLocks noGrp="1" noRot="1" noChangeAspect="1"/>
+          </p:cNvSpPr>
+          <p:nvPr>
+            <p:ph type="sldImg"/>
+          </p:nvPr>
+        </p:nvSpPr>
+        <p:spPr/>
+      </p:sp>
+      <p:sp>
+        <p:nvSpPr>
+          <p:cNvPr id="3" name="Notes Placeholder 2">
+            <a:extLst>
+              <a:ext uri="{FF2B5EF4-FFF2-40B4-BE49-F238E27FC236}">
+                <a16:creationId xmlns:a16="http://schemas.microsoft.com/office/drawing/2014/main" id="{EFE798B5-5DDE-A401-DED1-D6239EBFC1EC}"/>
+              </a:ext>
+            </a:extLst>
+          </p:cNvPr>
+          <p:cNvSpPr>
+            <a:spLocks noGrp="1"/>
+          </p:cNvSpPr>
+          <p:nvPr>
+            <p:ph type="body" idx="1"/>
+          </p:nvPr>
+        </p:nvSpPr>
+        <p:spPr/>
+        <p:txBody>
+          <a:bodyPr/>
+          <a:lstStyle/>
+          <a:p>
+            <a:endParaRPr lang="nl-NL" dirty="0"/>
+          </a:p>
+        </p:txBody>
+      </p:sp>
+      <p:sp>
+        <p:nvSpPr>
+          <p:cNvPr id="4" name="Slide Number Placeholder 3">
+            <a:extLst>
+              <a:ext uri="{FF2B5EF4-FFF2-40B4-BE49-F238E27FC236}">
+                <a16:creationId xmlns:a16="http://schemas.microsoft.com/office/drawing/2014/main" id="{F86933D6-500C-7BAF-0080-8C39A4476EE3}"/>
+              </a:ext>
+            </a:extLst>
+          </p:cNvPr>
+          <p:cNvSpPr>
+            <a:spLocks noGrp="1"/>
+          </p:cNvSpPr>
+          <p:nvPr>
+            <p:ph type="sldNum" sz="quarter" idx="5"/>
+          </p:nvPr>
+        </p:nvSpPr>
+        <p:spPr/>
+        <p:txBody>
+          <a:bodyPr/>
+          <a:lstStyle/>
+          <a:p>
+            <a:fld id="{9583DEA5-E342-4DB2-B087-D0B9C490B19E}" type="slidenum">
+              <a:rPr lang="nl-NL" smtClean="0"/>
+              <a:t>36</a:t>
+            </a:fld>
+            <a:endParaRPr lang="nl-NL"/>
+          </a:p>
+        </p:txBody>
+      </p:sp>
+    </p:spTree>
+    <p:extLst>
+      <p:ext uri="{BB962C8B-B14F-4D97-AF65-F5344CB8AC3E}">
+        <p14:creationId xmlns:p14="http://schemas.microsoft.com/office/powerpoint/2010/main" val="2518536096"/>
+      </p:ext>
+    </p:extLst>
+  </p:cSld>
+  <p:clrMapOvr>
+    <a:masterClrMapping/>
+  </p:clrMapOvr>
+</p:notes>
+</file>
+
+<file path=ppt/notesSlides/notesSlide31.xml><?xml version="1.0" encoding="utf-8"?>
+<p:notes xmlns:a="http://schemas.openxmlformats.org/drawingml/2006/main" xmlns:r="http://schemas.openxmlformats.org/officeDocument/2006/relationships" xmlns:p="http://schemas.openxmlformats.org/presentationml/2006/main">
+  <p:cSld>
+    <p:spTree>
+      <p:nvGrpSpPr>
+        <p:cNvPr id="1" name="">
+          <a:extLst>
+            <a:ext uri="{FF2B5EF4-FFF2-40B4-BE49-F238E27FC236}">
               <a16:creationId xmlns:a16="http://schemas.microsoft.com/office/drawing/2014/main" id="{401CFB1A-342F-2F27-72E8-00445C999F94}"/>
             </a:ext>
           </a:extLst>
@@ -3186,7 +3306,7 @@
           <a:p>
             <a:fld id="{9583DEA5-E342-4DB2-B087-D0B9C490B19E}" type="slidenum">
               <a:rPr lang="nl-NL" smtClean="0"/>
-              <a:t>36</a:t>
+              <a:t>37</a:t>
             </a:fld>
             <a:endParaRPr lang="nl-NL"/>
           </a:p>
@@ -3205,7 +3325,7 @@
 </p:notes>
 </file>
 
-<file path=ppt/notesSlides/notesSlide31.xml><?xml version="1.0" encoding="utf-8"?>
+<file path=ppt/notesSlides/notesSlide32.xml><?xml version="1.0" encoding="utf-8"?>
 <p:notes xmlns:a="http://schemas.openxmlformats.org/drawingml/2006/main" xmlns:r="http://schemas.openxmlformats.org/officeDocument/2006/relationships" xmlns:p="http://schemas.openxmlformats.org/presentationml/2006/main">
   <p:cSld>
     <p:spTree>
@@ -3297,7 +3417,7 @@
           <a:p>
             <a:fld id="{9583DEA5-E342-4DB2-B087-D0B9C490B19E}" type="slidenum">
               <a:rPr lang="nl-NL" smtClean="0"/>
-              <a:t>37</a:t>
+              <a:t>38</a:t>
             </a:fld>
             <a:endParaRPr lang="nl-NL"/>
           </a:p>
@@ -3316,7 +3436,7 @@
 </p:notes>
 </file>
 
-<file path=ppt/notesSlides/notesSlide32.xml><?xml version="1.0" encoding="utf-8"?>
+<file path=ppt/notesSlides/notesSlide33.xml><?xml version="1.0" encoding="utf-8"?>
 <p:notes xmlns:a="http://schemas.openxmlformats.org/drawingml/2006/main" xmlns:r="http://schemas.openxmlformats.org/officeDocument/2006/relationships" xmlns:p="http://schemas.openxmlformats.org/presentationml/2006/main">
   <p:cSld>
     <p:spTree>
@@ -3405,7 +3525,7 @@
           <a:p>
             <a:fld id="{9583DEA5-E342-4DB2-B087-D0B9C490B19E}" type="slidenum">
               <a:rPr lang="nl-NL" smtClean="0"/>
-              <a:t>38</a:t>
+              <a:t>39</a:t>
             </a:fld>
             <a:endParaRPr lang="nl-NL"/>
           </a:p>
@@ -3424,7 +3544,7 @@
 </p:notes>
 </file>
 
-<file path=ppt/notesSlides/notesSlide33.xml><?xml version="1.0" encoding="utf-8"?>
+<file path=ppt/notesSlides/notesSlide34.xml><?xml version="1.0" encoding="utf-8"?>
 <p:notes xmlns:a="http://schemas.openxmlformats.org/drawingml/2006/main" xmlns:r="http://schemas.openxmlformats.org/officeDocument/2006/relationships" xmlns:p="http://schemas.openxmlformats.org/presentationml/2006/main">
   <p:cSld>
     <p:spTree>
@@ -3513,7 +3633,7 @@
           <a:p>
             <a:fld id="{9583DEA5-E342-4DB2-B087-D0B9C490B19E}" type="slidenum">
               <a:rPr lang="nl-NL" smtClean="0"/>
-              <a:t>39</a:t>
+              <a:t>40</a:t>
             </a:fld>
             <a:endParaRPr lang="nl-NL"/>
           </a:p>
@@ -3532,7 +3652,7 @@
 </p:notes>
 </file>
 
-<file path=ppt/notesSlides/notesSlide34.xml><?xml version="1.0" encoding="utf-8"?>
+<file path=ppt/notesSlides/notesSlide35.xml><?xml version="1.0" encoding="utf-8"?>
 <p:notes xmlns:a="http://schemas.openxmlformats.org/drawingml/2006/main" xmlns:r="http://schemas.openxmlformats.org/officeDocument/2006/relationships" xmlns:p="http://schemas.openxmlformats.org/presentationml/2006/main">
   <p:cSld>
     <p:spTree>
@@ -3637,7 +3757,7 @@
           <a:p>
             <a:fld id="{9583DEA5-E342-4DB2-B087-D0B9C490B19E}" type="slidenum">
               <a:rPr lang="nl-NL" smtClean="0"/>
-              <a:t>40</a:t>
+              <a:t>41</a:t>
             </a:fld>
             <a:endParaRPr lang="nl-NL"/>
           </a:p>
@@ -3656,7 +3776,7 @@
 </p:notes>
 </file>
 
-<file path=ppt/notesSlides/notesSlide35.xml><?xml version="1.0" encoding="utf-8"?>
+<file path=ppt/notesSlides/notesSlide36.xml><?xml version="1.0" encoding="utf-8"?>
 <p:notes xmlns:a="http://schemas.openxmlformats.org/drawingml/2006/main" xmlns:r="http://schemas.openxmlformats.org/officeDocument/2006/relationships" xmlns:p="http://schemas.openxmlformats.org/presentationml/2006/main">
   <p:cSld>
     <p:spTree>
@@ -3745,7 +3865,7 @@
           <a:p>
             <a:fld id="{9583DEA5-E342-4DB2-B087-D0B9C490B19E}" type="slidenum">
               <a:rPr lang="nl-NL" smtClean="0"/>
-              <a:t>41</a:t>
+              <a:t>42</a:t>
             </a:fld>
             <a:endParaRPr lang="nl-NL"/>
           </a:p>
@@ -3764,7 +3884,7 @@
 </p:notes>
 </file>
 
-<file path=ppt/notesSlides/notesSlide36.xml><?xml version="1.0" encoding="utf-8"?>
+<file path=ppt/notesSlides/notesSlide37.xml><?xml version="1.0" encoding="utf-8"?>
 <p:notes xmlns:a="http://schemas.openxmlformats.org/drawingml/2006/main" xmlns:r="http://schemas.openxmlformats.org/officeDocument/2006/relationships" xmlns:p="http://schemas.openxmlformats.org/presentationml/2006/main">
   <p:cSld>
     <p:spTree>
@@ -3853,7 +3973,7 @@
           <a:p>
             <a:fld id="{9583DEA5-E342-4DB2-B087-D0B9C490B19E}" type="slidenum">
               <a:rPr lang="nl-NL" smtClean="0"/>
-              <a:t>42</a:t>
+              <a:t>43</a:t>
             </a:fld>
             <a:endParaRPr lang="nl-NL"/>
           </a:p>
@@ -3872,7 +3992,7 @@
 </p:notes>
 </file>
 
-<file path=ppt/notesSlides/notesSlide37.xml><?xml version="1.0" encoding="utf-8"?>
+<file path=ppt/notesSlides/notesSlide38.xml><?xml version="1.0" encoding="utf-8"?>
 <p:notes xmlns:a="http://schemas.openxmlformats.org/drawingml/2006/main" xmlns:r="http://schemas.openxmlformats.org/officeDocument/2006/relationships" xmlns:p="http://schemas.openxmlformats.org/presentationml/2006/main">
   <p:cSld>
     <p:spTree>
@@ -3961,7 +4081,7 @@
           <a:p>
             <a:fld id="{9583DEA5-E342-4DB2-B087-D0B9C490B19E}" type="slidenum">
               <a:rPr lang="nl-NL" smtClean="0"/>
-              <a:t>43</a:t>
+              <a:t>44</a:t>
             </a:fld>
             <a:endParaRPr lang="nl-NL"/>
           </a:p>
@@ -3980,7 +4100,7 @@
 </p:notes>
 </file>
 
-<file path=ppt/notesSlides/notesSlide38.xml><?xml version="1.0" encoding="utf-8"?>
+<file path=ppt/notesSlides/notesSlide39.xml><?xml version="1.0" encoding="utf-8"?>
 <p:notes xmlns:a="http://schemas.openxmlformats.org/drawingml/2006/main" xmlns:r="http://schemas.openxmlformats.org/officeDocument/2006/relationships" xmlns:p="http://schemas.openxmlformats.org/presentationml/2006/main">
   <p:cSld>
     <p:spTree>
@@ -4069,7 +4189,7 @@
           <a:p>
             <a:fld id="{9583DEA5-E342-4DB2-B087-D0B9C490B19E}" type="slidenum">
               <a:rPr lang="nl-NL" smtClean="0"/>
-              <a:t>44</a:t>
+              <a:t>45</a:t>
             </a:fld>
             <a:endParaRPr lang="nl-NL"/>
           </a:p>
@@ -4079,114 +4199,6 @@
     <p:extLst>
       <p:ext uri="{BB962C8B-B14F-4D97-AF65-F5344CB8AC3E}">
         <p14:creationId xmlns:p14="http://schemas.microsoft.com/office/powerpoint/2010/main" val="1652688801"/>
-      </p:ext>
-    </p:extLst>
-  </p:cSld>
-  <p:clrMapOvr>
-    <a:masterClrMapping/>
-  </p:clrMapOvr>
-</p:notes>
-</file>
-
-<file path=ppt/notesSlides/notesSlide39.xml><?xml version="1.0" encoding="utf-8"?>
-<p:notes xmlns:a="http://schemas.openxmlformats.org/drawingml/2006/main" xmlns:r="http://schemas.openxmlformats.org/officeDocument/2006/relationships" xmlns:p="http://schemas.openxmlformats.org/presentationml/2006/main">
-  <p:cSld>
-    <p:spTree>
-      <p:nvGrpSpPr>
-        <p:cNvPr id="1" name="">
-          <a:extLst>
-            <a:ext uri="{FF2B5EF4-FFF2-40B4-BE49-F238E27FC236}">
-              <a16:creationId xmlns:a16="http://schemas.microsoft.com/office/drawing/2014/main" id="{C97DD4F4-DA5A-CBF5-7160-C099EA809E7B}"/>
-            </a:ext>
-          </a:extLst>
-        </p:cNvPr>
-        <p:cNvGrpSpPr/>
-        <p:nvPr/>
-      </p:nvGrpSpPr>
-      <p:grpSpPr>
-        <a:xfrm>
-          <a:off x="0" y="0"/>
-          <a:ext cx="0" cy="0"/>
-          <a:chOff x="0" y="0"/>
-          <a:chExt cx="0" cy="0"/>
-        </a:xfrm>
-      </p:grpSpPr>
-      <p:sp>
-        <p:nvSpPr>
-          <p:cNvPr id="2" name="Slide Image Placeholder 1">
-            <a:extLst>
-              <a:ext uri="{FF2B5EF4-FFF2-40B4-BE49-F238E27FC236}">
-                <a16:creationId xmlns:a16="http://schemas.microsoft.com/office/drawing/2014/main" id="{E197FEDE-E4D8-6893-B500-DB2559F8397F}"/>
-              </a:ext>
-            </a:extLst>
-          </p:cNvPr>
-          <p:cNvSpPr>
-            <a:spLocks noGrp="1" noRot="1" noChangeAspect="1"/>
-          </p:cNvSpPr>
-          <p:nvPr>
-            <p:ph type="sldImg"/>
-          </p:nvPr>
-        </p:nvSpPr>
-        <p:spPr/>
-      </p:sp>
-      <p:sp>
-        <p:nvSpPr>
-          <p:cNvPr id="3" name="Notes Placeholder 2">
-            <a:extLst>
-              <a:ext uri="{FF2B5EF4-FFF2-40B4-BE49-F238E27FC236}">
-                <a16:creationId xmlns:a16="http://schemas.microsoft.com/office/drawing/2014/main" id="{CFC62210-D918-2E5E-EC80-A2293F5845EC}"/>
-              </a:ext>
-            </a:extLst>
-          </p:cNvPr>
-          <p:cNvSpPr>
-            <a:spLocks noGrp="1"/>
-          </p:cNvSpPr>
-          <p:nvPr>
-            <p:ph type="body" idx="1"/>
-          </p:nvPr>
-        </p:nvSpPr>
-        <p:spPr/>
-        <p:txBody>
-          <a:bodyPr/>
-          <a:lstStyle/>
-          <a:p>
-            <a:endParaRPr lang="nl-NL" dirty="0"/>
-          </a:p>
-        </p:txBody>
-      </p:sp>
-      <p:sp>
-        <p:nvSpPr>
-          <p:cNvPr id="4" name="Slide Number Placeholder 3">
-            <a:extLst>
-              <a:ext uri="{FF2B5EF4-FFF2-40B4-BE49-F238E27FC236}">
-                <a16:creationId xmlns:a16="http://schemas.microsoft.com/office/drawing/2014/main" id="{0404C48F-514E-B2D5-B3B1-2A3C01A17B9E}"/>
-              </a:ext>
-            </a:extLst>
-          </p:cNvPr>
-          <p:cNvSpPr>
-            <a:spLocks noGrp="1"/>
-          </p:cNvSpPr>
-          <p:nvPr>
-            <p:ph type="sldNum" sz="quarter" idx="5"/>
-          </p:nvPr>
-        </p:nvSpPr>
-        <p:spPr/>
-        <p:txBody>
-          <a:bodyPr/>
-          <a:lstStyle/>
-          <a:p>
-            <a:fld id="{9583DEA5-E342-4DB2-B087-D0B9C490B19E}" type="slidenum">
-              <a:rPr lang="nl-NL" smtClean="0"/>
-              <a:t>45</a:t>
-            </a:fld>
-            <a:endParaRPr lang="nl-NL"/>
-          </a:p>
-        </p:txBody>
-      </p:sp>
-    </p:spTree>
-    <p:extLst>
-      <p:ext uri="{BB962C8B-B14F-4D97-AF65-F5344CB8AC3E}">
-        <p14:creationId xmlns:p14="http://schemas.microsoft.com/office/powerpoint/2010/main" val="1465545522"/>
       </p:ext>
     </p:extLst>
   </p:cSld>
@@ -4312,6 +4324,114 @@
         <p:cNvPr id="1" name="">
           <a:extLst>
             <a:ext uri="{FF2B5EF4-FFF2-40B4-BE49-F238E27FC236}">
+              <a16:creationId xmlns:a16="http://schemas.microsoft.com/office/drawing/2014/main" id="{C97DD4F4-DA5A-CBF5-7160-C099EA809E7B}"/>
+            </a:ext>
+          </a:extLst>
+        </p:cNvPr>
+        <p:cNvGrpSpPr/>
+        <p:nvPr/>
+      </p:nvGrpSpPr>
+      <p:grpSpPr>
+        <a:xfrm>
+          <a:off x="0" y="0"/>
+          <a:ext cx="0" cy="0"/>
+          <a:chOff x="0" y="0"/>
+          <a:chExt cx="0" cy="0"/>
+        </a:xfrm>
+      </p:grpSpPr>
+      <p:sp>
+        <p:nvSpPr>
+          <p:cNvPr id="2" name="Slide Image Placeholder 1">
+            <a:extLst>
+              <a:ext uri="{FF2B5EF4-FFF2-40B4-BE49-F238E27FC236}">
+                <a16:creationId xmlns:a16="http://schemas.microsoft.com/office/drawing/2014/main" id="{E197FEDE-E4D8-6893-B500-DB2559F8397F}"/>
+              </a:ext>
+            </a:extLst>
+          </p:cNvPr>
+          <p:cNvSpPr>
+            <a:spLocks noGrp="1" noRot="1" noChangeAspect="1"/>
+          </p:cNvSpPr>
+          <p:nvPr>
+            <p:ph type="sldImg"/>
+          </p:nvPr>
+        </p:nvSpPr>
+        <p:spPr/>
+      </p:sp>
+      <p:sp>
+        <p:nvSpPr>
+          <p:cNvPr id="3" name="Notes Placeholder 2">
+            <a:extLst>
+              <a:ext uri="{FF2B5EF4-FFF2-40B4-BE49-F238E27FC236}">
+                <a16:creationId xmlns:a16="http://schemas.microsoft.com/office/drawing/2014/main" id="{CFC62210-D918-2E5E-EC80-A2293F5845EC}"/>
+              </a:ext>
+            </a:extLst>
+          </p:cNvPr>
+          <p:cNvSpPr>
+            <a:spLocks noGrp="1"/>
+          </p:cNvSpPr>
+          <p:nvPr>
+            <p:ph type="body" idx="1"/>
+          </p:nvPr>
+        </p:nvSpPr>
+        <p:spPr/>
+        <p:txBody>
+          <a:bodyPr/>
+          <a:lstStyle/>
+          <a:p>
+            <a:endParaRPr lang="nl-NL" dirty="0"/>
+          </a:p>
+        </p:txBody>
+      </p:sp>
+      <p:sp>
+        <p:nvSpPr>
+          <p:cNvPr id="4" name="Slide Number Placeholder 3">
+            <a:extLst>
+              <a:ext uri="{FF2B5EF4-FFF2-40B4-BE49-F238E27FC236}">
+                <a16:creationId xmlns:a16="http://schemas.microsoft.com/office/drawing/2014/main" id="{0404C48F-514E-B2D5-B3B1-2A3C01A17B9E}"/>
+              </a:ext>
+            </a:extLst>
+          </p:cNvPr>
+          <p:cNvSpPr>
+            <a:spLocks noGrp="1"/>
+          </p:cNvSpPr>
+          <p:nvPr>
+            <p:ph type="sldNum" sz="quarter" idx="5"/>
+          </p:nvPr>
+        </p:nvSpPr>
+        <p:spPr/>
+        <p:txBody>
+          <a:bodyPr/>
+          <a:lstStyle/>
+          <a:p>
+            <a:fld id="{9583DEA5-E342-4DB2-B087-D0B9C490B19E}" type="slidenum">
+              <a:rPr lang="nl-NL" smtClean="0"/>
+              <a:t>46</a:t>
+            </a:fld>
+            <a:endParaRPr lang="nl-NL"/>
+          </a:p>
+        </p:txBody>
+      </p:sp>
+    </p:spTree>
+    <p:extLst>
+      <p:ext uri="{BB962C8B-B14F-4D97-AF65-F5344CB8AC3E}">
+        <p14:creationId xmlns:p14="http://schemas.microsoft.com/office/powerpoint/2010/main" val="1465545522"/>
+      </p:ext>
+    </p:extLst>
+  </p:cSld>
+  <p:clrMapOvr>
+    <a:masterClrMapping/>
+  </p:clrMapOvr>
+</p:notes>
+</file>
+
+<file path=ppt/notesSlides/notesSlide41.xml><?xml version="1.0" encoding="utf-8"?>
+<p:notes xmlns:a="http://schemas.openxmlformats.org/drawingml/2006/main" xmlns:r="http://schemas.openxmlformats.org/officeDocument/2006/relationships" xmlns:p="http://schemas.openxmlformats.org/presentationml/2006/main">
+  <p:cSld>
+    <p:spTree>
+      <p:nvGrpSpPr>
+        <p:cNvPr id="1" name="">
+          <a:extLst>
+            <a:ext uri="{FF2B5EF4-FFF2-40B4-BE49-F238E27FC236}">
               <a16:creationId xmlns:a16="http://schemas.microsoft.com/office/drawing/2014/main" id="{F263B929-5902-A77A-1A34-7A5953D98FA8}"/>
             </a:ext>
           </a:extLst>
@@ -4393,7 +4513,7 @@
           <a:p>
             <a:fld id="{9583DEA5-E342-4DB2-B087-D0B9C490B19E}" type="slidenum">
               <a:rPr lang="nl-NL" smtClean="0"/>
-              <a:t>46</a:t>
+              <a:t>47</a:t>
             </a:fld>
             <a:endParaRPr lang="nl-NL"/>
           </a:p>
@@ -4412,7 +4532,7 @@
 </p:notes>
 </file>
 
-<file path=ppt/notesSlides/notesSlide41.xml><?xml version="1.0" encoding="utf-8"?>
+<file path=ppt/notesSlides/notesSlide42.xml><?xml version="1.0" encoding="utf-8"?>
 <p:notes xmlns:a="http://schemas.openxmlformats.org/drawingml/2006/main" xmlns:r="http://schemas.openxmlformats.org/officeDocument/2006/relationships" xmlns:p="http://schemas.openxmlformats.org/presentationml/2006/main">
   <p:cSld>
     <p:spTree>
@@ -4501,7 +4621,7 @@
           <a:p>
             <a:fld id="{9583DEA5-E342-4DB2-B087-D0B9C490B19E}" type="slidenum">
               <a:rPr lang="nl-NL" smtClean="0"/>
-              <a:t>48</a:t>
+              <a:t>49</a:t>
             </a:fld>
             <a:endParaRPr lang="nl-NL"/>
           </a:p>
@@ -4520,7 +4640,7 @@
 </p:notes>
 </file>
 
-<file path=ppt/notesSlides/notesSlide42.xml><?xml version="1.0" encoding="utf-8"?>
+<file path=ppt/notesSlides/notesSlide43.xml><?xml version="1.0" encoding="utf-8"?>
 <p:notes xmlns:a="http://schemas.openxmlformats.org/drawingml/2006/main" xmlns:r="http://schemas.openxmlformats.org/officeDocument/2006/relationships" xmlns:p="http://schemas.openxmlformats.org/presentationml/2006/main">
   <p:cSld>
     <p:spTree>
@@ -4609,7 +4729,7 @@
           <a:p>
             <a:fld id="{9583DEA5-E342-4DB2-B087-D0B9C490B19E}" type="slidenum">
               <a:rPr lang="nl-NL" smtClean="0"/>
-              <a:t>49</a:t>
+              <a:t>50</a:t>
             </a:fld>
             <a:endParaRPr lang="nl-NL"/>
           </a:p>
@@ -4628,7 +4748,7 @@
 </p:notes>
 </file>
 
-<file path=ppt/notesSlides/notesSlide43.xml><?xml version="1.0" encoding="utf-8"?>
+<file path=ppt/notesSlides/notesSlide44.xml><?xml version="1.0" encoding="utf-8"?>
 <p:notes xmlns:a="http://schemas.openxmlformats.org/drawingml/2006/main" xmlns:r="http://schemas.openxmlformats.org/officeDocument/2006/relationships" xmlns:p="http://schemas.openxmlformats.org/presentationml/2006/main">
   <p:cSld>
     <p:spTree>
@@ -4736,7 +4856,7 @@
           <a:p>
             <a:fld id="{9583DEA5-E342-4DB2-B087-D0B9C490B19E}" type="slidenum">
               <a:rPr lang="nl-NL" smtClean="0"/>
-              <a:t>50</a:t>
+              <a:t>51</a:t>
             </a:fld>
             <a:endParaRPr lang="nl-NL"/>
           </a:p>
@@ -4755,7 +4875,7 @@
 </p:notes>
 </file>
 
-<file path=ppt/notesSlides/notesSlide44.xml><?xml version="1.0" encoding="utf-8"?>
+<file path=ppt/notesSlides/notesSlide45.xml><?xml version="1.0" encoding="utf-8"?>
 <p:notes xmlns:a="http://schemas.openxmlformats.org/drawingml/2006/main" xmlns:r="http://schemas.openxmlformats.org/officeDocument/2006/relationships" xmlns:p="http://schemas.openxmlformats.org/presentationml/2006/main">
   <p:cSld>
     <p:spTree>
@@ -4844,7 +4964,7 @@
           <a:p>
             <a:fld id="{9583DEA5-E342-4DB2-B087-D0B9C490B19E}" type="slidenum">
               <a:rPr lang="nl-NL" smtClean="0"/>
-              <a:t>51</a:t>
+              <a:t>52</a:t>
             </a:fld>
             <a:endParaRPr lang="nl-NL"/>
           </a:p>
@@ -4863,7 +4983,7 @@
 </p:notes>
 </file>
 
-<file path=ppt/notesSlides/notesSlide45.xml><?xml version="1.0" encoding="utf-8"?>
+<file path=ppt/notesSlides/notesSlide46.xml><?xml version="1.0" encoding="utf-8"?>
 <p:notes xmlns:a="http://schemas.openxmlformats.org/drawingml/2006/main" xmlns:r="http://schemas.openxmlformats.org/officeDocument/2006/relationships" xmlns:p="http://schemas.openxmlformats.org/presentationml/2006/main">
   <p:cSld>
     <p:spTree>
@@ -4971,7 +5091,7 @@
           <a:p>
             <a:fld id="{9583DEA5-E342-4DB2-B087-D0B9C490B19E}" type="slidenum">
               <a:rPr lang="nl-NL" smtClean="0"/>
-              <a:t>52</a:t>
+              <a:t>53</a:t>
             </a:fld>
             <a:endParaRPr lang="nl-NL"/>
           </a:p>
@@ -4990,7 +5110,7 @@
 </p:notes>
 </file>
 
-<file path=ppt/notesSlides/notesSlide46.xml><?xml version="1.0" encoding="utf-8"?>
+<file path=ppt/notesSlides/notesSlide47.xml><?xml version="1.0" encoding="utf-8"?>
 <p:notes xmlns:a="http://schemas.openxmlformats.org/drawingml/2006/main" xmlns:r="http://schemas.openxmlformats.org/officeDocument/2006/relationships" xmlns:p="http://schemas.openxmlformats.org/presentationml/2006/main">
   <p:cSld>
     <p:spTree>
@@ -5079,7 +5199,7 @@
           <a:p>
             <a:fld id="{9583DEA5-E342-4DB2-B087-D0B9C490B19E}" type="slidenum">
               <a:rPr lang="nl-NL" smtClean="0"/>
-              <a:t>53</a:t>
+              <a:t>54</a:t>
             </a:fld>
             <a:endParaRPr lang="nl-NL"/>
           </a:p>
@@ -5098,7 +5218,7 @@
 </p:notes>
 </file>
 
-<file path=ppt/notesSlides/notesSlide47.xml><?xml version="1.0" encoding="utf-8"?>
+<file path=ppt/notesSlides/notesSlide48.xml><?xml version="1.0" encoding="utf-8"?>
 <p:notes xmlns:a="http://schemas.openxmlformats.org/drawingml/2006/main" xmlns:r="http://schemas.openxmlformats.org/officeDocument/2006/relationships" xmlns:p="http://schemas.openxmlformats.org/presentationml/2006/main">
   <p:cSld>
     <p:spTree>
@@ -5187,7 +5307,7 @@
           <a:p>
             <a:fld id="{9583DEA5-E342-4DB2-B087-D0B9C490B19E}" type="slidenum">
               <a:rPr lang="nl-NL" smtClean="0"/>
-              <a:t>54</a:t>
+              <a:t>55</a:t>
             </a:fld>
             <a:endParaRPr lang="nl-NL"/>
           </a:p>
@@ -5206,7 +5326,7 @@
 </p:notes>
 </file>
 
-<file path=ppt/notesSlides/notesSlide48.xml><?xml version="1.0" encoding="utf-8"?>
+<file path=ppt/notesSlides/notesSlide49.xml><?xml version="1.0" encoding="utf-8"?>
 <p:notes xmlns:a="http://schemas.openxmlformats.org/drawingml/2006/main" xmlns:r="http://schemas.openxmlformats.org/officeDocument/2006/relationships" xmlns:p="http://schemas.openxmlformats.org/presentationml/2006/main">
   <p:cSld>
     <p:spTree>
@@ -5311,7 +5431,7 @@
           <a:p>
             <a:fld id="{9583DEA5-E342-4DB2-B087-D0B9C490B19E}" type="slidenum">
               <a:rPr lang="nl-NL" smtClean="0"/>
-              <a:t>55</a:t>
+              <a:t>56</a:t>
             </a:fld>
             <a:endParaRPr lang="nl-NL"/>
           </a:p>
@@ -5321,114 +5441,6 @@
     <p:extLst>
       <p:ext uri="{BB962C8B-B14F-4D97-AF65-F5344CB8AC3E}">
         <p14:creationId xmlns:p14="http://schemas.microsoft.com/office/powerpoint/2010/main" val="1555401451"/>
-      </p:ext>
-    </p:extLst>
-  </p:cSld>
-  <p:clrMapOvr>
-    <a:masterClrMapping/>
-  </p:clrMapOvr>
-</p:notes>
-</file>
-
-<file path=ppt/notesSlides/notesSlide49.xml><?xml version="1.0" encoding="utf-8"?>
-<p:notes xmlns:a="http://schemas.openxmlformats.org/drawingml/2006/main" xmlns:r="http://schemas.openxmlformats.org/officeDocument/2006/relationships" xmlns:p="http://schemas.openxmlformats.org/presentationml/2006/main">
-  <p:cSld>
-    <p:spTree>
-      <p:nvGrpSpPr>
-        <p:cNvPr id="1" name="">
-          <a:extLst>
-            <a:ext uri="{FF2B5EF4-FFF2-40B4-BE49-F238E27FC236}">
-              <a16:creationId xmlns:a16="http://schemas.microsoft.com/office/drawing/2014/main" id="{8161237E-7127-B56C-D7F5-7B97A0F2284E}"/>
-            </a:ext>
-          </a:extLst>
-        </p:cNvPr>
-        <p:cNvGrpSpPr/>
-        <p:nvPr/>
-      </p:nvGrpSpPr>
-      <p:grpSpPr>
-        <a:xfrm>
-          <a:off x="0" y="0"/>
-          <a:ext cx="0" cy="0"/>
-          <a:chOff x="0" y="0"/>
-          <a:chExt cx="0" cy="0"/>
-        </a:xfrm>
-      </p:grpSpPr>
-      <p:sp>
-        <p:nvSpPr>
-          <p:cNvPr id="2" name="Slide Image Placeholder 1">
-            <a:extLst>
-              <a:ext uri="{FF2B5EF4-FFF2-40B4-BE49-F238E27FC236}">
-                <a16:creationId xmlns:a16="http://schemas.microsoft.com/office/drawing/2014/main" id="{1AE3EE07-4AC1-E1D2-E90A-B950BDC6F6CB}"/>
-              </a:ext>
-            </a:extLst>
-          </p:cNvPr>
-          <p:cNvSpPr>
-            <a:spLocks noGrp="1" noRot="1" noChangeAspect="1"/>
-          </p:cNvSpPr>
-          <p:nvPr>
-            <p:ph type="sldImg"/>
-          </p:nvPr>
-        </p:nvSpPr>
-        <p:spPr/>
-      </p:sp>
-      <p:sp>
-        <p:nvSpPr>
-          <p:cNvPr id="3" name="Notes Placeholder 2">
-            <a:extLst>
-              <a:ext uri="{FF2B5EF4-FFF2-40B4-BE49-F238E27FC236}">
-                <a16:creationId xmlns:a16="http://schemas.microsoft.com/office/drawing/2014/main" id="{0EED1C42-C167-F4EA-B711-61CBCBE468BF}"/>
-              </a:ext>
-            </a:extLst>
-          </p:cNvPr>
-          <p:cNvSpPr>
-            <a:spLocks noGrp="1"/>
-          </p:cNvSpPr>
-          <p:nvPr>
-            <p:ph type="body" idx="1"/>
-          </p:nvPr>
-        </p:nvSpPr>
-        <p:spPr/>
-        <p:txBody>
-          <a:bodyPr/>
-          <a:lstStyle/>
-          <a:p>
-            <a:endParaRPr lang="nl-NL" dirty="0"/>
-          </a:p>
-        </p:txBody>
-      </p:sp>
-      <p:sp>
-        <p:nvSpPr>
-          <p:cNvPr id="4" name="Slide Number Placeholder 3">
-            <a:extLst>
-              <a:ext uri="{FF2B5EF4-FFF2-40B4-BE49-F238E27FC236}">
-                <a16:creationId xmlns:a16="http://schemas.microsoft.com/office/drawing/2014/main" id="{A825021E-7DB4-D62C-D3F8-3FE0943081CB}"/>
-              </a:ext>
-            </a:extLst>
-          </p:cNvPr>
-          <p:cNvSpPr>
-            <a:spLocks noGrp="1"/>
-          </p:cNvSpPr>
-          <p:nvPr>
-            <p:ph type="sldNum" sz="quarter" idx="5"/>
-          </p:nvPr>
-        </p:nvSpPr>
-        <p:spPr/>
-        <p:txBody>
-          <a:bodyPr/>
-          <a:lstStyle/>
-          <a:p>
-            <a:fld id="{9583DEA5-E342-4DB2-B087-D0B9C490B19E}" type="slidenum">
-              <a:rPr lang="nl-NL" smtClean="0"/>
-              <a:t>56</a:t>
-            </a:fld>
-            <a:endParaRPr lang="nl-NL"/>
-          </a:p>
-        </p:txBody>
-      </p:sp>
-    </p:spTree>
-    <p:extLst>
-      <p:ext uri="{BB962C8B-B14F-4D97-AF65-F5344CB8AC3E}">
-        <p14:creationId xmlns:p14="http://schemas.microsoft.com/office/powerpoint/2010/main" val="2928774410"/>
       </p:ext>
     </p:extLst>
   </p:cSld>
@@ -5554,6 +5566,114 @@
         <p:cNvPr id="1" name="">
           <a:extLst>
             <a:ext uri="{FF2B5EF4-FFF2-40B4-BE49-F238E27FC236}">
+              <a16:creationId xmlns:a16="http://schemas.microsoft.com/office/drawing/2014/main" id="{8161237E-7127-B56C-D7F5-7B97A0F2284E}"/>
+            </a:ext>
+          </a:extLst>
+        </p:cNvPr>
+        <p:cNvGrpSpPr/>
+        <p:nvPr/>
+      </p:nvGrpSpPr>
+      <p:grpSpPr>
+        <a:xfrm>
+          <a:off x="0" y="0"/>
+          <a:ext cx="0" cy="0"/>
+          <a:chOff x="0" y="0"/>
+          <a:chExt cx="0" cy="0"/>
+        </a:xfrm>
+      </p:grpSpPr>
+      <p:sp>
+        <p:nvSpPr>
+          <p:cNvPr id="2" name="Slide Image Placeholder 1">
+            <a:extLst>
+              <a:ext uri="{FF2B5EF4-FFF2-40B4-BE49-F238E27FC236}">
+                <a16:creationId xmlns:a16="http://schemas.microsoft.com/office/drawing/2014/main" id="{1AE3EE07-4AC1-E1D2-E90A-B950BDC6F6CB}"/>
+              </a:ext>
+            </a:extLst>
+          </p:cNvPr>
+          <p:cNvSpPr>
+            <a:spLocks noGrp="1" noRot="1" noChangeAspect="1"/>
+          </p:cNvSpPr>
+          <p:nvPr>
+            <p:ph type="sldImg"/>
+          </p:nvPr>
+        </p:nvSpPr>
+        <p:spPr/>
+      </p:sp>
+      <p:sp>
+        <p:nvSpPr>
+          <p:cNvPr id="3" name="Notes Placeholder 2">
+            <a:extLst>
+              <a:ext uri="{FF2B5EF4-FFF2-40B4-BE49-F238E27FC236}">
+                <a16:creationId xmlns:a16="http://schemas.microsoft.com/office/drawing/2014/main" id="{0EED1C42-C167-F4EA-B711-61CBCBE468BF}"/>
+              </a:ext>
+            </a:extLst>
+          </p:cNvPr>
+          <p:cNvSpPr>
+            <a:spLocks noGrp="1"/>
+          </p:cNvSpPr>
+          <p:nvPr>
+            <p:ph type="body" idx="1"/>
+          </p:nvPr>
+        </p:nvSpPr>
+        <p:spPr/>
+        <p:txBody>
+          <a:bodyPr/>
+          <a:lstStyle/>
+          <a:p>
+            <a:endParaRPr lang="nl-NL" dirty="0"/>
+          </a:p>
+        </p:txBody>
+      </p:sp>
+      <p:sp>
+        <p:nvSpPr>
+          <p:cNvPr id="4" name="Slide Number Placeholder 3">
+            <a:extLst>
+              <a:ext uri="{FF2B5EF4-FFF2-40B4-BE49-F238E27FC236}">
+                <a16:creationId xmlns:a16="http://schemas.microsoft.com/office/drawing/2014/main" id="{A825021E-7DB4-D62C-D3F8-3FE0943081CB}"/>
+              </a:ext>
+            </a:extLst>
+          </p:cNvPr>
+          <p:cNvSpPr>
+            <a:spLocks noGrp="1"/>
+          </p:cNvSpPr>
+          <p:nvPr>
+            <p:ph type="sldNum" sz="quarter" idx="5"/>
+          </p:nvPr>
+        </p:nvSpPr>
+        <p:spPr/>
+        <p:txBody>
+          <a:bodyPr/>
+          <a:lstStyle/>
+          <a:p>
+            <a:fld id="{9583DEA5-E342-4DB2-B087-D0B9C490B19E}" type="slidenum">
+              <a:rPr lang="nl-NL" smtClean="0"/>
+              <a:t>57</a:t>
+            </a:fld>
+            <a:endParaRPr lang="nl-NL"/>
+          </a:p>
+        </p:txBody>
+      </p:sp>
+    </p:spTree>
+    <p:extLst>
+      <p:ext uri="{BB962C8B-B14F-4D97-AF65-F5344CB8AC3E}">
+        <p14:creationId xmlns:p14="http://schemas.microsoft.com/office/powerpoint/2010/main" val="2928774410"/>
+      </p:ext>
+    </p:extLst>
+  </p:cSld>
+  <p:clrMapOvr>
+    <a:masterClrMapping/>
+  </p:clrMapOvr>
+</p:notes>
+</file>
+
+<file path=ppt/notesSlides/notesSlide51.xml><?xml version="1.0" encoding="utf-8"?>
+<p:notes xmlns:a="http://schemas.openxmlformats.org/drawingml/2006/main" xmlns:r="http://schemas.openxmlformats.org/officeDocument/2006/relationships" xmlns:p="http://schemas.openxmlformats.org/presentationml/2006/main">
+  <p:cSld>
+    <p:spTree>
+      <p:nvGrpSpPr>
+        <p:cNvPr id="1" name="">
+          <a:extLst>
+            <a:ext uri="{FF2B5EF4-FFF2-40B4-BE49-F238E27FC236}">
               <a16:creationId xmlns:a16="http://schemas.microsoft.com/office/drawing/2014/main" id="{E42C1340-B2A5-32AB-D379-AC4EE55A29D3}"/>
             </a:ext>
           </a:extLst>
@@ -5635,7 +5755,7 @@
           <a:p>
             <a:fld id="{9583DEA5-E342-4DB2-B087-D0B9C490B19E}" type="slidenum">
               <a:rPr lang="nl-NL" smtClean="0"/>
-              <a:t>57</a:t>
+              <a:t>58</a:t>
             </a:fld>
             <a:endParaRPr lang="nl-NL"/>
           </a:p>
@@ -5654,7 +5774,7 @@
 </p:notes>
 </file>
 
-<file path=ppt/notesSlides/notesSlide51.xml><?xml version="1.0" encoding="utf-8"?>
+<file path=ppt/notesSlides/notesSlide52.xml><?xml version="1.0" encoding="utf-8"?>
 <p:notes xmlns:a="http://schemas.openxmlformats.org/drawingml/2006/main" xmlns:r="http://schemas.openxmlformats.org/officeDocument/2006/relationships" xmlns:p="http://schemas.openxmlformats.org/presentationml/2006/main">
   <p:cSld>
     <p:spTree>
@@ -5743,7 +5863,7 @@
           <a:p>
             <a:fld id="{9583DEA5-E342-4DB2-B087-D0B9C490B19E}" type="slidenum">
               <a:rPr lang="nl-NL" smtClean="0"/>
-              <a:t>58</a:t>
+              <a:t>59</a:t>
             </a:fld>
             <a:endParaRPr lang="nl-NL"/>
           </a:p>
@@ -5762,7 +5882,7 @@
 </p:notes>
 </file>
 
-<file path=ppt/notesSlides/notesSlide52.xml><?xml version="1.0" encoding="utf-8"?>
+<file path=ppt/notesSlides/notesSlide53.xml><?xml version="1.0" encoding="utf-8"?>
 <p:notes xmlns:a="http://schemas.openxmlformats.org/drawingml/2006/main" xmlns:r="http://schemas.openxmlformats.org/officeDocument/2006/relationships" xmlns:p="http://schemas.openxmlformats.org/presentationml/2006/main">
   <p:cSld>
     <p:spTree>
@@ -5851,7 +5971,7 @@
           <a:p>
             <a:fld id="{9583DEA5-E342-4DB2-B087-D0B9C490B19E}" type="slidenum">
               <a:rPr lang="nl-NL" smtClean="0"/>
-              <a:t>59</a:t>
+              <a:t>60</a:t>
             </a:fld>
             <a:endParaRPr lang="nl-NL"/>
           </a:p>
@@ -5870,7 +5990,7 @@
 </p:notes>
 </file>
 
-<file path=ppt/notesSlides/notesSlide53.xml><?xml version="1.0" encoding="utf-8"?>
+<file path=ppt/notesSlides/notesSlide54.xml><?xml version="1.0" encoding="utf-8"?>
 <p:notes xmlns:a="http://schemas.openxmlformats.org/drawingml/2006/main" xmlns:r="http://schemas.openxmlformats.org/officeDocument/2006/relationships" xmlns:p="http://schemas.openxmlformats.org/presentationml/2006/main">
   <p:cSld>
     <p:spTree>
@@ -5959,7 +6079,7 @@
           <a:p>
             <a:fld id="{9583DEA5-E342-4DB2-B087-D0B9C490B19E}" type="slidenum">
               <a:rPr lang="nl-NL" smtClean="0"/>
-              <a:t>61</a:t>
+              <a:t>62</a:t>
             </a:fld>
             <a:endParaRPr lang="nl-NL"/>
           </a:p>
@@ -5978,7 +6098,7 @@
 </p:notes>
 </file>
 
-<file path=ppt/notesSlides/notesSlide54.xml><?xml version="1.0" encoding="utf-8"?>
+<file path=ppt/notesSlides/notesSlide55.xml><?xml version="1.0" encoding="utf-8"?>
 <p:notes xmlns:a="http://schemas.openxmlformats.org/drawingml/2006/main" xmlns:r="http://schemas.openxmlformats.org/officeDocument/2006/relationships" xmlns:p="http://schemas.openxmlformats.org/presentationml/2006/main">
   <p:cSld>
     <p:spTree>
@@ -6067,7 +6187,7 @@
           <a:p>
             <a:fld id="{9583DEA5-E342-4DB2-B087-D0B9C490B19E}" type="slidenum">
               <a:rPr lang="nl-NL" smtClean="0"/>
-              <a:t>62</a:t>
+              <a:t>63</a:t>
             </a:fld>
             <a:endParaRPr lang="nl-NL"/>
           </a:p>
@@ -6086,7 +6206,7 @@
 </p:notes>
 </file>
 
-<file path=ppt/notesSlides/notesSlide55.xml><?xml version="1.0" encoding="utf-8"?>
+<file path=ppt/notesSlides/notesSlide56.xml><?xml version="1.0" encoding="utf-8"?>
 <p:notes xmlns:a="http://schemas.openxmlformats.org/drawingml/2006/main" xmlns:r="http://schemas.openxmlformats.org/officeDocument/2006/relationships" xmlns:p="http://schemas.openxmlformats.org/presentationml/2006/main">
   <p:cSld>
     <p:spTree>
@@ -6175,7 +6295,7 @@
           <a:p>
             <a:fld id="{9583DEA5-E342-4DB2-B087-D0B9C490B19E}" type="slidenum">
               <a:rPr lang="nl-NL" smtClean="0"/>
-              <a:t>63</a:t>
+              <a:t>64</a:t>
             </a:fld>
             <a:endParaRPr lang="nl-NL"/>
           </a:p>
@@ -6194,7 +6314,7 @@
 </p:notes>
 </file>
 
-<file path=ppt/notesSlides/notesSlide56.xml><?xml version="1.0" encoding="utf-8"?>
+<file path=ppt/notesSlides/notesSlide57.xml><?xml version="1.0" encoding="utf-8"?>
 <p:notes xmlns:a="http://schemas.openxmlformats.org/drawingml/2006/main" xmlns:r="http://schemas.openxmlformats.org/officeDocument/2006/relationships" xmlns:p="http://schemas.openxmlformats.org/presentationml/2006/main">
   <p:cSld>
     <p:spTree>
@@ -6283,7 +6403,7 @@
           <a:p>
             <a:fld id="{9583DEA5-E342-4DB2-B087-D0B9C490B19E}" type="slidenum">
               <a:rPr lang="nl-NL" smtClean="0"/>
-              <a:t>64</a:t>
+              <a:t>65</a:t>
             </a:fld>
             <a:endParaRPr lang="nl-NL"/>
           </a:p>
@@ -6302,7 +6422,7 @@
 </p:notes>
 </file>
 
-<file path=ppt/notesSlides/notesSlide57.xml><?xml version="1.0" encoding="utf-8"?>
+<file path=ppt/notesSlides/notesSlide58.xml><?xml version="1.0" encoding="utf-8"?>
 <p:notes xmlns:a="http://schemas.openxmlformats.org/drawingml/2006/main" xmlns:r="http://schemas.openxmlformats.org/officeDocument/2006/relationships" xmlns:p="http://schemas.openxmlformats.org/presentationml/2006/main">
   <p:cSld>
     <p:spTree>
@@ -6407,7 +6527,7 @@
           <a:p>
             <a:fld id="{9583DEA5-E342-4DB2-B087-D0B9C490B19E}" type="slidenum">
               <a:rPr lang="nl-NL" smtClean="0"/>
-              <a:t>65</a:t>
+              <a:t>66</a:t>
             </a:fld>
             <a:endParaRPr lang="nl-NL"/>
           </a:p>
@@ -6426,7 +6546,7 @@
 </p:notes>
 </file>
 
-<file path=ppt/notesSlides/notesSlide58.xml><?xml version="1.0" encoding="utf-8"?>
+<file path=ppt/notesSlides/notesSlide59.xml><?xml version="1.0" encoding="utf-8"?>
 <p:notes xmlns:a="http://schemas.openxmlformats.org/drawingml/2006/main" xmlns:r="http://schemas.openxmlformats.org/officeDocument/2006/relationships" xmlns:p="http://schemas.openxmlformats.org/presentationml/2006/main">
   <p:cSld>
     <p:spTree>
@@ -6515,7 +6635,7 @@
           <a:p>
             <a:fld id="{9583DEA5-E342-4DB2-B087-D0B9C490B19E}" type="slidenum">
               <a:rPr lang="nl-NL" smtClean="0"/>
-              <a:t>66</a:t>
+              <a:t>67</a:t>
             </a:fld>
             <a:endParaRPr lang="nl-NL"/>
           </a:p>
@@ -6525,114 +6645,6 @@
     <p:extLst>
       <p:ext uri="{BB962C8B-B14F-4D97-AF65-F5344CB8AC3E}">
         <p14:creationId xmlns:p14="http://schemas.microsoft.com/office/powerpoint/2010/main" val="1200827474"/>
-      </p:ext>
-    </p:extLst>
-  </p:cSld>
-  <p:clrMapOvr>
-    <a:masterClrMapping/>
-  </p:clrMapOvr>
-</p:notes>
-</file>
-
-<file path=ppt/notesSlides/notesSlide59.xml><?xml version="1.0" encoding="utf-8"?>
-<p:notes xmlns:a="http://schemas.openxmlformats.org/drawingml/2006/main" xmlns:r="http://schemas.openxmlformats.org/officeDocument/2006/relationships" xmlns:p="http://schemas.openxmlformats.org/presentationml/2006/main">
-  <p:cSld>
-    <p:spTree>
-      <p:nvGrpSpPr>
-        <p:cNvPr id="1" name="">
-          <a:extLst>
-            <a:ext uri="{FF2B5EF4-FFF2-40B4-BE49-F238E27FC236}">
-              <a16:creationId xmlns:a16="http://schemas.microsoft.com/office/drawing/2014/main" id="{774018FC-CA76-F3AB-4A5E-B43BD02F1915}"/>
-            </a:ext>
-          </a:extLst>
-        </p:cNvPr>
-        <p:cNvGrpSpPr/>
-        <p:nvPr/>
-      </p:nvGrpSpPr>
-      <p:grpSpPr>
-        <a:xfrm>
-          <a:off x="0" y="0"/>
-          <a:ext cx="0" cy="0"/>
-          <a:chOff x="0" y="0"/>
-          <a:chExt cx="0" cy="0"/>
-        </a:xfrm>
-      </p:grpSpPr>
-      <p:sp>
-        <p:nvSpPr>
-          <p:cNvPr id="2" name="Slide Image Placeholder 1">
-            <a:extLst>
-              <a:ext uri="{FF2B5EF4-FFF2-40B4-BE49-F238E27FC236}">
-                <a16:creationId xmlns:a16="http://schemas.microsoft.com/office/drawing/2014/main" id="{1DF7B44C-4602-78CD-2F49-028137F1681F}"/>
-              </a:ext>
-            </a:extLst>
-          </p:cNvPr>
-          <p:cNvSpPr>
-            <a:spLocks noGrp="1" noRot="1" noChangeAspect="1"/>
-          </p:cNvSpPr>
-          <p:nvPr>
-            <p:ph type="sldImg"/>
-          </p:nvPr>
-        </p:nvSpPr>
-        <p:spPr/>
-      </p:sp>
-      <p:sp>
-        <p:nvSpPr>
-          <p:cNvPr id="3" name="Notes Placeholder 2">
-            <a:extLst>
-              <a:ext uri="{FF2B5EF4-FFF2-40B4-BE49-F238E27FC236}">
-                <a16:creationId xmlns:a16="http://schemas.microsoft.com/office/drawing/2014/main" id="{EF81833A-2923-DA72-96F5-433C9615F23B}"/>
-              </a:ext>
-            </a:extLst>
-          </p:cNvPr>
-          <p:cNvSpPr>
-            <a:spLocks noGrp="1"/>
-          </p:cNvSpPr>
-          <p:nvPr>
-            <p:ph type="body" idx="1"/>
-          </p:nvPr>
-        </p:nvSpPr>
-        <p:spPr/>
-        <p:txBody>
-          <a:bodyPr/>
-          <a:lstStyle/>
-          <a:p>
-            <a:endParaRPr lang="nl-NL" dirty="0"/>
-          </a:p>
-        </p:txBody>
-      </p:sp>
-      <p:sp>
-        <p:nvSpPr>
-          <p:cNvPr id="4" name="Slide Number Placeholder 3">
-            <a:extLst>
-              <a:ext uri="{FF2B5EF4-FFF2-40B4-BE49-F238E27FC236}">
-                <a16:creationId xmlns:a16="http://schemas.microsoft.com/office/drawing/2014/main" id="{5558C38C-32F6-BDB3-B1E6-F9BE95E46DD8}"/>
-              </a:ext>
-            </a:extLst>
-          </p:cNvPr>
-          <p:cNvSpPr>
-            <a:spLocks noGrp="1"/>
-          </p:cNvSpPr>
-          <p:nvPr>
-            <p:ph type="sldNum" sz="quarter" idx="5"/>
-          </p:nvPr>
-        </p:nvSpPr>
-        <p:spPr/>
-        <p:txBody>
-          <a:bodyPr/>
-          <a:lstStyle/>
-          <a:p>
-            <a:fld id="{9583DEA5-E342-4DB2-B087-D0B9C490B19E}" type="slidenum">
-              <a:rPr lang="nl-NL" smtClean="0"/>
-              <a:t>67</a:t>
-            </a:fld>
-            <a:endParaRPr lang="nl-NL"/>
-          </a:p>
-        </p:txBody>
-      </p:sp>
-    </p:spTree>
-    <p:extLst>
-      <p:ext uri="{BB962C8B-B14F-4D97-AF65-F5344CB8AC3E}">
-        <p14:creationId xmlns:p14="http://schemas.microsoft.com/office/powerpoint/2010/main" val="606190696"/>
       </p:ext>
     </p:extLst>
   </p:cSld>
@@ -6741,6 +6753,114 @@
     <p:extLst>
       <p:ext uri="{BB962C8B-B14F-4D97-AF65-F5344CB8AC3E}">
         <p14:creationId xmlns:p14="http://schemas.microsoft.com/office/powerpoint/2010/main" val="2387882785"/>
+      </p:ext>
+    </p:extLst>
+  </p:cSld>
+  <p:clrMapOvr>
+    <a:masterClrMapping/>
+  </p:clrMapOvr>
+</p:notes>
+</file>
+
+<file path=ppt/notesSlides/notesSlide60.xml><?xml version="1.0" encoding="utf-8"?>
+<p:notes xmlns:a="http://schemas.openxmlformats.org/drawingml/2006/main" xmlns:r="http://schemas.openxmlformats.org/officeDocument/2006/relationships" xmlns:p="http://schemas.openxmlformats.org/presentationml/2006/main">
+  <p:cSld>
+    <p:spTree>
+      <p:nvGrpSpPr>
+        <p:cNvPr id="1" name="">
+          <a:extLst>
+            <a:ext uri="{FF2B5EF4-FFF2-40B4-BE49-F238E27FC236}">
+              <a16:creationId xmlns:a16="http://schemas.microsoft.com/office/drawing/2014/main" id="{774018FC-CA76-F3AB-4A5E-B43BD02F1915}"/>
+            </a:ext>
+          </a:extLst>
+        </p:cNvPr>
+        <p:cNvGrpSpPr/>
+        <p:nvPr/>
+      </p:nvGrpSpPr>
+      <p:grpSpPr>
+        <a:xfrm>
+          <a:off x="0" y="0"/>
+          <a:ext cx="0" cy="0"/>
+          <a:chOff x="0" y="0"/>
+          <a:chExt cx="0" cy="0"/>
+        </a:xfrm>
+      </p:grpSpPr>
+      <p:sp>
+        <p:nvSpPr>
+          <p:cNvPr id="2" name="Slide Image Placeholder 1">
+            <a:extLst>
+              <a:ext uri="{FF2B5EF4-FFF2-40B4-BE49-F238E27FC236}">
+                <a16:creationId xmlns:a16="http://schemas.microsoft.com/office/drawing/2014/main" id="{1DF7B44C-4602-78CD-2F49-028137F1681F}"/>
+              </a:ext>
+            </a:extLst>
+          </p:cNvPr>
+          <p:cNvSpPr>
+            <a:spLocks noGrp="1" noRot="1" noChangeAspect="1"/>
+          </p:cNvSpPr>
+          <p:nvPr>
+            <p:ph type="sldImg"/>
+          </p:nvPr>
+        </p:nvSpPr>
+        <p:spPr/>
+      </p:sp>
+      <p:sp>
+        <p:nvSpPr>
+          <p:cNvPr id="3" name="Notes Placeholder 2">
+            <a:extLst>
+              <a:ext uri="{FF2B5EF4-FFF2-40B4-BE49-F238E27FC236}">
+                <a16:creationId xmlns:a16="http://schemas.microsoft.com/office/drawing/2014/main" id="{EF81833A-2923-DA72-96F5-433C9615F23B}"/>
+              </a:ext>
+            </a:extLst>
+          </p:cNvPr>
+          <p:cNvSpPr>
+            <a:spLocks noGrp="1"/>
+          </p:cNvSpPr>
+          <p:nvPr>
+            <p:ph type="body" idx="1"/>
+          </p:nvPr>
+        </p:nvSpPr>
+        <p:spPr/>
+        <p:txBody>
+          <a:bodyPr/>
+          <a:lstStyle/>
+          <a:p>
+            <a:endParaRPr lang="nl-NL" dirty="0"/>
+          </a:p>
+        </p:txBody>
+      </p:sp>
+      <p:sp>
+        <p:nvSpPr>
+          <p:cNvPr id="4" name="Slide Number Placeholder 3">
+            <a:extLst>
+              <a:ext uri="{FF2B5EF4-FFF2-40B4-BE49-F238E27FC236}">
+                <a16:creationId xmlns:a16="http://schemas.microsoft.com/office/drawing/2014/main" id="{5558C38C-32F6-BDB3-B1E6-F9BE95E46DD8}"/>
+              </a:ext>
+            </a:extLst>
+          </p:cNvPr>
+          <p:cNvSpPr>
+            <a:spLocks noGrp="1"/>
+          </p:cNvSpPr>
+          <p:nvPr>
+            <p:ph type="sldNum" sz="quarter" idx="5"/>
+          </p:nvPr>
+        </p:nvSpPr>
+        <p:spPr/>
+        <p:txBody>
+          <a:bodyPr/>
+          <a:lstStyle/>
+          <a:p>
+            <a:fld id="{9583DEA5-E342-4DB2-B087-D0B9C490B19E}" type="slidenum">
+              <a:rPr lang="nl-NL" smtClean="0"/>
+              <a:t>68</a:t>
+            </a:fld>
+            <a:endParaRPr lang="nl-NL"/>
+          </a:p>
+        </p:txBody>
+      </p:sp>
+    </p:spTree>
+    <p:extLst>
+      <p:ext uri="{BB962C8B-B14F-4D97-AF65-F5344CB8AC3E}">
+        <p14:creationId xmlns:p14="http://schemas.microsoft.com/office/powerpoint/2010/main" val="606190696"/>
       </p:ext>
     </p:extLst>
   </p:cSld>
@@ -6974,7 +7094,7 @@
         <p:cNvPr id="1" name="">
           <a:extLst>
             <a:ext uri="{FF2B5EF4-FFF2-40B4-BE49-F238E27FC236}">
-              <a16:creationId xmlns:a16="http://schemas.microsoft.com/office/drawing/2014/main" id="{7ECE5BA3-5B01-FC49-A6E2-C21F670586C2}"/>
+              <a16:creationId xmlns:a16="http://schemas.microsoft.com/office/drawing/2014/main" id="{CA02460F-A03A-9F96-4E97-340E75C2255E}"/>
             </a:ext>
           </a:extLst>
         </p:cNvPr>
@@ -6994,7 +7114,7 @@
           <p:cNvPr id="2" name="Slide Image Placeholder 1">
             <a:extLst>
               <a:ext uri="{FF2B5EF4-FFF2-40B4-BE49-F238E27FC236}">
-                <a16:creationId xmlns:a16="http://schemas.microsoft.com/office/drawing/2014/main" id="{7BB7ADC2-C34D-62F6-65C5-6C7D85E25235}"/>
+                <a16:creationId xmlns:a16="http://schemas.microsoft.com/office/drawing/2014/main" id="{69B08BEA-51E4-3099-8796-56A557BCAF01}"/>
               </a:ext>
             </a:extLst>
           </p:cNvPr>
@@ -7012,7 +7132,7 @@
           <p:cNvPr id="3" name="Notes Placeholder 2">
             <a:extLst>
               <a:ext uri="{FF2B5EF4-FFF2-40B4-BE49-F238E27FC236}">
-                <a16:creationId xmlns:a16="http://schemas.microsoft.com/office/drawing/2014/main" id="{503F7035-9115-EECC-6A6C-440A64DCDA83}"/>
+                <a16:creationId xmlns:a16="http://schemas.microsoft.com/office/drawing/2014/main" id="{6CF65F82-2D06-6A2F-0B75-09A16921754B}"/>
               </a:ext>
             </a:extLst>
           </p:cNvPr>
@@ -7028,18 +7148,7 @@
           <a:bodyPr/>
           <a:lstStyle/>
           <a:p>
-            <a:r>
-              <a:rPr lang="nl-NL" dirty="0"/>
-              <a:t>Demo: </a:t>
-            </a:r>
-            <a:r>
-              <a:rPr lang="nl-NL" dirty="0" err="1"/>
-              <a:t>Create</a:t>
-            </a:r>
-            <a:r>
-              <a:rPr lang="nl-NL" dirty="0"/>
-              <a:t> repository</a:t>
-            </a:r>
+            <a:endParaRPr lang="nl-NL" dirty="0"/>
           </a:p>
         </p:txBody>
       </p:sp>
@@ -7048,7 +7157,7 @@
           <p:cNvPr id="4" name="Slide Number Placeholder 3">
             <a:extLst>
               <a:ext uri="{FF2B5EF4-FFF2-40B4-BE49-F238E27FC236}">
-                <a16:creationId xmlns:a16="http://schemas.microsoft.com/office/drawing/2014/main" id="{BD7A0FD2-729D-4321-2AB7-652B656A9B51}"/>
+                <a16:creationId xmlns:a16="http://schemas.microsoft.com/office/drawing/2014/main" id="{37CE4B35-2BFF-BADB-E446-FB6147F25298}"/>
               </a:ext>
             </a:extLst>
           </p:cNvPr>
@@ -7075,7 +7184,7 @@
     </p:spTree>
     <p:extLst>
       <p:ext uri="{BB962C8B-B14F-4D97-AF65-F5344CB8AC3E}">
-        <p14:creationId xmlns:p14="http://schemas.microsoft.com/office/powerpoint/2010/main" val="72217907"/>
+        <p14:creationId xmlns:p14="http://schemas.microsoft.com/office/powerpoint/2010/main" val="371856556"/>
       </p:ext>
     </p:extLst>
   </p:cSld>
@@ -7234,7 +7343,7 @@
           <a:p>
             <a:fld id="{0EBB069A-003F-4FC0-8534-236B0C5C7B5F}" type="datetimeFigureOut">
               <a:rPr lang="en-NL" smtClean="0"/>
-              <a:t>28/09/2026</a:t>
+              <a:t>29/09/2026</a:t>
             </a:fld>
             <a:endParaRPr lang="en-NL"/>
           </a:p>
@@ -7434,7 +7543,7 @@
           <a:p>
             <a:fld id="{0EBB069A-003F-4FC0-8534-236B0C5C7B5F}" type="datetimeFigureOut">
               <a:rPr lang="en-NL" smtClean="0"/>
-              <a:t>28/09/2026</a:t>
+              <a:t>29/09/2026</a:t>
             </a:fld>
             <a:endParaRPr lang="en-NL"/>
           </a:p>
@@ -7644,7 +7753,7 @@
           <a:p>
             <a:fld id="{0EBB069A-003F-4FC0-8534-236B0C5C7B5F}" type="datetimeFigureOut">
               <a:rPr lang="en-NL" smtClean="0"/>
-              <a:t>28/09/2026</a:t>
+              <a:t>29/09/2026</a:t>
             </a:fld>
             <a:endParaRPr lang="en-NL"/>
           </a:p>
@@ -7844,7 +7953,7 @@
           <a:p>
             <a:fld id="{0EBB069A-003F-4FC0-8534-236B0C5C7B5F}" type="datetimeFigureOut">
               <a:rPr lang="en-NL" smtClean="0"/>
-              <a:t>28/09/2026</a:t>
+              <a:t>29/09/2026</a:t>
             </a:fld>
             <a:endParaRPr lang="en-NL"/>
           </a:p>
@@ -8120,7 +8229,7 @@
           <a:p>
             <a:fld id="{0EBB069A-003F-4FC0-8534-236B0C5C7B5F}" type="datetimeFigureOut">
               <a:rPr lang="en-NL" smtClean="0"/>
-              <a:t>28/09/2026</a:t>
+              <a:t>29/09/2026</a:t>
             </a:fld>
             <a:endParaRPr lang="en-NL"/>
           </a:p>
@@ -8388,7 +8497,7 @@
           <a:p>
             <a:fld id="{0EBB069A-003F-4FC0-8534-236B0C5C7B5F}" type="datetimeFigureOut">
               <a:rPr lang="en-NL" smtClean="0"/>
-              <a:t>28/09/2026</a:t>
+              <a:t>29/09/2026</a:t>
             </a:fld>
             <a:endParaRPr lang="en-NL"/>
           </a:p>
@@ -8803,7 +8912,7 @@
           <a:p>
             <a:fld id="{0EBB069A-003F-4FC0-8534-236B0C5C7B5F}" type="datetimeFigureOut">
               <a:rPr lang="en-NL" smtClean="0"/>
-              <a:t>28/09/2026</a:t>
+              <a:t>29/09/2026</a:t>
             </a:fld>
             <a:endParaRPr lang="en-NL"/>
           </a:p>
@@ -8945,7 +9054,7 @@
           <a:p>
             <a:fld id="{0EBB069A-003F-4FC0-8534-236B0C5C7B5F}" type="datetimeFigureOut">
               <a:rPr lang="en-NL" smtClean="0"/>
-              <a:t>28/09/2026</a:t>
+              <a:t>29/09/2026</a:t>
             </a:fld>
             <a:endParaRPr lang="en-NL"/>
           </a:p>
@@ -9058,7 +9167,7 @@
           <a:p>
             <a:fld id="{0EBB069A-003F-4FC0-8534-236B0C5C7B5F}" type="datetimeFigureOut">
               <a:rPr lang="en-NL" smtClean="0"/>
-              <a:t>28/09/2026</a:t>
+              <a:t>29/09/2026</a:t>
             </a:fld>
             <a:endParaRPr lang="en-NL"/>
           </a:p>
@@ -9371,7 +9480,7 @@
           <a:p>
             <a:fld id="{0EBB069A-003F-4FC0-8534-236B0C5C7B5F}" type="datetimeFigureOut">
               <a:rPr lang="en-NL" smtClean="0"/>
-              <a:t>28/09/2026</a:t>
+              <a:t>29/09/2026</a:t>
             </a:fld>
             <a:endParaRPr lang="en-NL"/>
           </a:p>
@@ -9660,7 +9769,7 @@
           <a:p>
             <a:fld id="{0EBB069A-003F-4FC0-8534-236B0C5C7B5F}" type="datetimeFigureOut">
               <a:rPr lang="en-NL" smtClean="0"/>
-              <a:t>28/09/2026</a:t>
+              <a:t>29/09/2026</a:t>
             </a:fld>
             <a:endParaRPr lang="en-NL"/>
           </a:p>
@@ -9903,7 +10012,7 @@
           <a:p>
             <a:fld id="{0EBB069A-003F-4FC0-8534-236B0C5C7B5F}" type="datetimeFigureOut">
               <a:rPr lang="en-NL" smtClean="0"/>
-              <a:t>28/09/2026</a:t>
+              <a:t>29/09/2026</a:t>
             </a:fld>
             <a:endParaRPr lang="en-NL"/>
           </a:p>
@@ -10367,42 +10476,13 @@
         <p:spPr/>
         <p:txBody>
           <a:bodyPr>
-            <a:normAutofit fontScale="92500" lnSpcReduction="10000"/>
+            <a:normAutofit/>
           </a:bodyPr>
           <a:lstStyle/>
           <a:p>
             <a:r>
               <a:rPr lang="nl-NL" noProof="0" dirty="0"/>
               <a:t>2026</a:t>
-            </a:r>
-          </a:p>
-          <a:p>
-            <a:endParaRPr lang="nl-NL" dirty="0"/>
-          </a:p>
-          <a:p>
-            <a:endParaRPr lang="nl-NL" dirty="0"/>
-          </a:p>
-          <a:p>
-            <a:r>
-              <a:rPr lang="nl-NL" noProof="0" dirty="0">
-                <a:latin typeface="Courier New" panose="02070309020205020404" pitchFamily="49" charset="0"/>
-                <a:cs typeface="Courier New" panose="02070309020205020404" pitchFamily="49" charset="0"/>
-              </a:rPr>
-              <a:t>git </a:t>
-            </a:r>
-            <a:r>
-              <a:rPr lang="nl-NL" noProof="0" dirty="0" err="1">
-                <a:latin typeface="Courier New" panose="02070309020205020404" pitchFamily="49" charset="0"/>
-                <a:cs typeface="Courier New" panose="02070309020205020404" pitchFamily="49" charset="0"/>
-              </a:rPr>
-              <a:t>clone</a:t>
-            </a:r>
-            <a:r>
-              <a:rPr lang="nl-NL" dirty="0">
-                <a:latin typeface="Courier New" panose="02070309020205020404" pitchFamily="49" charset="0"/>
-                <a:cs typeface="Courier New" panose="02070309020205020404" pitchFamily="49" charset="0"/>
-              </a:rPr>
-              <a:t> https://github.com/LFKoning/git-cursus</a:t>
             </a:r>
           </a:p>
         </p:txBody>
@@ -12649,6 +12729,490 @@
 </file>
 
 <file path=ppt/slides/slide13.xml><?xml version="1.0" encoding="utf-8"?>
+<p:sld xmlns:a="http://schemas.openxmlformats.org/drawingml/2006/main" xmlns:r="http://schemas.openxmlformats.org/officeDocument/2006/relationships" xmlns:p="http://schemas.openxmlformats.org/presentationml/2006/main">
+  <p:cSld>
+    <p:spTree>
+      <p:nvGrpSpPr>
+        <p:cNvPr id="1" name="">
+          <a:extLst>
+            <a:ext uri="{FF2B5EF4-FFF2-40B4-BE49-F238E27FC236}">
+              <a16:creationId xmlns:a16="http://schemas.microsoft.com/office/drawing/2014/main" id="{CC73A31E-424F-30D2-E699-493EDA8B21B3}"/>
+            </a:ext>
+          </a:extLst>
+        </p:cNvPr>
+        <p:cNvGrpSpPr/>
+        <p:nvPr/>
+      </p:nvGrpSpPr>
+      <p:grpSpPr>
+        <a:xfrm>
+          <a:off x="0" y="0"/>
+          <a:ext cx="0" cy="0"/>
+          <a:chOff x="0" y="0"/>
+          <a:chExt cx="0" cy="0"/>
+        </a:xfrm>
+      </p:grpSpPr>
+      <p:sp>
+        <p:nvSpPr>
+          <p:cNvPr id="2" name="Title 1">
+            <a:extLst>
+              <a:ext uri="{FF2B5EF4-FFF2-40B4-BE49-F238E27FC236}">
+                <a16:creationId xmlns:a16="http://schemas.microsoft.com/office/drawing/2014/main" id="{70B1BB78-68C9-C021-7442-5ED392D5B91F}"/>
+              </a:ext>
+            </a:extLst>
+          </p:cNvPr>
+          <p:cNvSpPr>
+            <a:spLocks noGrp="1"/>
+          </p:cNvSpPr>
+          <p:nvPr>
+            <p:ph type="title"/>
+          </p:nvPr>
+        </p:nvSpPr>
+        <p:spPr>
+          <a:xfrm>
+            <a:off x="838200" y="365126"/>
+            <a:ext cx="10515600" cy="718608"/>
+          </a:xfrm>
+        </p:spPr>
+        <p:txBody>
+          <a:bodyPr>
+            <a:normAutofit/>
+          </a:bodyPr>
+          <a:lstStyle/>
+          <a:p>
+            <a:r>
+              <a:rPr lang="nl-NL" sz="3600" dirty="0" err="1"/>
+              <a:t>PowerShell</a:t>
+            </a:r>
+            <a:r>
+              <a:rPr lang="nl-NL" sz="3600" dirty="0"/>
+              <a:t> commando's</a:t>
+            </a:r>
+            <a:endParaRPr lang="nl-NL" sz="3600" noProof="0" dirty="0"/>
+          </a:p>
+        </p:txBody>
+      </p:sp>
+      <p:sp>
+        <p:nvSpPr>
+          <p:cNvPr id="19" name="Content Placeholder 2">
+            <a:extLst>
+              <a:ext uri="{FF2B5EF4-FFF2-40B4-BE49-F238E27FC236}">
+                <a16:creationId xmlns:a16="http://schemas.microsoft.com/office/drawing/2014/main" id="{C2829246-DFF7-4428-359C-640C62064FA6}"/>
+              </a:ext>
+            </a:extLst>
+          </p:cNvPr>
+          <p:cNvSpPr>
+            <a:spLocks noGrp="1"/>
+          </p:cNvSpPr>
+          <p:nvPr>
+            <p:ph idx="1"/>
+          </p:nvPr>
+        </p:nvSpPr>
+        <p:spPr>
+          <a:xfrm>
+            <a:off x="838201" y="1456266"/>
+            <a:ext cx="10515600" cy="4923431"/>
+          </a:xfrm>
+        </p:spPr>
+        <p:txBody>
+          <a:bodyPr>
+            <a:noAutofit/>
+          </a:bodyPr>
+          <a:lstStyle/>
+          <a:p>
+            <a:pPr marL="0" indent="0">
+              <a:spcBef>
+                <a:spcPts val="0"/>
+              </a:spcBef>
+              <a:spcAft>
+                <a:spcPts val="600"/>
+              </a:spcAft>
+              <a:buNone/>
+            </a:pPr>
+            <a:r>
+              <a:rPr lang="nl-NL" sz="1800" dirty="0">
+                <a:latin typeface="Courier New" panose="02070309020205020404" pitchFamily="49" charset="0"/>
+                <a:cs typeface="Courier New" panose="02070309020205020404" pitchFamily="49" charset="0"/>
+              </a:rPr>
+              <a:t>cd ~</a:t>
+            </a:r>
+            <a:r>
+              <a:rPr lang="nl-NL" sz="1800" dirty="0">
+                <a:cs typeface="Courier New" panose="02070309020205020404" pitchFamily="49" charset="0"/>
+              </a:rPr>
+              <a:t>					Ga naar folder van de gebruiker.</a:t>
+            </a:r>
+          </a:p>
+          <a:p>
+            <a:pPr marL="0" indent="0">
+              <a:spcBef>
+                <a:spcPts val="0"/>
+              </a:spcBef>
+              <a:spcAft>
+                <a:spcPts val="600"/>
+              </a:spcAft>
+              <a:buNone/>
+            </a:pPr>
+            <a:r>
+              <a:rPr lang="nl-NL" sz="1800" dirty="0">
+                <a:latin typeface="Courier New" panose="02070309020205020404" pitchFamily="49" charset="0"/>
+                <a:cs typeface="Courier New" panose="02070309020205020404" pitchFamily="49" charset="0"/>
+              </a:rPr>
+              <a:t>cd</a:t>
+            </a:r>
+            <a:r>
+              <a:rPr lang="nl-NL" sz="1800" noProof="0" dirty="0">
+                <a:latin typeface="Courier New" panose="02070309020205020404" pitchFamily="49" charset="0"/>
+                <a:cs typeface="Courier New" panose="02070309020205020404" pitchFamily="49" charset="0"/>
+              </a:rPr>
+              <a:t> &lt;folder&gt;</a:t>
+            </a:r>
+            <a:r>
+              <a:rPr lang="nl-NL" sz="1800" noProof="0" dirty="0">
+                <a:cs typeface="Courier New" panose="02070309020205020404" pitchFamily="49" charset="0"/>
+              </a:rPr>
+              <a:t>				Verander werkdirectory naar &lt;folder&gt;.</a:t>
+            </a:r>
+          </a:p>
+          <a:p>
+            <a:pPr marL="0" indent="0">
+              <a:spcBef>
+                <a:spcPts val="0"/>
+              </a:spcBef>
+              <a:spcAft>
+                <a:spcPts val="600"/>
+              </a:spcAft>
+              <a:buNone/>
+            </a:pPr>
+            <a:r>
+              <a:rPr lang="nl-NL" sz="1800" dirty="0">
+                <a:latin typeface="Courier New" panose="02070309020205020404" pitchFamily="49" charset="0"/>
+                <a:cs typeface="Courier New" panose="02070309020205020404" pitchFamily="49" charset="0"/>
+              </a:rPr>
+              <a:t>cd ..</a:t>
+            </a:r>
+            <a:r>
+              <a:rPr lang="nl-NL" sz="1800" dirty="0">
+                <a:cs typeface="Courier New" panose="02070309020205020404" pitchFamily="49" charset="0"/>
+              </a:rPr>
+              <a:t>					Ga naar de bovenliggende folder.</a:t>
+            </a:r>
+          </a:p>
+          <a:p>
+            <a:pPr marL="0" indent="0">
+              <a:spcBef>
+                <a:spcPts val="0"/>
+              </a:spcBef>
+              <a:spcAft>
+                <a:spcPts val="600"/>
+              </a:spcAft>
+              <a:buNone/>
+            </a:pPr>
+            <a:endParaRPr lang="nl-NL" sz="1800" dirty="0">
+              <a:cs typeface="Courier New" panose="02070309020205020404" pitchFamily="49" charset="0"/>
+            </a:endParaRPr>
+          </a:p>
+          <a:p>
+            <a:pPr marL="0" indent="0">
+              <a:spcBef>
+                <a:spcPts val="0"/>
+              </a:spcBef>
+              <a:spcAft>
+                <a:spcPts val="600"/>
+              </a:spcAft>
+              <a:buNone/>
+            </a:pPr>
+            <a:r>
+              <a:rPr lang="nl-NL" sz="1800" dirty="0" err="1">
+                <a:latin typeface="Courier New" panose="02070309020205020404" pitchFamily="49" charset="0"/>
+                <a:cs typeface="Courier New" panose="02070309020205020404" pitchFamily="49" charset="0"/>
+              </a:rPr>
+              <a:t>mkdir</a:t>
+            </a:r>
+            <a:r>
+              <a:rPr lang="nl-NL" sz="1800" dirty="0">
+                <a:latin typeface="Courier New" panose="02070309020205020404" pitchFamily="49" charset="0"/>
+                <a:cs typeface="Courier New" panose="02070309020205020404" pitchFamily="49" charset="0"/>
+              </a:rPr>
+              <a:t> &lt;folder&gt;</a:t>
+            </a:r>
+            <a:r>
+              <a:rPr lang="nl-NL" sz="1800" dirty="0">
+                <a:cs typeface="Courier New" panose="02070309020205020404" pitchFamily="49" charset="0"/>
+              </a:rPr>
+              <a:t>			Maak een folder aan met naam &lt;folder&gt;.</a:t>
+            </a:r>
+          </a:p>
+          <a:p>
+            <a:pPr marL="0" indent="0">
+              <a:spcBef>
+                <a:spcPts val="0"/>
+              </a:spcBef>
+              <a:spcAft>
+                <a:spcPts val="600"/>
+              </a:spcAft>
+              <a:buNone/>
+            </a:pPr>
+            <a:r>
+              <a:rPr lang="nl-NL" sz="1800" dirty="0">
+                <a:latin typeface="Courier New" panose="02070309020205020404" pitchFamily="49" charset="0"/>
+                <a:cs typeface="Courier New" panose="02070309020205020404" pitchFamily="49" charset="0"/>
+              </a:rPr>
+              <a:t>dir</a:t>
+            </a:r>
+            <a:r>
+              <a:rPr lang="nl-NL" sz="1800" dirty="0">
+                <a:cs typeface="Courier New" panose="02070309020205020404" pitchFamily="49" charset="0"/>
+              </a:rPr>
+              <a:t>					Toon alle bestanden in de huidige folder.</a:t>
+            </a:r>
+          </a:p>
+          <a:p>
+            <a:pPr marL="0" indent="0">
+              <a:spcBef>
+                <a:spcPts val="0"/>
+              </a:spcBef>
+              <a:spcAft>
+                <a:spcPts val="600"/>
+              </a:spcAft>
+              <a:buNone/>
+            </a:pPr>
+            <a:r>
+              <a:rPr lang="nl-NL" sz="1800" dirty="0">
+                <a:latin typeface="Courier New" panose="02070309020205020404" pitchFamily="49" charset="0"/>
+                <a:cs typeface="Courier New" panose="02070309020205020404" pitchFamily="49" charset="0"/>
+              </a:rPr>
+              <a:t>dir &lt;folder&gt;</a:t>
+            </a:r>
+            <a:r>
+              <a:rPr lang="nl-NL" sz="1800" dirty="0">
+                <a:cs typeface="Courier New" panose="02070309020205020404" pitchFamily="49" charset="0"/>
+              </a:rPr>
+              <a:t>				Toon alle bestanden in folder &lt;folder&gt;.</a:t>
+            </a:r>
+          </a:p>
+          <a:p>
+            <a:pPr marL="0" indent="0">
+              <a:spcBef>
+                <a:spcPts val="0"/>
+              </a:spcBef>
+              <a:spcAft>
+                <a:spcPts val="600"/>
+              </a:spcAft>
+              <a:buNone/>
+            </a:pPr>
+            <a:endParaRPr lang="nl-NL" sz="1800" dirty="0">
+              <a:latin typeface="Courier New" panose="02070309020205020404" pitchFamily="49" charset="0"/>
+              <a:cs typeface="Courier New" panose="02070309020205020404" pitchFamily="49" charset="0"/>
+            </a:endParaRPr>
+          </a:p>
+          <a:p>
+            <a:pPr marL="0" indent="0">
+              <a:spcBef>
+                <a:spcPts val="0"/>
+              </a:spcBef>
+              <a:spcAft>
+                <a:spcPts val="600"/>
+              </a:spcAft>
+              <a:buNone/>
+            </a:pPr>
+            <a:r>
+              <a:rPr lang="nl-NL" sz="1800" dirty="0" err="1">
+                <a:latin typeface="Courier New" panose="02070309020205020404" pitchFamily="49" charset="0"/>
+                <a:cs typeface="Courier New" panose="02070309020205020404" pitchFamily="49" charset="0"/>
+              </a:rPr>
+              <a:t>cat</a:t>
+            </a:r>
+            <a:r>
+              <a:rPr lang="nl-NL" sz="1800" dirty="0">
+                <a:latin typeface="Courier New" panose="02070309020205020404" pitchFamily="49" charset="0"/>
+                <a:cs typeface="Courier New" panose="02070309020205020404" pitchFamily="49" charset="0"/>
+              </a:rPr>
+              <a:t> &lt;bestand&gt;</a:t>
+            </a:r>
+            <a:r>
+              <a:rPr lang="nl-NL" sz="1800" dirty="0">
+                <a:cs typeface="Courier New" panose="02070309020205020404" pitchFamily="49" charset="0"/>
+              </a:rPr>
+              <a:t>				Print de inhoud van een tekstbestand.</a:t>
+            </a:r>
+          </a:p>
+          <a:p>
+            <a:pPr marL="0" indent="0">
+              <a:spcBef>
+                <a:spcPts val="0"/>
+              </a:spcBef>
+              <a:spcAft>
+                <a:spcPts val="600"/>
+              </a:spcAft>
+              <a:buNone/>
+            </a:pPr>
+            <a:r>
+              <a:rPr lang="nl-NL" sz="1800" dirty="0">
+                <a:latin typeface="Courier New" panose="02070309020205020404" pitchFamily="49" charset="0"/>
+                <a:cs typeface="Courier New" panose="02070309020205020404" pitchFamily="49" charset="0"/>
+              </a:rPr>
+              <a:t>echo &lt;tekst&gt; &gt; &lt;bestand&gt;</a:t>
+            </a:r>
+            <a:r>
+              <a:rPr lang="nl-NL" sz="1800" dirty="0">
+                <a:cs typeface="Courier New" panose="02070309020205020404" pitchFamily="49" charset="0"/>
+              </a:rPr>
+              <a:t>		Sla &lt;tekst&gt; op in bestand &lt;bestand&gt;.</a:t>
+            </a:r>
+          </a:p>
+          <a:p>
+            <a:pPr marL="0" indent="0">
+              <a:spcBef>
+                <a:spcPts val="0"/>
+              </a:spcBef>
+              <a:spcAft>
+                <a:spcPts val="600"/>
+              </a:spcAft>
+              <a:buNone/>
+            </a:pPr>
+            <a:endParaRPr lang="nl-NL" sz="1800" dirty="0">
+              <a:latin typeface="Courier New" panose="02070309020205020404" pitchFamily="49" charset="0"/>
+              <a:cs typeface="Courier New" panose="02070309020205020404" pitchFamily="49" charset="0"/>
+            </a:endParaRPr>
+          </a:p>
+          <a:p>
+            <a:pPr marL="0" indent="0">
+              <a:spcBef>
+                <a:spcPts val="0"/>
+              </a:spcBef>
+              <a:spcAft>
+                <a:spcPts val="600"/>
+              </a:spcAft>
+              <a:buNone/>
+            </a:pPr>
+            <a:endParaRPr lang="nl-NL" sz="1800" dirty="0">
+              <a:latin typeface="Courier New" panose="02070309020205020404" pitchFamily="49" charset="0"/>
+              <a:cs typeface="Courier New" panose="02070309020205020404" pitchFamily="49" charset="0"/>
+            </a:endParaRPr>
+          </a:p>
+          <a:p>
+            <a:pPr marL="0" indent="0" algn="ctr">
+              <a:spcBef>
+                <a:spcPts val="0"/>
+              </a:spcBef>
+              <a:spcAft>
+                <a:spcPts val="600"/>
+              </a:spcAft>
+              <a:buNone/>
+            </a:pPr>
+            <a:r>
+              <a:rPr lang="nl-NL" sz="1800" dirty="0">
+                <a:latin typeface="Courier New" panose="02070309020205020404" pitchFamily="49" charset="0"/>
+                <a:cs typeface="Courier New" panose="02070309020205020404" pitchFamily="49" charset="0"/>
+              </a:rPr>
+              <a:t>$</a:t>
+            </a:r>
+            <a:r>
+              <a:rPr lang="nl-NL" sz="1800" dirty="0" err="1">
+                <a:latin typeface="Courier New" panose="02070309020205020404" pitchFamily="49" charset="0"/>
+                <a:cs typeface="Courier New" panose="02070309020205020404" pitchFamily="49" charset="0"/>
+              </a:rPr>
+              <a:t>PSDefaultParameterValues</a:t>
+            </a:r>
+            <a:r>
+              <a:rPr lang="nl-NL" sz="1800" dirty="0">
+                <a:latin typeface="Courier New" panose="02070309020205020404" pitchFamily="49" charset="0"/>
+                <a:cs typeface="Courier New" panose="02070309020205020404" pitchFamily="49" charset="0"/>
+              </a:rPr>
+              <a:t>['</a:t>
+            </a:r>
+            <a:r>
+              <a:rPr lang="nl-NL" sz="1800" dirty="0" err="1">
+                <a:latin typeface="Courier New" panose="02070309020205020404" pitchFamily="49" charset="0"/>
+                <a:cs typeface="Courier New" panose="02070309020205020404" pitchFamily="49" charset="0"/>
+              </a:rPr>
+              <a:t>Out-File:encoding</a:t>
+            </a:r>
+            <a:r>
+              <a:rPr lang="nl-NL" sz="1800" dirty="0">
+                <a:latin typeface="Courier New" panose="02070309020205020404" pitchFamily="49" charset="0"/>
+                <a:cs typeface="Courier New" panose="02070309020205020404" pitchFamily="49" charset="0"/>
+              </a:rPr>
+              <a:t>'] = 'utf8'</a:t>
+            </a:r>
+          </a:p>
+          <a:p>
+            <a:pPr marL="0" indent="0">
+              <a:spcBef>
+                <a:spcPts val="0"/>
+              </a:spcBef>
+              <a:spcAft>
+                <a:spcPts val="600"/>
+              </a:spcAft>
+              <a:buNone/>
+            </a:pPr>
+            <a:endParaRPr lang="nl-NL" sz="1800" dirty="0">
+              <a:latin typeface="Courier New" panose="02070309020205020404" pitchFamily="49" charset="0"/>
+              <a:cs typeface="Courier New" panose="02070309020205020404" pitchFamily="49" charset="0"/>
+            </a:endParaRPr>
+          </a:p>
+          <a:p>
+            <a:pPr marL="0" indent="0" algn="ctr">
+              <a:spcBef>
+                <a:spcPts val="0"/>
+              </a:spcBef>
+              <a:spcAft>
+                <a:spcPts val="600"/>
+              </a:spcAft>
+              <a:buNone/>
+            </a:pPr>
+            <a:r>
+              <a:rPr lang="nl-NL" sz="1800" dirty="0">
+                <a:latin typeface="Courier New" panose="02070309020205020404" pitchFamily="49" charset="0"/>
+                <a:cs typeface="Courier New" panose="02070309020205020404" pitchFamily="49" charset="0"/>
+              </a:rPr>
+              <a:t>git </a:t>
+            </a:r>
+            <a:r>
+              <a:rPr lang="nl-NL" sz="1800" dirty="0" err="1">
+                <a:latin typeface="Courier New" panose="02070309020205020404" pitchFamily="49" charset="0"/>
+                <a:cs typeface="Courier New" panose="02070309020205020404" pitchFamily="49" charset="0"/>
+              </a:rPr>
+              <a:t>clone</a:t>
+            </a:r>
+            <a:r>
+              <a:rPr lang="nl-NL" sz="1800" dirty="0">
+                <a:latin typeface="Courier New" panose="02070309020205020404" pitchFamily="49" charset="0"/>
+                <a:cs typeface="Courier New" panose="02070309020205020404" pitchFamily="49" charset="0"/>
+              </a:rPr>
+              <a:t> https://github.com/LFKoning/git-cursus</a:t>
+            </a:r>
+          </a:p>
+          <a:p>
+            <a:pPr marL="0" indent="0">
+              <a:spcBef>
+                <a:spcPts val="0"/>
+              </a:spcBef>
+              <a:spcAft>
+                <a:spcPts val="600"/>
+              </a:spcAft>
+              <a:buNone/>
+            </a:pPr>
+            <a:endParaRPr lang="nl-NL" sz="1800" noProof="0" dirty="0">
+              <a:cs typeface="Courier New" panose="02070309020205020404" pitchFamily="49" charset="0"/>
+            </a:endParaRPr>
+          </a:p>
+        </p:txBody>
+      </p:sp>
+    </p:spTree>
+    <p:extLst>
+      <p:ext uri="{BB962C8B-B14F-4D97-AF65-F5344CB8AC3E}">
+        <p14:creationId xmlns:p14="http://schemas.microsoft.com/office/powerpoint/2010/main" val="2366355413"/>
+      </p:ext>
+    </p:extLst>
+  </p:cSld>
+  <p:clrMapOvr>
+    <a:masterClrMapping/>
+  </p:clrMapOvr>
+</p:sld>
+</file>
+
+<file path=ppt/slides/slide14.xml><?xml version="1.0" encoding="utf-8"?>
 <p:sld xmlns:a="http://schemas.openxmlformats.org/drawingml/2006/main" xmlns:r="http://schemas.openxmlformats.org/officeDocument/2006/relationships" xmlns:p="http://schemas.openxmlformats.org/presentationml/2006/main">
   <p:cSld>
     <p:spTree>
@@ -13515,7 +14079,7 @@
 </p:sld>
 </file>
 
-<file path=ppt/slides/slide14.xml><?xml version="1.0" encoding="utf-8"?>
+<file path=ppt/slides/slide15.xml><?xml version="1.0" encoding="utf-8"?>
 <p:sld xmlns:a="http://schemas.openxmlformats.org/drawingml/2006/main" xmlns:r="http://schemas.openxmlformats.org/officeDocument/2006/relationships" xmlns:p="http://schemas.openxmlformats.org/presentationml/2006/main">
   <p:cSld>
     <p:spTree>
@@ -14088,7 +14652,7 @@
 </p:sld>
 </file>
 
-<file path=ppt/slides/slide15.xml><?xml version="1.0" encoding="utf-8"?>
+<file path=ppt/slides/slide16.xml><?xml version="1.0" encoding="utf-8"?>
 <p:sld xmlns:a="http://schemas.openxmlformats.org/drawingml/2006/main" xmlns:r="http://schemas.openxmlformats.org/officeDocument/2006/relationships" xmlns:p="http://schemas.openxmlformats.org/presentationml/2006/main">
   <p:cSld>
     <p:spTree>
@@ -14663,7 +15227,7 @@
 </p:sld>
 </file>
 
-<file path=ppt/slides/slide16.xml><?xml version="1.0" encoding="utf-8"?>
+<file path=ppt/slides/slide17.xml><?xml version="1.0" encoding="utf-8"?>
 <p:sld xmlns:a="http://schemas.openxmlformats.org/drawingml/2006/main" xmlns:r="http://schemas.openxmlformats.org/officeDocument/2006/relationships" xmlns:p="http://schemas.openxmlformats.org/presentationml/2006/main">
   <p:cSld>
     <p:spTree>
@@ -15400,7 +15964,7 @@
 </p:sld>
 </file>
 
-<file path=ppt/slides/slide17.xml><?xml version="1.0" encoding="utf-8"?>
+<file path=ppt/slides/slide18.xml><?xml version="1.0" encoding="utf-8"?>
 <p:sld xmlns:a="http://schemas.openxmlformats.org/drawingml/2006/main" xmlns:r="http://schemas.openxmlformats.org/officeDocument/2006/relationships" xmlns:p="http://schemas.openxmlformats.org/presentationml/2006/main">
   <p:cSld>
     <p:spTree>
@@ -15483,7 +16047,7 @@
 </p:sld>
 </file>
 
-<file path=ppt/slides/slide18.xml><?xml version="1.0" encoding="utf-8"?>
+<file path=ppt/slides/slide19.xml><?xml version="1.0" encoding="utf-8"?>
 <p:sld xmlns:a="http://schemas.openxmlformats.org/drawingml/2006/main" xmlns:r="http://schemas.openxmlformats.org/officeDocument/2006/relationships" xmlns:p="http://schemas.openxmlformats.org/presentationml/2006/main">
   <p:cSld>
     <p:spTree>
@@ -15928,7 +16492,198 @@
 </p:sld>
 </file>
 
-<file path=ppt/slides/slide19.xml><?xml version="1.0" encoding="utf-8"?>
+<file path=ppt/slides/slide2.xml><?xml version="1.0" encoding="utf-8"?>
+<p:sld xmlns:a="http://schemas.openxmlformats.org/drawingml/2006/main" xmlns:r="http://schemas.openxmlformats.org/officeDocument/2006/relationships" xmlns:p="http://schemas.openxmlformats.org/presentationml/2006/main">
+  <p:cSld>
+    <p:spTree>
+      <p:nvGrpSpPr>
+        <p:cNvPr id="1" name=""/>
+        <p:cNvGrpSpPr/>
+        <p:nvPr/>
+      </p:nvGrpSpPr>
+      <p:grpSpPr>
+        <a:xfrm>
+          <a:off x="0" y="0"/>
+          <a:ext cx="0" cy="0"/>
+          <a:chOff x="0" y="0"/>
+          <a:chExt cx="0" cy="0"/>
+        </a:xfrm>
+      </p:grpSpPr>
+      <p:sp>
+        <p:nvSpPr>
+          <p:cNvPr id="2" name="Title 1">
+            <a:extLst>
+              <a:ext uri="{FF2B5EF4-FFF2-40B4-BE49-F238E27FC236}">
+                <a16:creationId xmlns:a16="http://schemas.microsoft.com/office/drawing/2014/main" id="{39A1D606-8DD1-369C-5C09-471CDD551AD5}"/>
+              </a:ext>
+            </a:extLst>
+          </p:cNvPr>
+          <p:cNvSpPr>
+            <a:spLocks noGrp="1"/>
+          </p:cNvSpPr>
+          <p:nvPr>
+            <p:ph type="title"/>
+          </p:nvPr>
+        </p:nvSpPr>
+        <p:spPr>
+          <a:xfrm>
+            <a:off x="838200" y="365126"/>
+            <a:ext cx="10515600" cy="718608"/>
+          </a:xfrm>
+        </p:spPr>
+        <p:txBody>
+          <a:bodyPr>
+            <a:normAutofit/>
+          </a:bodyPr>
+          <a:lstStyle/>
+          <a:p>
+            <a:r>
+              <a:rPr lang="nl-NL" sz="3600" noProof="0" dirty="0"/>
+              <a:t>Agenda</a:t>
+            </a:r>
+          </a:p>
+        </p:txBody>
+      </p:sp>
+      <p:sp>
+        <p:nvSpPr>
+          <p:cNvPr id="3" name="Content Placeholder 2">
+            <a:extLst>
+              <a:ext uri="{FF2B5EF4-FFF2-40B4-BE49-F238E27FC236}">
+                <a16:creationId xmlns:a16="http://schemas.microsoft.com/office/drawing/2014/main" id="{F4C2D286-E049-0AAB-1360-B7157E11AD7E}"/>
+              </a:ext>
+            </a:extLst>
+          </p:cNvPr>
+          <p:cNvSpPr>
+            <a:spLocks noGrp="1"/>
+          </p:cNvSpPr>
+          <p:nvPr>
+            <p:ph idx="1"/>
+          </p:nvPr>
+        </p:nvSpPr>
+        <p:spPr>
+          <a:xfrm>
+            <a:off x="838200" y="1456267"/>
+            <a:ext cx="10515600" cy="4720696"/>
+          </a:xfrm>
+        </p:spPr>
+        <p:txBody>
+          <a:bodyPr>
+            <a:normAutofit/>
+          </a:bodyPr>
+          <a:lstStyle/>
+          <a:p>
+            <a:pPr>
+              <a:spcAft>
+                <a:spcPts val="600"/>
+              </a:spcAft>
+            </a:pPr>
+            <a:r>
+              <a:rPr lang="nl-NL" sz="2000" noProof="0" dirty="0"/>
+              <a:t>Introductie</a:t>
+            </a:r>
+          </a:p>
+          <a:p>
+            <a:pPr>
+              <a:spcAft>
+                <a:spcPts val="600"/>
+              </a:spcAft>
+            </a:pPr>
+            <a:r>
+              <a:rPr lang="nl-NL" sz="2000" dirty="0"/>
+              <a:t>In de praktijk</a:t>
+            </a:r>
+            <a:endParaRPr lang="nl-NL" sz="2000" noProof="0" dirty="0"/>
+          </a:p>
+          <a:p>
+            <a:pPr>
+              <a:spcAft>
+                <a:spcPts val="600"/>
+              </a:spcAft>
+            </a:pPr>
+            <a:r>
+              <a:rPr lang="nl-NL" sz="2000" noProof="0" dirty="0"/>
+              <a:t>Onder de motorkap</a:t>
+            </a:r>
+          </a:p>
+          <a:p>
+            <a:pPr>
+              <a:spcAft>
+                <a:spcPts val="600"/>
+              </a:spcAft>
+            </a:pPr>
+            <a:r>
+              <a:rPr lang="nl-NL" sz="2000" dirty="0"/>
+              <a:t>Wijzigingen beheren</a:t>
+            </a:r>
+          </a:p>
+          <a:p>
+            <a:pPr>
+              <a:spcAft>
+                <a:spcPts val="600"/>
+              </a:spcAft>
+            </a:pPr>
+            <a:r>
+              <a:rPr lang="nl-NL" sz="2000" dirty="0"/>
+              <a:t>Branches</a:t>
+            </a:r>
+          </a:p>
+          <a:p>
+            <a:pPr>
+              <a:spcAft>
+                <a:spcPts val="600"/>
+              </a:spcAft>
+            </a:pPr>
+            <a:r>
+              <a:rPr lang="nl-NL" sz="2000" dirty="0"/>
+              <a:t>Mergen</a:t>
+            </a:r>
+          </a:p>
+        </p:txBody>
+      </p:sp>
+      <p:pic>
+        <p:nvPicPr>
+          <p:cNvPr id="5" name="Picture 4">
+            <a:extLst>
+              <a:ext uri="{FF2B5EF4-FFF2-40B4-BE49-F238E27FC236}">
+                <a16:creationId xmlns:a16="http://schemas.microsoft.com/office/drawing/2014/main" id="{EFD1F773-09F8-033D-B9E0-51794CE193B0}"/>
+              </a:ext>
+            </a:extLst>
+          </p:cNvPr>
+          <p:cNvPicPr>
+            <a:picLocks noChangeAspect="1"/>
+          </p:cNvPicPr>
+          <p:nvPr/>
+        </p:nvPicPr>
+        <p:blipFill>
+          <a:blip r:embed="rId2"/>
+          <a:stretch>
+            <a:fillRect/>
+          </a:stretch>
+        </p:blipFill>
+        <p:spPr>
+          <a:xfrm>
+            <a:off x="7154652" y="1226003"/>
+            <a:ext cx="3491640" cy="4720697"/>
+          </a:xfrm>
+          <a:prstGeom prst="rect">
+            <a:avLst/>
+          </a:prstGeom>
+        </p:spPr>
+      </p:pic>
+    </p:spTree>
+    <p:extLst>
+      <p:ext uri="{BB962C8B-B14F-4D97-AF65-F5344CB8AC3E}">
+        <p14:creationId xmlns:p14="http://schemas.microsoft.com/office/powerpoint/2010/main" val="1265611121"/>
+      </p:ext>
+    </p:extLst>
+  </p:cSld>
+  <p:clrMapOvr>
+    <a:masterClrMapping/>
+  </p:clrMapOvr>
+</p:sld>
+</file>
+
+<file path=ppt/slides/slide20.xml><?xml version="1.0" encoding="utf-8"?>
 <p:sld xmlns:a="http://schemas.openxmlformats.org/drawingml/2006/main" xmlns:r="http://schemas.openxmlformats.org/officeDocument/2006/relationships" xmlns:p="http://schemas.openxmlformats.org/presentationml/2006/main">
   <p:cSld>
     <p:spTree>
@@ -16650,198 +17405,7 @@
 </p:sld>
 </file>
 
-<file path=ppt/slides/slide2.xml><?xml version="1.0" encoding="utf-8"?>
-<p:sld xmlns:a="http://schemas.openxmlformats.org/drawingml/2006/main" xmlns:r="http://schemas.openxmlformats.org/officeDocument/2006/relationships" xmlns:p="http://schemas.openxmlformats.org/presentationml/2006/main">
-  <p:cSld>
-    <p:spTree>
-      <p:nvGrpSpPr>
-        <p:cNvPr id="1" name=""/>
-        <p:cNvGrpSpPr/>
-        <p:nvPr/>
-      </p:nvGrpSpPr>
-      <p:grpSpPr>
-        <a:xfrm>
-          <a:off x="0" y="0"/>
-          <a:ext cx="0" cy="0"/>
-          <a:chOff x="0" y="0"/>
-          <a:chExt cx="0" cy="0"/>
-        </a:xfrm>
-      </p:grpSpPr>
-      <p:sp>
-        <p:nvSpPr>
-          <p:cNvPr id="2" name="Title 1">
-            <a:extLst>
-              <a:ext uri="{FF2B5EF4-FFF2-40B4-BE49-F238E27FC236}">
-                <a16:creationId xmlns:a16="http://schemas.microsoft.com/office/drawing/2014/main" id="{39A1D606-8DD1-369C-5C09-471CDD551AD5}"/>
-              </a:ext>
-            </a:extLst>
-          </p:cNvPr>
-          <p:cNvSpPr>
-            <a:spLocks noGrp="1"/>
-          </p:cNvSpPr>
-          <p:nvPr>
-            <p:ph type="title"/>
-          </p:nvPr>
-        </p:nvSpPr>
-        <p:spPr>
-          <a:xfrm>
-            <a:off x="838200" y="365126"/>
-            <a:ext cx="10515600" cy="718608"/>
-          </a:xfrm>
-        </p:spPr>
-        <p:txBody>
-          <a:bodyPr>
-            <a:normAutofit/>
-          </a:bodyPr>
-          <a:lstStyle/>
-          <a:p>
-            <a:r>
-              <a:rPr lang="nl-NL" sz="3600" noProof="0" dirty="0"/>
-              <a:t>Agenda</a:t>
-            </a:r>
-          </a:p>
-        </p:txBody>
-      </p:sp>
-      <p:sp>
-        <p:nvSpPr>
-          <p:cNvPr id="3" name="Content Placeholder 2">
-            <a:extLst>
-              <a:ext uri="{FF2B5EF4-FFF2-40B4-BE49-F238E27FC236}">
-                <a16:creationId xmlns:a16="http://schemas.microsoft.com/office/drawing/2014/main" id="{F4C2D286-E049-0AAB-1360-B7157E11AD7E}"/>
-              </a:ext>
-            </a:extLst>
-          </p:cNvPr>
-          <p:cNvSpPr>
-            <a:spLocks noGrp="1"/>
-          </p:cNvSpPr>
-          <p:nvPr>
-            <p:ph idx="1"/>
-          </p:nvPr>
-        </p:nvSpPr>
-        <p:spPr>
-          <a:xfrm>
-            <a:off x="838200" y="1456267"/>
-            <a:ext cx="10515600" cy="4720696"/>
-          </a:xfrm>
-        </p:spPr>
-        <p:txBody>
-          <a:bodyPr>
-            <a:normAutofit/>
-          </a:bodyPr>
-          <a:lstStyle/>
-          <a:p>
-            <a:pPr>
-              <a:spcAft>
-                <a:spcPts val="600"/>
-              </a:spcAft>
-            </a:pPr>
-            <a:r>
-              <a:rPr lang="nl-NL" sz="2000" noProof="0" dirty="0"/>
-              <a:t>Introductie</a:t>
-            </a:r>
-          </a:p>
-          <a:p>
-            <a:pPr>
-              <a:spcAft>
-                <a:spcPts val="600"/>
-              </a:spcAft>
-            </a:pPr>
-            <a:r>
-              <a:rPr lang="nl-NL" sz="2000" dirty="0"/>
-              <a:t>In de praktijk</a:t>
-            </a:r>
-            <a:endParaRPr lang="nl-NL" sz="2000" noProof="0" dirty="0"/>
-          </a:p>
-          <a:p>
-            <a:pPr>
-              <a:spcAft>
-                <a:spcPts val="600"/>
-              </a:spcAft>
-            </a:pPr>
-            <a:r>
-              <a:rPr lang="nl-NL" sz="2000" noProof="0" dirty="0"/>
-              <a:t>Onder de motorkap</a:t>
-            </a:r>
-          </a:p>
-          <a:p>
-            <a:pPr>
-              <a:spcAft>
-                <a:spcPts val="600"/>
-              </a:spcAft>
-            </a:pPr>
-            <a:r>
-              <a:rPr lang="nl-NL" sz="2000" dirty="0"/>
-              <a:t>Wijzigingen beheren</a:t>
-            </a:r>
-          </a:p>
-          <a:p>
-            <a:pPr>
-              <a:spcAft>
-                <a:spcPts val="600"/>
-              </a:spcAft>
-            </a:pPr>
-            <a:r>
-              <a:rPr lang="nl-NL" sz="2000" dirty="0"/>
-              <a:t>Branches</a:t>
-            </a:r>
-          </a:p>
-          <a:p>
-            <a:pPr>
-              <a:spcAft>
-                <a:spcPts val="600"/>
-              </a:spcAft>
-            </a:pPr>
-            <a:r>
-              <a:rPr lang="nl-NL" sz="2000" dirty="0"/>
-              <a:t>Mergen</a:t>
-            </a:r>
-          </a:p>
-        </p:txBody>
-      </p:sp>
-      <p:pic>
-        <p:nvPicPr>
-          <p:cNvPr id="5" name="Picture 4">
-            <a:extLst>
-              <a:ext uri="{FF2B5EF4-FFF2-40B4-BE49-F238E27FC236}">
-                <a16:creationId xmlns:a16="http://schemas.microsoft.com/office/drawing/2014/main" id="{EFD1F773-09F8-033D-B9E0-51794CE193B0}"/>
-              </a:ext>
-            </a:extLst>
-          </p:cNvPr>
-          <p:cNvPicPr>
-            <a:picLocks noChangeAspect="1"/>
-          </p:cNvPicPr>
-          <p:nvPr/>
-        </p:nvPicPr>
-        <p:blipFill>
-          <a:blip r:embed="rId2"/>
-          <a:stretch>
-            <a:fillRect/>
-          </a:stretch>
-        </p:blipFill>
-        <p:spPr>
-          <a:xfrm>
-            <a:off x="7154652" y="1226003"/>
-            <a:ext cx="3491640" cy="4720697"/>
-          </a:xfrm>
-          <a:prstGeom prst="rect">
-            <a:avLst/>
-          </a:prstGeom>
-        </p:spPr>
-      </p:pic>
-    </p:spTree>
-    <p:extLst>
-      <p:ext uri="{BB962C8B-B14F-4D97-AF65-F5344CB8AC3E}">
-        <p14:creationId xmlns:p14="http://schemas.microsoft.com/office/powerpoint/2010/main" val="1265611121"/>
-      </p:ext>
-    </p:extLst>
-  </p:cSld>
-  <p:clrMapOvr>
-    <a:masterClrMapping/>
-  </p:clrMapOvr>
-</p:sld>
-</file>
-
-<file path=ppt/slides/slide20.xml><?xml version="1.0" encoding="utf-8"?>
+<file path=ppt/slides/slide21.xml><?xml version="1.0" encoding="utf-8"?>
 <p:sld xmlns:a="http://schemas.openxmlformats.org/drawingml/2006/main" xmlns:r="http://schemas.openxmlformats.org/officeDocument/2006/relationships" xmlns:p="http://schemas.openxmlformats.org/presentationml/2006/main">
   <p:cSld>
     <p:spTree>
@@ -17599,7 +18163,7 @@
 </p:sld>
 </file>
 
-<file path=ppt/slides/slide21.xml><?xml version="1.0" encoding="utf-8"?>
+<file path=ppt/slides/slide22.xml><?xml version="1.0" encoding="utf-8"?>
 <p:sld xmlns:a="http://schemas.openxmlformats.org/drawingml/2006/main" xmlns:r="http://schemas.openxmlformats.org/officeDocument/2006/relationships" xmlns:p="http://schemas.openxmlformats.org/presentationml/2006/main">
   <p:cSld>
     <p:spTree>
@@ -18497,7 +19061,7 @@
 </p:sld>
 </file>
 
-<file path=ppt/slides/slide22.xml><?xml version="1.0" encoding="utf-8"?>
+<file path=ppt/slides/slide23.xml><?xml version="1.0" encoding="utf-8"?>
 <p:sld xmlns:a="http://schemas.openxmlformats.org/drawingml/2006/main" xmlns:r="http://schemas.openxmlformats.org/officeDocument/2006/relationships" xmlns:p="http://schemas.openxmlformats.org/presentationml/2006/main">
   <p:cSld>
     <p:spTree>
@@ -19432,7 +19996,7 @@
 </p:sld>
 </file>
 
-<file path=ppt/slides/slide23.xml><?xml version="1.0" encoding="utf-8"?>
+<file path=ppt/slides/slide24.xml><?xml version="1.0" encoding="utf-8"?>
 <p:sld xmlns:a="http://schemas.openxmlformats.org/drawingml/2006/main" xmlns:r="http://schemas.openxmlformats.org/officeDocument/2006/relationships" xmlns:p="http://schemas.openxmlformats.org/presentationml/2006/main">
   <p:cSld>
     <p:spTree>
@@ -19727,7 +20291,7 @@
 </p:sld>
 </file>
 
-<file path=ppt/slides/slide24.xml><?xml version="1.0" encoding="utf-8"?>
+<file path=ppt/slides/slide25.xml><?xml version="1.0" encoding="utf-8"?>
 <p:sld xmlns:a="http://schemas.openxmlformats.org/drawingml/2006/main" xmlns:r="http://schemas.openxmlformats.org/officeDocument/2006/relationships" xmlns:p="http://schemas.openxmlformats.org/presentationml/2006/main">
   <p:cSld>
     <p:spTree>
@@ -20537,7 +21101,7 @@
 </p:sld>
 </file>
 
-<file path=ppt/slides/slide25.xml><?xml version="1.0" encoding="utf-8"?>
+<file path=ppt/slides/slide26.xml><?xml version="1.0" encoding="utf-8"?>
 <p:sld xmlns:a="http://schemas.openxmlformats.org/drawingml/2006/main" xmlns:r="http://schemas.openxmlformats.org/officeDocument/2006/relationships" xmlns:p="http://schemas.openxmlformats.org/presentationml/2006/main">
   <p:cSld>
     <p:spTree>
@@ -21356,7 +21920,7 @@
 </p:sld>
 </file>
 
-<file path=ppt/slides/slide26.xml><?xml version="1.0" encoding="utf-8"?>
+<file path=ppt/slides/slide27.xml><?xml version="1.0" encoding="utf-8"?>
 <p:sld xmlns:a="http://schemas.openxmlformats.org/drawingml/2006/main" xmlns:r="http://schemas.openxmlformats.org/officeDocument/2006/relationships" xmlns:p="http://schemas.openxmlformats.org/presentationml/2006/main">
   <p:cSld>
     <p:spTree>
@@ -21445,7 +22009,7 @@
 </p:sld>
 </file>
 
-<file path=ppt/slides/slide27.xml><?xml version="1.0" encoding="utf-8"?>
+<file path=ppt/slides/slide28.xml><?xml version="1.0" encoding="utf-8"?>
 <p:sld xmlns:a="http://schemas.openxmlformats.org/drawingml/2006/main" xmlns:r="http://schemas.openxmlformats.org/officeDocument/2006/relationships" xmlns:p="http://schemas.openxmlformats.org/presentationml/2006/main">
   <p:cSld>
     <p:spTree>
@@ -21880,7 +22444,7 @@
 </p:sld>
 </file>
 
-<file path=ppt/slides/slide28.xml><?xml version="1.0" encoding="utf-8"?>
+<file path=ppt/slides/slide29.xml><?xml version="1.0" encoding="utf-8"?>
 <p:sld xmlns:a="http://schemas.openxmlformats.org/drawingml/2006/main" xmlns:r="http://schemas.openxmlformats.org/officeDocument/2006/relationships" xmlns:p="http://schemas.openxmlformats.org/presentationml/2006/main">
   <p:cSld>
     <p:spTree>
@@ -22356,7 +22920,90 @@
 </p:sld>
 </file>
 
-<file path=ppt/slides/slide29.xml><?xml version="1.0" encoding="utf-8"?>
+<file path=ppt/slides/slide3.xml><?xml version="1.0" encoding="utf-8"?>
+<p:sld xmlns:a="http://schemas.openxmlformats.org/drawingml/2006/main" xmlns:r="http://schemas.openxmlformats.org/officeDocument/2006/relationships" xmlns:p="http://schemas.openxmlformats.org/presentationml/2006/main">
+  <p:cSld>
+    <p:spTree>
+      <p:nvGrpSpPr>
+        <p:cNvPr id="1" name=""/>
+        <p:cNvGrpSpPr/>
+        <p:nvPr/>
+      </p:nvGrpSpPr>
+      <p:grpSpPr>
+        <a:xfrm>
+          <a:off x="0" y="0"/>
+          <a:ext cx="0" cy="0"/>
+          <a:chOff x="0" y="0"/>
+          <a:chExt cx="0" cy="0"/>
+        </a:xfrm>
+      </p:grpSpPr>
+      <p:sp>
+        <p:nvSpPr>
+          <p:cNvPr id="4" name="Title 3">
+            <a:extLst>
+              <a:ext uri="{FF2B5EF4-FFF2-40B4-BE49-F238E27FC236}">
+                <a16:creationId xmlns:a16="http://schemas.microsoft.com/office/drawing/2014/main" id="{72C925CA-BCA3-3701-E08E-95652380B32E}"/>
+              </a:ext>
+            </a:extLst>
+          </p:cNvPr>
+          <p:cNvSpPr>
+            <a:spLocks noGrp="1"/>
+          </p:cNvSpPr>
+          <p:nvPr>
+            <p:ph type="title"/>
+          </p:nvPr>
+        </p:nvSpPr>
+        <p:spPr/>
+        <p:txBody>
+          <a:bodyPr/>
+          <a:lstStyle/>
+          <a:p>
+            <a:r>
+              <a:rPr lang="nl-NL" noProof="0" dirty="0"/>
+              <a:t>Introductie</a:t>
+            </a:r>
+          </a:p>
+        </p:txBody>
+      </p:sp>
+      <p:sp>
+        <p:nvSpPr>
+          <p:cNvPr id="5" name="Text Placeholder 4">
+            <a:extLst>
+              <a:ext uri="{FF2B5EF4-FFF2-40B4-BE49-F238E27FC236}">
+                <a16:creationId xmlns:a16="http://schemas.microsoft.com/office/drawing/2014/main" id="{1AB31C95-91AF-DF13-FB58-0DA5F2D9F6F7}"/>
+              </a:ext>
+            </a:extLst>
+          </p:cNvPr>
+          <p:cNvSpPr>
+            <a:spLocks noGrp="1"/>
+          </p:cNvSpPr>
+          <p:nvPr>
+            <p:ph type="body" idx="1"/>
+          </p:nvPr>
+        </p:nvSpPr>
+        <p:spPr/>
+        <p:txBody>
+          <a:bodyPr/>
+          <a:lstStyle/>
+          <a:p>
+            <a:endParaRPr lang="nl-NL" noProof="0" dirty="0"/>
+          </a:p>
+        </p:txBody>
+      </p:sp>
+    </p:spTree>
+    <p:extLst>
+      <p:ext uri="{BB962C8B-B14F-4D97-AF65-F5344CB8AC3E}">
+        <p14:creationId xmlns:p14="http://schemas.microsoft.com/office/powerpoint/2010/main" val="276640083"/>
+      </p:ext>
+    </p:extLst>
+  </p:cSld>
+  <p:clrMapOvr>
+    <a:masterClrMapping/>
+  </p:clrMapOvr>
+</p:sld>
+</file>
+
+<file path=ppt/slides/slide30.xml><?xml version="1.0" encoding="utf-8"?>
 <p:sld xmlns:a="http://schemas.openxmlformats.org/drawingml/2006/main" xmlns:r="http://schemas.openxmlformats.org/officeDocument/2006/relationships" xmlns:p="http://schemas.openxmlformats.org/presentationml/2006/main">
   <p:cSld>
     <p:spTree>
@@ -22581,7 +23228,7 @@
               <a:rPr lang="nl-NL" sz="1800" noProof="0" dirty="0" err="1">
                 <a:cs typeface="Courier New" panose="02070309020205020404" pitchFamily="49" charset="0"/>
               </a:rPr>
-              <a:t>comitten</a:t>
+              <a:t>committen</a:t>
             </a:r>
             <a:r>
               <a:rPr lang="nl-NL" sz="1800" dirty="0">
@@ -22644,90 +23291,7 @@
 </p:sld>
 </file>
 
-<file path=ppt/slides/slide3.xml><?xml version="1.0" encoding="utf-8"?>
-<p:sld xmlns:a="http://schemas.openxmlformats.org/drawingml/2006/main" xmlns:r="http://schemas.openxmlformats.org/officeDocument/2006/relationships" xmlns:p="http://schemas.openxmlformats.org/presentationml/2006/main">
-  <p:cSld>
-    <p:spTree>
-      <p:nvGrpSpPr>
-        <p:cNvPr id="1" name=""/>
-        <p:cNvGrpSpPr/>
-        <p:nvPr/>
-      </p:nvGrpSpPr>
-      <p:grpSpPr>
-        <a:xfrm>
-          <a:off x="0" y="0"/>
-          <a:ext cx="0" cy="0"/>
-          <a:chOff x="0" y="0"/>
-          <a:chExt cx="0" cy="0"/>
-        </a:xfrm>
-      </p:grpSpPr>
-      <p:sp>
-        <p:nvSpPr>
-          <p:cNvPr id="4" name="Title 3">
-            <a:extLst>
-              <a:ext uri="{FF2B5EF4-FFF2-40B4-BE49-F238E27FC236}">
-                <a16:creationId xmlns:a16="http://schemas.microsoft.com/office/drawing/2014/main" id="{72C925CA-BCA3-3701-E08E-95652380B32E}"/>
-              </a:ext>
-            </a:extLst>
-          </p:cNvPr>
-          <p:cNvSpPr>
-            <a:spLocks noGrp="1"/>
-          </p:cNvSpPr>
-          <p:nvPr>
-            <p:ph type="title"/>
-          </p:nvPr>
-        </p:nvSpPr>
-        <p:spPr/>
-        <p:txBody>
-          <a:bodyPr/>
-          <a:lstStyle/>
-          <a:p>
-            <a:r>
-              <a:rPr lang="nl-NL" noProof="0" dirty="0"/>
-              <a:t>Introductie</a:t>
-            </a:r>
-          </a:p>
-        </p:txBody>
-      </p:sp>
-      <p:sp>
-        <p:nvSpPr>
-          <p:cNvPr id="5" name="Text Placeholder 4">
-            <a:extLst>
-              <a:ext uri="{FF2B5EF4-FFF2-40B4-BE49-F238E27FC236}">
-                <a16:creationId xmlns:a16="http://schemas.microsoft.com/office/drawing/2014/main" id="{1AB31C95-91AF-DF13-FB58-0DA5F2D9F6F7}"/>
-              </a:ext>
-            </a:extLst>
-          </p:cNvPr>
-          <p:cNvSpPr>
-            <a:spLocks noGrp="1"/>
-          </p:cNvSpPr>
-          <p:nvPr>
-            <p:ph type="body" idx="1"/>
-          </p:nvPr>
-        </p:nvSpPr>
-        <p:spPr/>
-        <p:txBody>
-          <a:bodyPr/>
-          <a:lstStyle/>
-          <a:p>
-            <a:endParaRPr lang="nl-NL" noProof="0" dirty="0"/>
-          </a:p>
-        </p:txBody>
-      </p:sp>
-    </p:spTree>
-    <p:extLst>
-      <p:ext uri="{BB962C8B-B14F-4D97-AF65-F5344CB8AC3E}">
-        <p14:creationId xmlns:p14="http://schemas.microsoft.com/office/powerpoint/2010/main" val="276640083"/>
-      </p:ext>
-    </p:extLst>
-  </p:cSld>
-  <p:clrMapOvr>
-    <a:masterClrMapping/>
-  </p:clrMapOvr>
-</p:sld>
-</file>
-
-<file path=ppt/slides/slide30.xml><?xml version="1.0" encoding="utf-8"?>
+<file path=ppt/slides/slide31.xml><?xml version="1.0" encoding="utf-8"?>
 <p:sld xmlns:a="http://schemas.openxmlformats.org/drawingml/2006/main" xmlns:r="http://schemas.openxmlformats.org/officeDocument/2006/relationships" xmlns:p="http://schemas.openxmlformats.org/presentationml/2006/main">
   <p:cSld>
     <p:spTree>
@@ -23055,7 +23619,7 @@
 </p:sld>
 </file>
 
-<file path=ppt/slides/slide31.xml><?xml version="1.0" encoding="utf-8"?>
+<file path=ppt/slides/slide32.xml><?xml version="1.0" encoding="utf-8"?>
 <p:sld xmlns:a="http://schemas.openxmlformats.org/drawingml/2006/main" xmlns:r="http://schemas.openxmlformats.org/officeDocument/2006/relationships" xmlns:p="http://schemas.openxmlformats.org/presentationml/2006/main">
   <p:cSld>
     <p:spTree>
@@ -23383,7 +23947,7 @@
 </p:sld>
 </file>
 
-<file path=ppt/slides/slide32.xml><?xml version="1.0" encoding="utf-8"?>
+<file path=ppt/slides/slide33.xml><?xml version="1.0" encoding="utf-8"?>
 <p:sld xmlns:a="http://schemas.openxmlformats.org/drawingml/2006/main" xmlns:r="http://schemas.openxmlformats.org/officeDocument/2006/relationships" xmlns:p="http://schemas.openxmlformats.org/presentationml/2006/main">
   <p:cSld>
     <p:spTree>
@@ -23472,7 +24036,7 @@
 </p:sld>
 </file>
 
-<file path=ppt/slides/slide33.xml><?xml version="1.0" encoding="utf-8"?>
+<file path=ppt/slides/slide34.xml><?xml version="1.0" encoding="utf-8"?>
 <p:sld xmlns:a="http://schemas.openxmlformats.org/drawingml/2006/main" xmlns:r="http://schemas.openxmlformats.org/officeDocument/2006/relationships" xmlns:p="http://schemas.openxmlformats.org/presentationml/2006/main">
   <p:cSld>
     <p:spTree>
@@ -23850,7 +24414,7 @@
 </p:sld>
 </file>
 
-<file path=ppt/slides/slide34.xml><?xml version="1.0" encoding="utf-8"?>
+<file path=ppt/slides/slide35.xml><?xml version="1.0" encoding="utf-8"?>
 <p:sld xmlns:a="http://schemas.openxmlformats.org/drawingml/2006/main" xmlns:r="http://schemas.openxmlformats.org/officeDocument/2006/relationships" xmlns:p="http://schemas.openxmlformats.org/presentationml/2006/main">
   <p:cSld>
     <p:spTree>
@@ -24205,7 +24769,7 @@
 </p:sld>
 </file>
 
-<file path=ppt/slides/slide35.xml><?xml version="1.0" encoding="utf-8"?>
+<file path=ppt/slides/slide36.xml><?xml version="1.0" encoding="utf-8"?>
 <p:sld xmlns:a="http://schemas.openxmlformats.org/drawingml/2006/main" xmlns:r="http://schemas.openxmlformats.org/officeDocument/2006/relationships" xmlns:p="http://schemas.openxmlformats.org/presentationml/2006/main">
   <p:cSld>
     <p:spTree>
@@ -24702,7 +25266,7 @@
 </p:sld>
 </file>
 
-<file path=ppt/slides/slide36.xml><?xml version="1.0" encoding="utf-8"?>
+<file path=ppt/slides/slide37.xml><?xml version="1.0" encoding="utf-8"?>
 <p:sld xmlns:a="http://schemas.openxmlformats.org/drawingml/2006/main" xmlns:r="http://schemas.openxmlformats.org/officeDocument/2006/relationships" xmlns:p="http://schemas.openxmlformats.org/presentationml/2006/main">
   <p:cSld>
     <p:spTree>
@@ -25273,7 +25837,7 @@
 </p:sld>
 </file>
 
-<file path=ppt/slides/slide37.xml><?xml version="1.0" encoding="utf-8"?>
+<file path=ppt/slides/slide38.xml><?xml version="1.0" encoding="utf-8"?>
 <p:sld xmlns:a="http://schemas.openxmlformats.org/drawingml/2006/main" xmlns:r="http://schemas.openxmlformats.org/officeDocument/2006/relationships" xmlns:p="http://schemas.openxmlformats.org/presentationml/2006/main">
   <p:cSld>
     <p:spTree>
@@ -25955,7 +26519,7 @@
 </p:sld>
 </file>
 
-<file path=ppt/slides/slide38.xml><?xml version="1.0" encoding="utf-8"?>
+<file path=ppt/slides/slide39.xml><?xml version="1.0" encoding="utf-8"?>
 <p:sld xmlns:a="http://schemas.openxmlformats.org/drawingml/2006/main" xmlns:r="http://schemas.openxmlformats.org/officeDocument/2006/relationships" xmlns:p="http://schemas.openxmlformats.org/presentationml/2006/main">
   <p:cSld>
     <p:spTree>
@@ -26677,7 +27241,281 @@
 </p:sld>
 </file>
 
-<file path=ppt/slides/slide39.xml><?xml version="1.0" encoding="utf-8"?>
+<file path=ppt/slides/slide4.xml><?xml version="1.0" encoding="utf-8"?>
+<p:sld xmlns:a="http://schemas.openxmlformats.org/drawingml/2006/main" xmlns:r="http://schemas.openxmlformats.org/officeDocument/2006/relationships" xmlns:p="http://schemas.openxmlformats.org/presentationml/2006/main">
+  <p:cSld>
+    <p:spTree>
+      <p:nvGrpSpPr>
+        <p:cNvPr id="1" name=""/>
+        <p:cNvGrpSpPr/>
+        <p:nvPr/>
+      </p:nvGrpSpPr>
+      <p:grpSpPr>
+        <a:xfrm>
+          <a:off x="0" y="0"/>
+          <a:ext cx="0" cy="0"/>
+          <a:chOff x="0" y="0"/>
+          <a:chExt cx="0" cy="0"/>
+        </a:xfrm>
+      </p:grpSpPr>
+      <p:sp>
+        <p:nvSpPr>
+          <p:cNvPr id="2" name="Title 1">
+            <a:extLst>
+              <a:ext uri="{FF2B5EF4-FFF2-40B4-BE49-F238E27FC236}">
+                <a16:creationId xmlns:a16="http://schemas.microsoft.com/office/drawing/2014/main" id="{39A1D606-8DD1-369C-5C09-471CDD551AD5}"/>
+              </a:ext>
+            </a:extLst>
+          </p:cNvPr>
+          <p:cNvSpPr>
+            <a:spLocks noGrp="1"/>
+          </p:cNvSpPr>
+          <p:nvPr>
+            <p:ph type="title"/>
+          </p:nvPr>
+        </p:nvSpPr>
+        <p:spPr>
+          <a:xfrm>
+            <a:off x="838200" y="365126"/>
+            <a:ext cx="10515600" cy="718608"/>
+          </a:xfrm>
+        </p:spPr>
+        <p:txBody>
+          <a:bodyPr>
+            <a:normAutofit/>
+          </a:bodyPr>
+          <a:lstStyle/>
+          <a:p>
+            <a:r>
+              <a:rPr lang="nl-NL" sz="3600" noProof="0" dirty="0"/>
+              <a:t>Wat is git?</a:t>
+            </a:r>
+          </a:p>
+        </p:txBody>
+      </p:sp>
+      <p:sp>
+        <p:nvSpPr>
+          <p:cNvPr id="3" name="Content Placeholder 2">
+            <a:extLst>
+              <a:ext uri="{FF2B5EF4-FFF2-40B4-BE49-F238E27FC236}">
+                <a16:creationId xmlns:a16="http://schemas.microsoft.com/office/drawing/2014/main" id="{F4C2D286-E049-0AAB-1360-B7157E11AD7E}"/>
+              </a:ext>
+            </a:extLst>
+          </p:cNvPr>
+          <p:cNvSpPr>
+            <a:spLocks noGrp="1"/>
+          </p:cNvSpPr>
+          <p:nvPr>
+            <p:ph idx="1"/>
+          </p:nvPr>
+        </p:nvSpPr>
+        <p:spPr>
+          <a:xfrm>
+            <a:off x="838200" y="1456267"/>
+            <a:ext cx="6076406" cy="4720696"/>
+          </a:xfrm>
+        </p:spPr>
+        <p:txBody>
+          <a:bodyPr>
+            <a:normAutofit/>
+          </a:bodyPr>
+          <a:lstStyle/>
+          <a:p>
+            <a:pPr>
+              <a:buFontTx/>
+              <a:buChar char="-"/>
+            </a:pPr>
+            <a:r>
+              <a:rPr lang="nl-NL" sz="1800" noProof="0" dirty="0">
+                <a:cs typeface="Courier New" panose="02070309020205020404" pitchFamily="49" charset="0"/>
+              </a:rPr>
+              <a:t>Systeem om versies te beheren.</a:t>
+            </a:r>
+          </a:p>
+          <a:p>
+            <a:pPr>
+              <a:buFontTx/>
+              <a:buChar char="-"/>
+            </a:pPr>
+            <a:endParaRPr lang="nl-NL" sz="1800" noProof="0" dirty="0">
+              <a:cs typeface="Courier New" panose="02070309020205020404" pitchFamily="49" charset="0"/>
+            </a:endParaRPr>
+          </a:p>
+          <a:p>
+            <a:pPr>
+              <a:buFontTx/>
+              <a:buChar char="-"/>
+            </a:pPr>
+            <a:r>
+              <a:rPr lang="nl-NL" sz="1800" noProof="0" dirty="0">
+                <a:cs typeface="Courier New" panose="02070309020205020404" pitchFamily="49" charset="0"/>
+              </a:rPr>
+              <a:t>Versies </a:t>
+            </a:r>
+            <a:r>
+              <a:rPr lang="nl-NL" sz="1800" u="sng" noProof="0" dirty="0">
+                <a:cs typeface="Courier New" panose="02070309020205020404" pitchFamily="49" charset="0"/>
+              </a:rPr>
+              <a:t>handmatig</a:t>
+            </a:r>
+            <a:r>
+              <a:rPr lang="nl-NL" sz="1800" noProof="0" dirty="0">
+                <a:cs typeface="Courier New" panose="02070309020205020404" pitchFamily="49" charset="0"/>
+              </a:rPr>
+              <a:t> vastgelegd op </a:t>
+            </a:r>
+            <a:r>
+              <a:rPr lang="nl-NL" sz="1800" u="sng" noProof="0" dirty="0">
+                <a:cs typeface="Courier New" panose="02070309020205020404" pitchFamily="49" charset="0"/>
+              </a:rPr>
+              <a:t>tijdslijnen</a:t>
+            </a:r>
+            <a:r>
+              <a:rPr lang="nl-NL" sz="1800" noProof="0" dirty="0">
+                <a:cs typeface="Courier New" panose="02070309020205020404" pitchFamily="49" charset="0"/>
+              </a:rPr>
+              <a:t>.</a:t>
+            </a:r>
+          </a:p>
+          <a:p>
+            <a:pPr>
+              <a:buFontTx/>
+              <a:buChar char="-"/>
+            </a:pPr>
+            <a:endParaRPr lang="nl-NL" sz="1800" noProof="0" dirty="0">
+              <a:cs typeface="Courier New" panose="02070309020205020404" pitchFamily="49" charset="0"/>
+            </a:endParaRPr>
+          </a:p>
+          <a:p>
+            <a:pPr>
+              <a:buFontTx/>
+              <a:buChar char="-"/>
+            </a:pPr>
+            <a:r>
+              <a:rPr lang="nl-NL" sz="1800" noProof="0" dirty="0">
+                <a:cs typeface="Courier New" panose="02070309020205020404" pitchFamily="49" charset="0"/>
+              </a:rPr>
+              <a:t>Vooral geschikt voor t</a:t>
+            </a:r>
+            <a:r>
+              <a:rPr lang="nl-NL" sz="1800" u="sng" noProof="0" dirty="0">
+                <a:cs typeface="Courier New" panose="02070309020205020404" pitchFamily="49" charset="0"/>
+              </a:rPr>
+              <a:t>ekstbestanden</a:t>
+            </a:r>
+            <a:r>
+              <a:rPr lang="nl-NL" sz="1800" noProof="0" dirty="0">
+                <a:cs typeface="Courier New" panose="02070309020205020404" pitchFamily="49" charset="0"/>
+              </a:rPr>
+              <a:t>.</a:t>
+            </a:r>
+          </a:p>
+          <a:p>
+            <a:pPr>
+              <a:buFontTx/>
+              <a:buChar char="-"/>
+            </a:pPr>
+            <a:endParaRPr lang="nl-NL" sz="1800" u="sng" noProof="0" dirty="0">
+              <a:cs typeface="Courier New" panose="02070309020205020404" pitchFamily="49" charset="0"/>
+            </a:endParaRPr>
+          </a:p>
+          <a:p>
+            <a:pPr>
+              <a:buFontTx/>
+              <a:buChar char="-"/>
+            </a:pPr>
+            <a:r>
+              <a:rPr lang="nl-NL" sz="1800" noProof="0" dirty="0">
+                <a:cs typeface="Courier New" panose="02070309020205020404" pitchFamily="49" charset="0"/>
+              </a:rPr>
+              <a:t>Data </a:t>
+            </a:r>
+            <a:r>
+              <a:rPr lang="nl-NL" sz="1800" u="sng" noProof="0" dirty="0">
+                <a:cs typeface="Courier New" panose="02070309020205020404" pitchFamily="49" charset="0"/>
+              </a:rPr>
+              <a:t>integriteit</a:t>
+            </a:r>
+            <a:r>
+              <a:rPr lang="nl-NL" sz="1800" noProof="0" dirty="0">
+                <a:cs typeface="Courier New" panose="02070309020205020404" pitchFamily="49" charset="0"/>
+              </a:rPr>
+              <a:t> ingebouwd in het systeem.</a:t>
+            </a:r>
+          </a:p>
+          <a:p>
+            <a:pPr>
+              <a:buFontTx/>
+              <a:buChar char="-"/>
+            </a:pPr>
+            <a:endParaRPr lang="nl-NL" sz="1800" u="sng" noProof="0" dirty="0">
+              <a:cs typeface="Courier New" panose="02070309020205020404" pitchFamily="49" charset="0"/>
+            </a:endParaRPr>
+          </a:p>
+          <a:p>
+            <a:pPr>
+              <a:buFontTx/>
+              <a:buChar char="-"/>
+            </a:pPr>
+            <a:r>
+              <a:rPr lang="nl-NL" sz="1800" u="sng" noProof="0" dirty="0">
+                <a:cs typeface="Courier New" panose="02070309020205020404" pitchFamily="49" charset="0"/>
+              </a:rPr>
+              <a:t>Gedistribueerd</a:t>
+            </a:r>
+            <a:r>
+              <a:rPr lang="nl-NL" sz="1800" noProof="0" dirty="0">
+                <a:cs typeface="Courier New" panose="02070309020205020404" pitchFamily="49" charset="0"/>
+              </a:rPr>
+              <a:t>; versies zijn eenvoudig te delen.</a:t>
+            </a:r>
+          </a:p>
+        </p:txBody>
+      </p:sp>
+      <p:pic>
+        <p:nvPicPr>
+          <p:cNvPr id="9" name="Picture 8">
+            <a:extLst>
+              <a:ext uri="{FF2B5EF4-FFF2-40B4-BE49-F238E27FC236}">
+                <a16:creationId xmlns:a16="http://schemas.microsoft.com/office/drawing/2014/main" id="{04E3E376-AEDC-68AE-167D-F19AD78B9A90}"/>
+              </a:ext>
+            </a:extLst>
+          </p:cNvPr>
+          <p:cNvPicPr>
+            <a:picLocks noChangeAspect="1"/>
+          </p:cNvPicPr>
+          <p:nvPr/>
+        </p:nvPicPr>
+        <p:blipFill>
+          <a:blip r:embed="rId3"/>
+          <a:stretch>
+            <a:fillRect/>
+          </a:stretch>
+        </p:blipFill>
+        <p:spPr>
+          <a:xfrm>
+            <a:off x="8142515" y="1083734"/>
+            <a:ext cx="2967446" cy="4597293"/>
+          </a:xfrm>
+          <a:prstGeom prst="rect">
+            <a:avLst/>
+          </a:prstGeom>
+        </p:spPr>
+      </p:pic>
+    </p:spTree>
+    <p:extLst>
+      <p:ext uri="{BB962C8B-B14F-4D97-AF65-F5344CB8AC3E}">
+        <p14:creationId xmlns:p14="http://schemas.microsoft.com/office/powerpoint/2010/main" val="3018676715"/>
+      </p:ext>
+    </p:extLst>
+  </p:cSld>
+  <p:clrMapOvr>
+    <a:masterClrMapping/>
+  </p:clrMapOvr>
+</p:sld>
+</file>
+
+<file path=ppt/slides/slide40.xml><?xml version="1.0" encoding="utf-8"?>
 <p:sld xmlns:a="http://schemas.openxmlformats.org/drawingml/2006/main" xmlns:r="http://schemas.openxmlformats.org/officeDocument/2006/relationships" xmlns:p="http://schemas.openxmlformats.org/presentationml/2006/main">
   <p:cSld>
     <p:spTree>
@@ -27385,281 +28223,7 @@
 </p:sld>
 </file>
 
-<file path=ppt/slides/slide4.xml><?xml version="1.0" encoding="utf-8"?>
-<p:sld xmlns:a="http://schemas.openxmlformats.org/drawingml/2006/main" xmlns:r="http://schemas.openxmlformats.org/officeDocument/2006/relationships" xmlns:p="http://schemas.openxmlformats.org/presentationml/2006/main">
-  <p:cSld>
-    <p:spTree>
-      <p:nvGrpSpPr>
-        <p:cNvPr id="1" name=""/>
-        <p:cNvGrpSpPr/>
-        <p:nvPr/>
-      </p:nvGrpSpPr>
-      <p:grpSpPr>
-        <a:xfrm>
-          <a:off x="0" y="0"/>
-          <a:ext cx="0" cy="0"/>
-          <a:chOff x="0" y="0"/>
-          <a:chExt cx="0" cy="0"/>
-        </a:xfrm>
-      </p:grpSpPr>
-      <p:sp>
-        <p:nvSpPr>
-          <p:cNvPr id="2" name="Title 1">
-            <a:extLst>
-              <a:ext uri="{FF2B5EF4-FFF2-40B4-BE49-F238E27FC236}">
-                <a16:creationId xmlns:a16="http://schemas.microsoft.com/office/drawing/2014/main" id="{39A1D606-8DD1-369C-5C09-471CDD551AD5}"/>
-              </a:ext>
-            </a:extLst>
-          </p:cNvPr>
-          <p:cNvSpPr>
-            <a:spLocks noGrp="1"/>
-          </p:cNvSpPr>
-          <p:nvPr>
-            <p:ph type="title"/>
-          </p:nvPr>
-        </p:nvSpPr>
-        <p:spPr>
-          <a:xfrm>
-            <a:off x="838200" y="365126"/>
-            <a:ext cx="10515600" cy="718608"/>
-          </a:xfrm>
-        </p:spPr>
-        <p:txBody>
-          <a:bodyPr>
-            <a:normAutofit/>
-          </a:bodyPr>
-          <a:lstStyle/>
-          <a:p>
-            <a:r>
-              <a:rPr lang="nl-NL" sz="3600" noProof="0" dirty="0"/>
-              <a:t>Wat is git?</a:t>
-            </a:r>
-          </a:p>
-        </p:txBody>
-      </p:sp>
-      <p:sp>
-        <p:nvSpPr>
-          <p:cNvPr id="3" name="Content Placeholder 2">
-            <a:extLst>
-              <a:ext uri="{FF2B5EF4-FFF2-40B4-BE49-F238E27FC236}">
-                <a16:creationId xmlns:a16="http://schemas.microsoft.com/office/drawing/2014/main" id="{F4C2D286-E049-0AAB-1360-B7157E11AD7E}"/>
-              </a:ext>
-            </a:extLst>
-          </p:cNvPr>
-          <p:cNvSpPr>
-            <a:spLocks noGrp="1"/>
-          </p:cNvSpPr>
-          <p:nvPr>
-            <p:ph idx="1"/>
-          </p:nvPr>
-        </p:nvSpPr>
-        <p:spPr>
-          <a:xfrm>
-            <a:off x="838200" y="1456267"/>
-            <a:ext cx="6076406" cy="4720696"/>
-          </a:xfrm>
-        </p:spPr>
-        <p:txBody>
-          <a:bodyPr>
-            <a:normAutofit/>
-          </a:bodyPr>
-          <a:lstStyle/>
-          <a:p>
-            <a:pPr>
-              <a:buFontTx/>
-              <a:buChar char="-"/>
-            </a:pPr>
-            <a:r>
-              <a:rPr lang="nl-NL" sz="1800" noProof="0" dirty="0">
-                <a:cs typeface="Courier New" panose="02070309020205020404" pitchFamily="49" charset="0"/>
-              </a:rPr>
-              <a:t>Systeem om versies te beheren.</a:t>
-            </a:r>
-          </a:p>
-          <a:p>
-            <a:pPr>
-              <a:buFontTx/>
-              <a:buChar char="-"/>
-            </a:pPr>
-            <a:endParaRPr lang="nl-NL" sz="1800" noProof="0" dirty="0">
-              <a:cs typeface="Courier New" panose="02070309020205020404" pitchFamily="49" charset="0"/>
-            </a:endParaRPr>
-          </a:p>
-          <a:p>
-            <a:pPr>
-              <a:buFontTx/>
-              <a:buChar char="-"/>
-            </a:pPr>
-            <a:r>
-              <a:rPr lang="nl-NL" sz="1800" noProof="0" dirty="0">
-                <a:cs typeface="Courier New" panose="02070309020205020404" pitchFamily="49" charset="0"/>
-              </a:rPr>
-              <a:t>Versies </a:t>
-            </a:r>
-            <a:r>
-              <a:rPr lang="nl-NL" sz="1800" u="sng" noProof="0" dirty="0">
-                <a:cs typeface="Courier New" panose="02070309020205020404" pitchFamily="49" charset="0"/>
-              </a:rPr>
-              <a:t>handmatig</a:t>
-            </a:r>
-            <a:r>
-              <a:rPr lang="nl-NL" sz="1800" noProof="0" dirty="0">
-                <a:cs typeface="Courier New" panose="02070309020205020404" pitchFamily="49" charset="0"/>
-              </a:rPr>
-              <a:t> vastgelegd op </a:t>
-            </a:r>
-            <a:r>
-              <a:rPr lang="nl-NL" sz="1800" u="sng" noProof="0" dirty="0">
-                <a:cs typeface="Courier New" panose="02070309020205020404" pitchFamily="49" charset="0"/>
-              </a:rPr>
-              <a:t>tijdslijnen</a:t>
-            </a:r>
-            <a:r>
-              <a:rPr lang="nl-NL" sz="1800" noProof="0" dirty="0">
-                <a:cs typeface="Courier New" panose="02070309020205020404" pitchFamily="49" charset="0"/>
-              </a:rPr>
-              <a:t>.</a:t>
-            </a:r>
-          </a:p>
-          <a:p>
-            <a:pPr>
-              <a:buFontTx/>
-              <a:buChar char="-"/>
-            </a:pPr>
-            <a:endParaRPr lang="nl-NL" sz="1800" noProof="0" dirty="0">
-              <a:cs typeface="Courier New" panose="02070309020205020404" pitchFamily="49" charset="0"/>
-            </a:endParaRPr>
-          </a:p>
-          <a:p>
-            <a:pPr>
-              <a:buFontTx/>
-              <a:buChar char="-"/>
-            </a:pPr>
-            <a:r>
-              <a:rPr lang="nl-NL" sz="1800" noProof="0" dirty="0">
-                <a:cs typeface="Courier New" panose="02070309020205020404" pitchFamily="49" charset="0"/>
-              </a:rPr>
-              <a:t>Vooral geschikt voor t</a:t>
-            </a:r>
-            <a:r>
-              <a:rPr lang="nl-NL" sz="1800" u="sng" noProof="0" dirty="0">
-                <a:cs typeface="Courier New" panose="02070309020205020404" pitchFamily="49" charset="0"/>
-              </a:rPr>
-              <a:t>ekstbestanden</a:t>
-            </a:r>
-            <a:r>
-              <a:rPr lang="nl-NL" sz="1800" noProof="0" dirty="0">
-                <a:cs typeface="Courier New" panose="02070309020205020404" pitchFamily="49" charset="0"/>
-              </a:rPr>
-              <a:t>.</a:t>
-            </a:r>
-          </a:p>
-          <a:p>
-            <a:pPr>
-              <a:buFontTx/>
-              <a:buChar char="-"/>
-            </a:pPr>
-            <a:endParaRPr lang="nl-NL" sz="1800" u="sng" noProof="0" dirty="0">
-              <a:cs typeface="Courier New" panose="02070309020205020404" pitchFamily="49" charset="0"/>
-            </a:endParaRPr>
-          </a:p>
-          <a:p>
-            <a:pPr>
-              <a:buFontTx/>
-              <a:buChar char="-"/>
-            </a:pPr>
-            <a:r>
-              <a:rPr lang="nl-NL" sz="1800" noProof="0" dirty="0">
-                <a:cs typeface="Courier New" panose="02070309020205020404" pitchFamily="49" charset="0"/>
-              </a:rPr>
-              <a:t>Data </a:t>
-            </a:r>
-            <a:r>
-              <a:rPr lang="nl-NL" sz="1800" u="sng" noProof="0" dirty="0">
-                <a:cs typeface="Courier New" panose="02070309020205020404" pitchFamily="49" charset="0"/>
-              </a:rPr>
-              <a:t>integriteit</a:t>
-            </a:r>
-            <a:r>
-              <a:rPr lang="nl-NL" sz="1800" noProof="0" dirty="0">
-                <a:cs typeface="Courier New" panose="02070309020205020404" pitchFamily="49" charset="0"/>
-              </a:rPr>
-              <a:t> ingebouwd in het systeem.</a:t>
-            </a:r>
-          </a:p>
-          <a:p>
-            <a:pPr>
-              <a:buFontTx/>
-              <a:buChar char="-"/>
-            </a:pPr>
-            <a:endParaRPr lang="nl-NL" sz="1800" u="sng" noProof="0" dirty="0">
-              <a:cs typeface="Courier New" panose="02070309020205020404" pitchFamily="49" charset="0"/>
-            </a:endParaRPr>
-          </a:p>
-          <a:p>
-            <a:pPr>
-              <a:buFontTx/>
-              <a:buChar char="-"/>
-            </a:pPr>
-            <a:r>
-              <a:rPr lang="nl-NL" sz="1800" u="sng" noProof="0" dirty="0">
-                <a:cs typeface="Courier New" panose="02070309020205020404" pitchFamily="49" charset="0"/>
-              </a:rPr>
-              <a:t>Gedistribueerd</a:t>
-            </a:r>
-            <a:r>
-              <a:rPr lang="nl-NL" sz="1800" noProof="0" dirty="0">
-                <a:cs typeface="Courier New" panose="02070309020205020404" pitchFamily="49" charset="0"/>
-              </a:rPr>
-              <a:t>; versies zijn eenvoudig te delen.</a:t>
-            </a:r>
-          </a:p>
-        </p:txBody>
-      </p:sp>
-      <p:pic>
-        <p:nvPicPr>
-          <p:cNvPr id="9" name="Picture 8">
-            <a:extLst>
-              <a:ext uri="{FF2B5EF4-FFF2-40B4-BE49-F238E27FC236}">
-                <a16:creationId xmlns:a16="http://schemas.microsoft.com/office/drawing/2014/main" id="{04E3E376-AEDC-68AE-167D-F19AD78B9A90}"/>
-              </a:ext>
-            </a:extLst>
-          </p:cNvPr>
-          <p:cNvPicPr>
-            <a:picLocks noChangeAspect="1"/>
-          </p:cNvPicPr>
-          <p:nvPr/>
-        </p:nvPicPr>
-        <p:blipFill>
-          <a:blip r:embed="rId3"/>
-          <a:stretch>
-            <a:fillRect/>
-          </a:stretch>
-        </p:blipFill>
-        <p:spPr>
-          <a:xfrm>
-            <a:off x="8142515" y="1083734"/>
-            <a:ext cx="2967446" cy="4597293"/>
-          </a:xfrm>
-          <a:prstGeom prst="rect">
-            <a:avLst/>
-          </a:prstGeom>
-        </p:spPr>
-      </p:pic>
-    </p:spTree>
-    <p:extLst>
-      <p:ext uri="{BB962C8B-B14F-4D97-AF65-F5344CB8AC3E}">
-        <p14:creationId xmlns:p14="http://schemas.microsoft.com/office/powerpoint/2010/main" val="3018676715"/>
-      </p:ext>
-    </p:extLst>
-  </p:cSld>
-  <p:clrMapOvr>
-    <a:masterClrMapping/>
-  </p:clrMapOvr>
-</p:sld>
-</file>
-
-<file path=ppt/slides/slide40.xml><?xml version="1.0" encoding="utf-8"?>
+<file path=ppt/slides/slide41.xml><?xml version="1.0" encoding="utf-8"?>
 <p:sld xmlns:a="http://schemas.openxmlformats.org/drawingml/2006/main" xmlns:r="http://schemas.openxmlformats.org/officeDocument/2006/relationships" xmlns:p="http://schemas.openxmlformats.org/presentationml/2006/main">
   <p:cSld>
     <p:spTree>
@@ -28479,7 +29043,7 @@
 </p:sld>
 </file>
 
-<file path=ppt/slides/slide41.xml><?xml version="1.0" encoding="utf-8"?>
+<file path=ppt/slides/slide42.xml><?xml version="1.0" encoding="utf-8"?>
 <p:sld xmlns:a="http://schemas.openxmlformats.org/drawingml/2006/main" xmlns:r="http://schemas.openxmlformats.org/officeDocument/2006/relationships" xmlns:p="http://schemas.openxmlformats.org/presentationml/2006/main">
   <p:cSld>
     <p:spTree>
@@ -29149,7 +29713,7 @@
 </p:sld>
 </file>
 
-<file path=ppt/slides/slide42.xml><?xml version="1.0" encoding="utf-8"?>
+<file path=ppt/slides/slide43.xml><?xml version="1.0" encoding="utf-8"?>
 <p:sld xmlns:a="http://schemas.openxmlformats.org/drawingml/2006/main" xmlns:r="http://schemas.openxmlformats.org/officeDocument/2006/relationships" xmlns:p="http://schemas.openxmlformats.org/presentationml/2006/main">
   <p:cSld>
     <p:spTree>
@@ -29741,7 +30305,7 @@
 </p:sld>
 </file>
 
-<file path=ppt/slides/slide43.xml><?xml version="1.0" encoding="utf-8"?>
+<file path=ppt/slides/slide44.xml><?xml version="1.0" encoding="utf-8"?>
 <p:sld xmlns:a="http://schemas.openxmlformats.org/drawingml/2006/main" xmlns:r="http://schemas.openxmlformats.org/officeDocument/2006/relationships" xmlns:p="http://schemas.openxmlformats.org/presentationml/2006/main">
   <p:cSld>
     <p:spTree>
@@ -30422,7 +30986,7 @@
 </p:sld>
 </file>
 
-<file path=ppt/slides/slide44.xml><?xml version="1.0" encoding="utf-8"?>
+<file path=ppt/slides/slide45.xml><?xml version="1.0" encoding="utf-8"?>
 <p:sld xmlns:a="http://schemas.openxmlformats.org/drawingml/2006/main" xmlns:r="http://schemas.openxmlformats.org/officeDocument/2006/relationships" xmlns:p="http://schemas.openxmlformats.org/presentationml/2006/main">
   <p:cSld>
     <p:spTree>
@@ -31102,7 +31666,7 @@
 </p:sld>
 </file>
 
-<file path=ppt/slides/slide45.xml><?xml version="1.0" encoding="utf-8"?>
+<file path=ppt/slides/slide46.xml><?xml version="1.0" encoding="utf-8"?>
 <p:sld xmlns:a="http://schemas.openxmlformats.org/drawingml/2006/main" xmlns:r="http://schemas.openxmlformats.org/officeDocument/2006/relationships" xmlns:p="http://schemas.openxmlformats.org/presentationml/2006/main">
   <p:cSld>
     <p:spTree>
@@ -31731,7 +32295,7 @@
 </p:sld>
 </file>
 
-<file path=ppt/slides/slide46.xml><?xml version="1.0" encoding="utf-8"?>
+<file path=ppt/slides/slide47.xml><?xml version="1.0" encoding="utf-8"?>
 <p:sld xmlns:a="http://schemas.openxmlformats.org/drawingml/2006/main" xmlns:r="http://schemas.openxmlformats.org/officeDocument/2006/relationships" xmlns:p="http://schemas.openxmlformats.org/presentationml/2006/main">
   <p:cSld>
     <p:spTree>
@@ -32479,7 +33043,7 @@
 </p:sld>
 </file>
 
-<file path=ppt/slides/slide47.xml><?xml version="1.0" encoding="utf-8"?>
+<file path=ppt/slides/slide48.xml><?xml version="1.0" encoding="utf-8"?>
 <p:sld xmlns:a="http://schemas.openxmlformats.org/drawingml/2006/main" xmlns:r="http://schemas.openxmlformats.org/officeDocument/2006/relationships" xmlns:p="http://schemas.openxmlformats.org/presentationml/2006/main">
   <p:cSld>
     <p:spTree>
@@ -32573,7 +33137,7 @@
 </p:sld>
 </file>
 
-<file path=ppt/slides/slide48.xml><?xml version="1.0" encoding="utf-8"?>
+<file path=ppt/slides/slide49.xml><?xml version="1.0" encoding="utf-8"?>
 <p:sld xmlns:a="http://schemas.openxmlformats.org/drawingml/2006/main" xmlns:r="http://schemas.openxmlformats.org/officeDocument/2006/relationships" xmlns:p="http://schemas.openxmlformats.org/presentationml/2006/main">
   <p:cSld>
     <p:spTree>
@@ -33160,7 +33724,298 @@
 </p:sld>
 </file>
 
-<file path=ppt/slides/slide49.xml><?xml version="1.0" encoding="utf-8"?>
+<file path=ppt/slides/slide5.xml><?xml version="1.0" encoding="utf-8"?>
+<p:sld xmlns:a="http://schemas.openxmlformats.org/drawingml/2006/main" xmlns:r="http://schemas.openxmlformats.org/officeDocument/2006/relationships" xmlns:p="http://schemas.openxmlformats.org/presentationml/2006/main">
+  <p:cSld>
+    <p:spTree>
+      <p:nvGrpSpPr>
+        <p:cNvPr id="1" name="">
+          <a:extLst>
+            <a:ext uri="{FF2B5EF4-FFF2-40B4-BE49-F238E27FC236}">
+              <a16:creationId xmlns:a16="http://schemas.microsoft.com/office/drawing/2014/main" id="{65FADB77-0861-C20D-71CB-B47CE0ABE0B4}"/>
+            </a:ext>
+          </a:extLst>
+        </p:cNvPr>
+        <p:cNvGrpSpPr/>
+        <p:nvPr/>
+      </p:nvGrpSpPr>
+      <p:grpSpPr>
+        <a:xfrm>
+          <a:off x="0" y="0"/>
+          <a:ext cx="0" cy="0"/>
+          <a:chOff x="0" y="0"/>
+          <a:chExt cx="0" cy="0"/>
+        </a:xfrm>
+      </p:grpSpPr>
+      <p:sp>
+        <p:nvSpPr>
+          <p:cNvPr id="2" name="Title 1">
+            <a:extLst>
+              <a:ext uri="{FF2B5EF4-FFF2-40B4-BE49-F238E27FC236}">
+                <a16:creationId xmlns:a16="http://schemas.microsoft.com/office/drawing/2014/main" id="{794C2F60-8645-A181-72B1-F398C4DC1F32}"/>
+              </a:ext>
+            </a:extLst>
+          </p:cNvPr>
+          <p:cNvSpPr>
+            <a:spLocks noGrp="1"/>
+          </p:cNvSpPr>
+          <p:nvPr>
+            <p:ph type="title"/>
+          </p:nvPr>
+        </p:nvSpPr>
+        <p:spPr>
+          <a:xfrm>
+            <a:off x="838200" y="365126"/>
+            <a:ext cx="10515600" cy="718608"/>
+          </a:xfrm>
+        </p:spPr>
+        <p:txBody>
+          <a:bodyPr>
+            <a:normAutofit/>
+          </a:bodyPr>
+          <a:lstStyle/>
+          <a:p>
+            <a:r>
+              <a:rPr lang="nl-NL" sz="3600" noProof="0" dirty="0"/>
+              <a:t>Waarom git?</a:t>
+            </a:r>
+          </a:p>
+        </p:txBody>
+      </p:sp>
+      <p:sp>
+        <p:nvSpPr>
+          <p:cNvPr id="3" name="Content Placeholder 2">
+            <a:extLst>
+              <a:ext uri="{FF2B5EF4-FFF2-40B4-BE49-F238E27FC236}">
+                <a16:creationId xmlns:a16="http://schemas.microsoft.com/office/drawing/2014/main" id="{468CD5AA-674F-99AA-0ADF-441C1A41C3FA}"/>
+              </a:ext>
+            </a:extLst>
+          </p:cNvPr>
+          <p:cNvSpPr>
+            <a:spLocks noGrp="1"/>
+          </p:cNvSpPr>
+          <p:nvPr>
+            <p:ph idx="1"/>
+          </p:nvPr>
+        </p:nvSpPr>
+        <p:spPr>
+          <a:xfrm>
+            <a:off x="838200" y="1456267"/>
+            <a:ext cx="6076406" cy="4720696"/>
+          </a:xfrm>
+        </p:spPr>
+        <p:txBody>
+          <a:bodyPr>
+            <a:normAutofit/>
+          </a:bodyPr>
+          <a:lstStyle/>
+          <a:p>
+            <a:pPr marL="0" indent="0">
+              <a:buNone/>
+            </a:pPr>
+            <a:r>
+              <a:rPr lang="nl-NL" sz="1800" noProof="0" dirty="0">
+                <a:cs typeface="Courier New" panose="02070309020205020404" pitchFamily="49" charset="0"/>
+              </a:rPr>
+              <a:t>Goed versiebeheer is cruciaal:</a:t>
+            </a:r>
+          </a:p>
+          <a:p>
+            <a:pPr marL="0" indent="0">
+              <a:buNone/>
+            </a:pPr>
+            <a:endParaRPr lang="nl-NL" sz="1800" noProof="0" dirty="0">
+              <a:cs typeface="Courier New" panose="02070309020205020404" pitchFamily="49" charset="0"/>
+            </a:endParaRPr>
+          </a:p>
+          <a:p>
+            <a:pPr>
+              <a:buFontTx/>
+              <a:buChar char="-"/>
+            </a:pPr>
+            <a:r>
+              <a:rPr lang="nl-NL" sz="1800" noProof="0" dirty="0">
+                <a:cs typeface="Courier New" panose="02070309020205020404" pitchFamily="49" charset="0"/>
+              </a:rPr>
+              <a:t>Vangnet tegen fouten!</a:t>
+            </a:r>
+          </a:p>
+          <a:p>
+            <a:pPr>
+              <a:buFontTx/>
+              <a:buChar char="-"/>
+            </a:pPr>
+            <a:endParaRPr lang="nl-NL" sz="1800" dirty="0">
+              <a:cs typeface="Courier New" panose="02070309020205020404" pitchFamily="49" charset="0"/>
+            </a:endParaRPr>
+          </a:p>
+          <a:p>
+            <a:pPr>
+              <a:buFontTx/>
+              <a:buChar char="-"/>
+            </a:pPr>
+            <a:r>
+              <a:rPr lang="nl-NL" sz="1800" noProof="0" dirty="0">
+                <a:cs typeface="Courier New" panose="02070309020205020404" pitchFamily="49" charset="0"/>
+              </a:rPr>
+              <a:t>Wijzigingen maken veel minder riskant.</a:t>
+            </a:r>
+          </a:p>
+          <a:p>
+            <a:pPr marL="0" indent="0">
+              <a:buNone/>
+            </a:pPr>
+            <a:endParaRPr lang="nl-NL" sz="1800" noProof="0" dirty="0">
+              <a:cs typeface="Courier New" panose="02070309020205020404" pitchFamily="49" charset="0"/>
+            </a:endParaRPr>
+          </a:p>
+          <a:p>
+            <a:pPr>
+              <a:buFontTx/>
+              <a:buChar char="-"/>
+            </a:pPr>
+            <a:r>
+              <a:rPr lang="nl-NL" sz="1800" noProof="0" dirty="0">
+                <a:cs typeface="Courier New" panose="02070309020205020404" pitchFamily="49" charset="0"/>
+              </a:rPr>
+              <a:t>Samenwerken wordt </a:t>
+            </a:r>
+            <a:r>
+              <a:rPr lang="nl-NL" sz="1800" u="sng" noProof="0" dirty="0">
+                <a:cs typeface="Courier New" panose="02070309020205020404" pitchFamily="49" charset="0"/>
+              </a:rPr>
+              <a:t>veel</a:t>
+            </a:r>
+            <a:r>
+              <a:rPr lang="nl-NL" sz="1800" noProof="0" dirty="0">
+                <a:cs typeface="Courier New" panose="02070309020205020404" pitchFamily="49" charset="0"/>
+              </a:rPr>
+              <a:t> eenvoudiger.</a:t>
+            </a:r>
+          </a:p>
+          <a:p>
+            <a:pPr>
+              <a:buFontTx/>
+              <a:buChar char="-"/>
+            </a:pPr>
+            <a:endParaRPr lang="nl-NL" sz="1800" dirty="0">
+              <a:cs typeface="Courier New" panose="02070309020205020404" pitchFamily="49" charset="0"/>
+            </a:endParaRPr>
+          </a:p>
+          <a:p>
+            <a:pPr marL="0" indent="0">
+              <a:buNone/>
+            </a:pPr>
+            <a:endParaRPr lang="nl-NL" sz="1800" dirty="0">
+              <a:cs typeface="Courier New" panose="02070309020205020404" pitchFamily="49" charset="0"/>
+            </a:endParaRPr>
+          </a:p>
+          <a:p>
+            <a:pPr marL="0" indent="0" algn="ctr">
+              <a:buNone/>
+            </a:pPr>
+            <a:r>
+              <a:rPr lang="nl-NL" sz="1800" b="1" dirty="0">
+                <a:cs typeface="Courier New" panose="02070309020205020404" pitchFamily="49" charset="0"/>
+              </a:rPr>
+              <a:t>Let op: Eens in git, is altijd in git!</a:t>
+            </a:r>
+          </a:p>
+          <a:p>
+            <a:pPr>
+              <a:buFontTx/>
+              <a:buChar char="-"/>
+            </a:pPr>
+            <a:endParaRPr lang="nl-NL" sz="1800" noProof="0" dirty="0">
+              <a:cs typeface="Courier New" panose="02070309020205020404" pitchFamily="49" charset="0"/>
+            </a:endParaRPr>
+          </a:p>
+          <a:p>
+            <a:pPr marL="0" indent="0">
+              <a:buNone/>
+            </a:pPr>
+            <a:endParaRPr lang="nl-NL" sz="1800" noProof="0" dirty="0">
+              <a:cs typeface="Courier New" panose="02070309020205020404" pitchFamily="49" charset="0"/>
+            </a:endParaRPr>
+          </a:p>
+          <a:p>
+            <a:pPr marL="0" indent="0">
+              <a:buNone/>
+            </a:pPr>
+            <a:endParaRPr lang="nl-NL" sz="1800" noProof="0" dirty="0">
+              <a:cs typeface="Courier New" panose="02070309020205020404" pitchFamily="49" charset="0"/>
+            </a:endParaRPr>
+          </a:p>
+          <a:p>
+            <a:pPr marL="0" indent="0">
+              <a:buNone/>
+            </a:pPr>
+            <a:endParaRPr lang="nl-NL" sz="1800" noProof="0" dirty="0">
+              <a:cs typeface="Courier New" panose="02070309020205020404" pitchFamily="49" charset="0"/>
+            </a:endParaRPr>
+          </a:p>
+          <a:p>
+            <a:pPr marL="0" indent="0">
+              <a:buNone/>
+            </a:pPr>
+            <a:endParaRPr lang="nl-NL" sz="1800" noProof="0" dirty="0">
+              <a:cs typeface="Courier New" panose="02070309020205020404" pitchFamily="49" charset="0"/>
+            </a:endParaRPr>
+          </a:p>
+          <a:p>
+            <a:pPr marL="0" indent="0">
+              <a:buNone/>
+            </a:pPr>
+            <a:endParaRPr lang="nl-NL" sz="1800" noProof="0" dirty="0">
+              <a:cs typeface="Courier New" panose="02070309020205020404" pitchFamily="49" charset="0"/>
+            </a:endParaRPr>
+          </a:p>
+        </p:txBody>
+      </p:sp>
+      <p:pic>
+        <p:nvPicPr>
+          <p:cNvPr id="9" name="Picture 8">
+            <a:extLst>
+              <a:ext uri="{FF2B5EF4-FFF2-40B4-BE49-F238E27FC236}">
+                <a16:creationId xmlns:a16="http://schemas.microsoft.com/office/drawing/2014/main" id="{AE7580C3-9C1B-EB44-8B80-6AD82AD7CF0A}"/>
+              </a:ext>
+            </a:extLst>
+          </p:cNvPr>
+          <p:cNvPicPr>
+            <a:picLocks noChangeAspect="1"/>
+          </p:cNvPicPr>
+          <p:nvPr/>
+        </p:nvPicPr>
+        <p:blipFill>
+          <a:blip r:embed="rId3"/>
+          <a:stretch>
+            <a:fillRect/>
+          </a:stretch>
+        </p:blipFill>
+        <p:spPr>
+          <a:xfrm>
+            <a:off x="8142515" y="1083734"/>
+            <a:ext cx="2967446" cy="4597293"/>
+          </a:xfrm>
+          <a:prstGeom prst="rect">
+            <a:avLst/>
+          </a:prstGeom>
+        </p:spPr>
+      </p:pic>
+    </p:spTree>
+    <p:extLst>
+      <p:ext uri="{BB962C8B-B14F-4D97-AF65-F5344CB8AC3E}">
+        <p14:creationId xmlns:p14="http://schemas.microsoft.com/office/powerpoint/2010/main" val="1956933423"/>
+      </p:ext>
+    </p:extLst>
+  </p:cSld>
+  <p:clrMapOvr>
+    <a:masterClrMapping/>
+  </p:clrMapOvr>
+</p:sld>
+</file>
+
+<file path=ppt/slides/slide50.xml><?xml version="1.0" encoding="utf-8"?>
 <p:sld xmlns:a="http://schemas.openxmlformats.org/drawingml/2006/main" xmlns:r="http://schemas.openxmlformats.org/officeDocument/2006/relationships" xmlns:p="http://schemas.openxmlformats.org/presentationml/2006/main">
   <p:cSld>
     <p:spTree>
@@ -34281,298 +35136,7 @@
 </p:sld>
 </file>
 
-<file path=ppt/slides/slide5.xml><?xml version="1.0" encoding="utf-8"?>
-<p:sld xmlns:a="http://schemas.openxmlformats.org/drawingml/2006/main" xmlns:r="http://schemas.openxmlformats.org/officeDocument/2006/relationships" xmlns:p="http://schemas.openxmlformats.org/presentationml/2006/main">
-  <p:cSld>
-    <p:spTree>
-      <p:nvGrpSpPr>
-        <p:cNvPr id="1" name="">
-          <a:extLst>
-            <a:ext uri="{FF2B5EF4-FFF2-40B4-BE49-F238E27FC236}">
-              <a16:creationId xmlns:a16="http://schemas.microsoft.com/office/drawing/2014/main" id="{65FADB77-0861-C20D-71CB-B47CE0ABE0B4}"/>
-            </a:ext>
-          </a:extLst>
-        </p:cNvPr>
-        <p:cNvGrpSpPr/>
-        <p:nvPr/>
-      </p:nvGrpSpPr>
-      <p:grpSpPr>
-        <a:xfrm>
-          <a:off x="0" y="0"/>
-          <a:ext cx="0" cy="0"/>
-          <a:chOff x="0" y="0"/>
-          <a:chExt cx="0" cy="0"/>
-        </a:xfrm>
-      </p:grpSpPr>
-      <p:sp>
-        <p:nvSpPr>
-          <p:cNvPr id="2" name="Title 1">
-            <a:extLst>
-              <a:ext uri="{FF2B5EF4-FFF2-40B4-BE49-F238E27FC236}">
-                <a16:creationId xmlns:a16="http://schemas.microsoft.com/office/drawing/2014/main" id="{794C2F60-8645-A181-72B1-F398C4DC1F32}"/>
-              </a:ext>
-            </a:extLst>
-          </p:cNvPr>
-          <p:cNvSpPr>
-            <a:spLocks noGrp="1"/>
-          </p:cNvSpPr>
-          <p:nvPr>
-            <p:ph type="title"/>
-          </p:nvPr>
-        </p:nvSpPr>
-        <p:spPr>
-          <a:xfrm>
-            <a:off x="838200" y="365126"/>
-            <a:ext cx="10515600" cy="718608"/>
-          </a:xfrm>
-        </p:spPr>
-        <p:txBody>
-          <a:bodyPr>
-            <a:normAutofit/>
-          </a:bodyPr>
-          <a:lstStyle/>
-          <a:p>
-            <a:r>
-              <a:rPr lang="nl-NL" sz="3600" noProof="0" dirty="0"/>
-              <a:t>Waarom git?</a:t>
-            </a:r>
-          </a:p>
-        </p:txBody>
-      </p:sp>
-      <p:sp>
-        <p:nvSpPr>
-          <p:cNvPr id="3" name="Content Placeholder 2">
-            <a:extLst>
-              <a:ext uri="{FF2B5EF4-FFF2-40B4-BE49-F238E27FC236}">
-                <a16:creationId xmlns:a16="http://schemas.microsoft.com/office/drawing/2014/main" id="{468CD5AA-674F-99AA-0ADF-441C1A41C3FA}"/>
-              </a:ext>
-            </a:extLst>
-          </p:cNvPr>
-          <p:cNvSpPr>
-            <a:spLocks noGrp="1"/>
-          </p:cNvSpPr>
-          <p:nvPr>
-            <p:ph idx="1"/>
-          </p:nvPr>
-        </p:nvSpPr>
-        <p:spPr>
-          <a:xfrm>
-            <a:off x="838200" y="1456267"/>
-            <a:ext cx="6076406" cy="4720696"/>
-          </a:xfrm>
-        </p:spPr>
-        <p:txBody>
-          <a:bodyPr>
-            <a:normAutofit/>
-          </a:bodyPr>
-          <a:lstStyle/>
-          <a:p>
-            <a:pPr marL="0" indent="0">
-              <a:buNone/>
-            </a:pPr>
-            <a:r>
-              <a:rPr lang="nl-NL" sz="1800" noProof="0" dirty="0">
-                <a:cs typeface="Courier New" panose="02070309020205020404" pitchFamily="49" charset="0"/>
-              </a:rPr>
-              <a:t>Goed versiebeheer is cruciaal:</a:t>
-            </a:r>
-          </a:p>
-          <a:p>
-            <a:pPr marL="0" indent="0">
-              <a:buNone/>
-            </a:pPr>
-            <a:endParaRPr lang="nl-NL" sz="1800" noProof="0" dirty="0">
-              <a:cs typeface="Courier New" panose="02070309020205020404" pitchFamily="49" charset="0"/>
-            </a:endParaRPr>
-          </a:p>
-          <a:p>
-            <a:pPr>
-              <a:buFontTx/>
-              <a:buChar char="-"/>
-            </a:pPr>
-            <a:r>
-              <a:rPr lang="nl-NL" sz="1800" noProof="0" dirty="0">
-                <a:cs typeface="Courier New" panose="02070309020205020404" pitchFamily="49" charset="0"/>
-              </a:rPr>
-              <a:t>Vangnet tegen fouten!</a:t>
-            </a:r>
-          </a:p>
-          <a:p>
-            <a:pPr>
-              <a:buFontTx/>
-              <a:buChar char="-"/>
-            </a:pPr>
-            <a:endParaRPr lang="nl-NL" sz="1800" dirty="0">
-              <a:cs typeface="Courier New" panose="02070309020205020404" pitchFamily="49" charset="0"/>
-            </a:endParaRPr>
-          </a:p>
-          <a:p>
-            <a:pPr>
-              <a:buFontTx/>
-              <a:buChar char="-"/>
-            </a:pPr>
-            <a:r>
-              <a:rPr lang="nl-NL" sz="1800" noProof="0" dirty="0">
-                <a:cs typeface="Courier New" panose="02070309020205020404" pitchFamily="49" charset="0"/>
-              </a:rPr>
-              <a:t>Wijzigingen maken veel minder riskant.</a:t>
-            </a:r>
-          </a:p>
-          <a:p>
-            <a:pPr marL="0" indent="0">
-              <a:buNone/>
-            </a:pPr>
-            <a:endParaRPr lang="nl-NL" sz="1800" noProof="0" dirty="0">
-              <a:cs typeface="Courier New" panose="02070309020205020404" pitchFamily="49" charset="0"/>
-            </a:endParaRPr>
-          </a:p>
-          <a:p>
-            <a:pPr>
-              <a:buFontTx/>
-              <a:buChar char="-"/>
-            </a:pPr>
-            <a:r>
-              <a:rPr lang="nl-NL" sz="1800" noProof="0" dirty="0">
-                <a:cs typeface="Courier New" panose="02070309020205020404" pitchFamily="49" charset="0"/>
-              </a:rPr>
-              <a:t>Samenwerken wordt </a:t>
-            </a:r>
-            <a:r>
-              <a:rPr lang="nl-NL" sz="1800" u="sng" noProof="0" dirty="0">
-                <a:cs typeface="Courier New" panose="02070309020205020404" pitchFamily="49" charset="0"/>
-              </a:rPr>
-              <a:t>veel</a:t>
-            </a:r>
-            <a:r>
-              <a:rPr lang="nl-NL" sz="1800" noProof="0" dirty="0">
-                <a:cs typeface="Courier New" panose="02070309020205020404" pitchFamily="49" charset="0"/>
-              </a:rPr>
-              <a:t> eenvoudiger.</a:t>
-            </a:r>
-          </a:p>
-          <a:p>
-            <a:pPr>
-              <a:buFontTx/>
-              <a:buChar char="-"/>
-            </a:pPr>
-            <a:endParaRPr lang="nl-NL" sz="1800" dirty="0">
-              <a:cs typeface="Courier New" panose="02070309020205020404" pitchFamily="49" charset="0"/>
-            </a:endParaRPr>
-          </a:p>
-          <a:p>
-            <a:pPr marL="0" indent="0">
-              <a:buNone/>
-            </a:pPr>
-            <a:endParaRPr lang="nl-NL" sz="1800" dirty="0">
-              <a:cs typeface="Courier New" panose="02070309020205020404" pitchFamily="49" charset="0"/>
-            </a:endParaRPr>
-          </a:p>
-          <a:p>
-            <a:pPr marL="0" indent="0" algn="ctr">
-              <a:buNone/>
-            </a:pPr>
-            <a:r>
-              <a:rPr lang="nl-NL" sz="1800" b="1" dirty="0">
-                <a:cs typeface="Courier New" panose="02070309020205020404" pitchFamily="49" charset="0"/>
-              </a:rPr>
-              <a:t>Let op: Eens in git, is altijd in git!</a:t>
-            </a:r>
-          </a:p>
-          <a:p>
-            <a:pPr>
-              <a:buFontTx/>
-              <a:buChar char="-"/>
-            </a:pPr>
-            <a:endParaRPr lang="nl-NL" sz="1800" noProof="0" dirty="0">
-              <a:cs typeface="Courier New" panose="02070309020205020404" pitchFamily="49" charset="0"/>
-            </a:endParaRPr>
-          </a:p>
-          <a:p>
-            <a:pPr marL="0" indent="0">
-              <a:buNone/>
-            </a:pPr>
-            <a:endParaRPr lang="nl-NL" sz="1800" noProof="0" dirty="0">
-              <a:cs typeface="Courier New" panose="02070309020205020404" pitchFamily="49" charset="0"/>
-            </a:endParaRPr>
-          </a:p>
-          <a:p>
-            <a:pPr marL="0" indent="0">
-              <a:buNone/>
-            </a:pPr>
-            <a:endParaRPr lang="nl-NL" sz="1800" noProof="0" dirty="0">
-              <a:cs typeface="Courier New" panose="02070309020205020404" pitchFamily="49" charset="0"/>
-            </a:endParaRPr>
-          </a:p>
-          <a:p>
-            <a:pPr marL="0" indent="0">
-              <a:buNone/>
-            </a:pPr>
-            <a:endParaRPr lang="nl-NL" sz="1800" noProof="0" dirty="0">
-              <a:cs typeface="Courier New" panose="02070309020205020404" pitchFamily="49" charset="0"/>
-            </a:endParaRPr>
-          </a:p>
-          <a:p>
-            <a:pPr marL="0" indent="0">
-              <a:buNone/>
-            </a:pPr>
-            <a:endParaRPr lang="nl-NL" sz="1800" noProof="0" dirty="0">
-              <a:cs typeface="Courier New" panose="02070309020205020404" pitchFamily="49" charset="0"/>
-            </a:endParaRPr>
-          </a:p>
-          <a:p>
-            <a:pPr marL="0" indent="0">
-              <a:buNone/>
-            </a:pPr>
-            <a:endParaRPr lang="nl-NL" sz="1800" noProof="0" dirty="0">
-              <a:cs typeface="Courier New" panose="02070309020205020404" pitchFamily="49" charset="0"/>
-            </a:endParaRPr>
-          </a:p>
-        </p:txBody>
-      </p:sp>
-      <p:pic>
-        <p:nvPicPr>
-          <p:cNvPr id="9" name="Picture 8">
-            <a:extLst>
-              <a:ext uri="{FF2B5EF4-FFF2-40B4-BE49-F238E27FC236}">
-                <a16:creationId xmlns:a16="http://schemas.microsoft.com/office/drawing/2014/main" id="{AE7580C3-9C1B-EB44-8B80-6AD82AD7CF0A}"/>
-              </a:ext>
-            </a:extLst>
-          </p:cNvPr>
-          <p:cNvPicPr>
-            <a:picLocks noChangeAspect="1"/>
-          </p:cNvPicPr>
-          <p:nvPr/>
-        </p:nvPicPr>
-        <p:blipFill>
-          <a:blip r:embed="rId3"/>
-          <a:stretch>
-            <a:fillRect/>
-          </a:stretch>
-        </p:blipFill>
-        <p:spPr>
-          <a:xfrm>
-            <a:off x="8142515" y="1083734"/>
-            <a:ext cx="2967446" cy="4597293"/>
-          </a:xfrm>
-          <a:prstGeom prst="rect">
-            <a:avLst/>
-          </a:prstGeom>
-        </p:spPr>
-      </p:pic>
-    </p:spTree>
-    <p:extLst>
-      <p:ext uri="{BB962C8B-B14F-4D97-AF65-F5344CB8AC3E}">
-        <p14:creationId xmlns:p14="http://schemas.microsoft.com/office/powerpoint/2010/main" val="1956933423"/>
-      </p:ext>
-    </p:extLst>
-  </p:cSld>
-  <p:clrMapOvr>
-    <a:masterClrMapping/>
-  </p:clrMapOvr>
-</p:sld>
-</file>
-
-<file path=ppt/slides/slide50.xml><?xml version="1.0" encoding="utf-8"?>
+<file path=ppt/slides/slide51.xml><?xml version="1.0" encoding="utf-8"?>
 <p:sld xmlns:a="http://schemas.openxmlformats.org/drawingml/2006/main" xmlns:r="http://schemas.openxmlformats.org/officeDocument/2006/relationships" xmlns:p="http://schemas.openxmlformats.org/presentationml/2006/main">
   <p:cSld>
     <p:spTree>
@@ -35797,7 +36361,7 @@
 </p:sld>
 </file>
 
-<file path=ppt/slides/slide51.xml><?xml version="1.0" encoding="utf-8"?>
+<file path=ppt/slides/slide52.xml><?xml version="1.0" encoding="utf-8"?>
 <p:sld xmlns:a="http://schemas.openxmlformats.org/drawingml/2006/main" xmlns:r="http://schemas.openxmlformats.org/officeDocument/2006/relationships" xmlns:p="http://schemas.openxmlformats.org/presentationml/2006/main">
   <p:cSld>
     <p:spTree>
@@ -36489,7 +37053,7 @@
 </p:sld>
 </file>
 
-<file path=ppt/slides/slide52.xml><?xml version="1.0" encoding="utf-8"?>
+<file path=ppt/slides/slide53.xml><?xml version="1.0" encoding="utf-8"?>
 <p:sld xmlns:a="http://schemas.openxmlformats.org/drawingml/2006/main" xmlns:r="http://schemas.openxmlformats.org/officeDocument/2006/relationships" xmlns:p="http://schemas.openxmlformats.org/presentationml/2006/main">
   <p:cSld>
     <p:spTree>
@@ -37922,7 +38486,7 @@
 </p:sld>
 </file>
 
-<file path=ppt/slides/slide53.xml><?xml version="1.0" encoding="utf-8"?>
+<file path=ppt/slides/slide54.xml><?xml version="1.0" encoding="utf-8"?>
 <p:sld xmlns:a="http://schemas.openxmlformats.org/drawingml/2006/main" xmlns:r="http://schemas.openxmlformats.org/officeDocument/2006/relationships" xmlns:p="http://schemas.openxmlformats.org/presentationml/2006/main">
   <p:cSld>
     <p:spTree>
@@ -38659,7 +39223,7 @@
 </p:sld>
 </file>
 
-<file path=ppt/slides/slide54.xml><?xml version="1.0" encoding="utf-8"?>
+<file path=ppt/slides/slide55.xml><?xml version="1.0" encoding="utf-8"?>
 <p:sld xmlns:a="http://schemas.openxmlformats.org/drawingml/2006/main" xmlns:r="http://schemas.openxmlformats.org/officeDocument/2006/relationships" xmlns:p="http://schemas.openxmlformats.org/presentationml/2006/main">
   <p:cSld>
     <p:spTree>
@@ -39848,7 +40412,7 @@
 </p:sld>
 </file>
 
-<file path=ppt/slides/slide55.xml><?xml version="1.0" encoding="utf-8"?>
+<file path=ppt/slides/slide56.xml><?xml version="1.0" encoding="utf-8"?>
 <p:sld xmlns:a="http://schemas.openxmlformats.org/drawingml/2006/main" xmlns:r="http://schemas.openxmlformats.org/officeDocument/2006/relationships" xmlns:p="http://schemas.openxmlformats.org/presentationml/2006/main">
   <p:cSld>
     <p:spTree>
@@ -41192,7 +41756,7 @@
 </p:sld>
 </file>
 
-<file path=ppt/slides/slide56.xml><?xml version="1.0" encoding="utf-8"?>
+<file path=ppt/slides/slide57.xml><?xml version="1.0" encoding="utf-8"?>
 <p:sld xmlns:a="http://schemas.openxmlformats.org/drawingml/2006/main" xmlns:r="http://schemas.openxmlformats.org/officeDocument/2006/relationships" xmlns:p="http://schemas.openxmlformats.org/presentationml/2006/main">
   <p:cSld>
     <p:spTree>
@@ -41876,7 +42440,7 @@
 </p:sld>
 </file>
 
-<file path=ppt/slides/slide57.xml><?xml version="1.0" encoding="utf-8"?>
+<file path=ppt/slides/slide58.xml><?xml version="1.0" encoding="utf-8"?>
 <p:sld xmlns:a="http://schemas.openxmlformats.org/drawingml/2006/main" xmlns:r="http://schemas.openxmlformats.org/officeDocument/2006/relationships" xmlns:p="http://schemas.openxmlformats.org/presentationml/2006/main">
   <p:cSld>
     <p:spTree>
@@ -43148,7 +43712,7 @@
 </p:sld>
 </file>
 
-<file path=ppt/slides/slide58.xml><?xml version="1.0" encoding="utf-8"?>
+<file path=ppt/slides/slide59.xml><?xml version="1.0" encoding="utf-8"?>
 <p:sld xmlns:a="http://schemas.openxmlformats.org/drawingml/2006/main" xmlns:r="http://schemas.openxmlformats.org/officeDocument/2006/relationships" xmlns:p="http://schemas.openxmlformats.org/presentationml/2006/main">
   <p:cSld>
     <p:spTree>
@@ -44516,913 +45080,6 @@
 </p:sld>
 </file>
 
-<file path=ppt/slides/slide59.xml><?xml version="1.0" encoding="utf-8"?>
-<p:sld xmlns:a="http://schemas.openxmlformats.org/drawingml/2006/main" xmlns:r="http://schemas.openxmlformats.org/officeDocument/2006/relationships" xmlns:p="http://schemas.openxmlformats.org/presentationml/2006/main">
-  <p:cSld>
-    <p:spTree>
-      <p:nvGrpSpPr>
-        <p:cNvPr id="1" name="">
-          <a:extLst>
-            <a:ext uri="{FF2B5EF4-FFF2-40B4-BE49-F238E27FC236}">
-              <a16:creationId xmlns:a16="http://schemas.microsoft.com/office/drawing/2014/main" id="{35EE07CD-44E1-A750-EA0F-2FBEF6197F7F}"/>
-            </a:ext>
-          </a:extLst>
-        </p:cNvPr>
-        <p:cNvGrpSpPr/>
-        <p:nvPr/>
-      </p:nvGrpSpPr>
-      <p:grpSpPr>
-        <a:xfrm>
-          <a:off x="0" y="0"/>
-          <a:ext cx="0" cy="0"/>
-          <a:chOff x="0" y="0"/>
-          <a:chExt cx="0" cy="0"/>
-        </a:xfrm>
-      </p:grpSpPr>
-      <p:cxnSp>
-        <p:nvCxnSpPr>
-          <p:cNvPr id="8" name="Connector: Elbow 7">
-            <a:extLst>
-              <a:ext uri="{FF2B5EF4-FFF2-40B4-BE49-F238E27FC236}">
-                <a16:creationId xmlns:a16="http://schemas.microsoft.com/office/drawing/2014/main" id="{C15B913B-B4AE-52DB-60ED-77AD8EF7A7E7}"/>
-              </a:ext>
-            </a:extLst>
-          </p:cNvPr>
-          <p:cNvCxnSpPr>
-            <a:cxnSpLocks/>
-            <a:stCxn id="4" idx="6"/>
-            <a:endCxn id="6" idx="4"/>
-          </p:cNvCxnSpPr>
-          <p:nvPr/>
-        </p:nvCxnSpPr>
-        <p:spPr>
-          <a:xfrm flipV="1">
-            <a:off x="6820714" y="3501930"/>
-            <a:ext cx="494487" cy="844240"/>
-          </a:xfrm>
-          <a:prstGeom prst="bentConnector2">
-            <a:avLst/>
-          </a:prstGeom>
-          <a:ln>
-            <a:tailEnd type="triangle"/>
-          </a:ln>
-        </p:spPr>
-        <p:style>
-          <a:lnRef idx="2">
-            <a:schemeClr val="accent2"/>
-          </a:lnRef>
-          <a:fillRef idx="0">
-            <a:schemeClr val="accent2"/>
-          </a:fillRef>
-          <a:effectRef idx="1">
-            <a:schemeClr val="accent2"/>
-          </a:effectRef>
-          <a:fontRef idx="minor">
-            <a:schemeClr val="tx1"/>
-          </a:fontRef>
-        </p:style>
-      </p:cxnSp>
-      <p:cxnSp>
-        <p:nvCxnSpPr>
-          <p:cNvPr id="20" name="Connector: Elbow 19">
-            <a:extLst>
-              <a:ext uri="{FF2B5EF4-FFF2-40B4-BE49-F238E27FC236}">
-                <a16:creationId xmlns:a16="http://schemas.microsoft.com/office/drawing/2014/main" id="{66327ADD-4941-1AD4-2145-031E932DFAE3}"/>
-              </a:ext>
-            </a:extLst>
-          </p:cNvPr>
-          <p:cNvCxnSpPr>
-            <a:cxnSpLocks/>
-          </p:cNvCxnSpPr>
-          <p:nvPr/>
-        </p:nvCxnSpPr>
-        <p:spPr>
-          <a:xfrm>
-            <a:off x="3120010" y="2512757"/>
-            <a:ext cx="5981787" cy="835107"/>
-          </a:xfrm>
-          <a:prstGeom prst="bentConnector3">
-            <a:avLst>
-              <a:gd name="adj1" fmla="val 25"/>
-            </a:avLst>
-          </a:prstGeom>
-          <a:ln>
-            <a:tailEnd type="triangle"/>
-          </a:ln>
-        </p:spPr>
-        <p:style>
-          <a:lnRef idx="2">
-            <a:schemeClr val="dk1"/>
-          </a:lnRef>
-          <a:fillRef idx="0">
-            <a:schemeClr val="dk1"/>
-          </a:fillRef>
-          <a:effectRef idx="1">
-            <a:schemeClr val="dk1"/>
-          </a:effectRef>
-          <a:fontRef idx="minor">
-            <a:schemeClr val="tx1"/>
-          </a:fontRef>
-        </p:style>
-      </p:cxnSp>
-      <p:sp>
-        <p:nvSpPr>
-          <p:cNvPr id="2" name="Title 1">
-            <a:extLst>
-              <a:ext uri="{FF2B5EF4-FFF2-40B4-BE49-F238E27FC236}">
-                <a16:creationId xmlns:a16="http://schemas.microsoft.com/office/drawing/2014/main" id="{654E7051-0F94-8B07-4C46-D9058DA17BA4}"/>
-              </a:ext>
-            </a:extLst>
-          </p:cNvPr>
-          <p:cNvSpPr>
-            <a:spLocks noGrp="1"/>
-          </p:cNvSpPr>
-          <p:nvPr>
-            <p:ph type="title"/>
-          </p:nvPr>
-        </p:nvSpPr>
-        <p:spPr>
-          <a:xfrm>
-            <a:off x="838200" y="365126"/>
-            <a:ext cx="10515600" cy="718608"/>
-          </a:xfrm>
-        </p:spPr>
-        <p:txBody>
-          <a:bodyPr>
-            <a:normAutofit/>
-          </a:bodyPr>
-          <a:lstStyle/>
-          <a:p>
-            <a:r>
-              <a:rPr lang="nl-NL" sz="3600" noProof="0" dirty="0" err="1"/>
-              <a:t>Merge</a:t>
-            </a:r>
-            <a:r>
-              <a:rPr lang="nl-NL" sz="3600" noProof="0" dirty="0"/>
-              <a:t> types en branches</a:t>
-            </a:r>
-          </a:p>
-        </p:txBody>
-      </p:sp>
-      <p:cxnSp>
-        <p:nvCxnSpPr>
-          <p:cNvPr id="5" name="Straight Arrow Connector 4">
-            <a:extLst>
-              <a:ext uri="{FF2B5EF4-FFF2-40B4-BE49-F238E27FC236}">
-                <a16:creationId xmlns:a16="http://schemas.microsoft.com/office/drawing/2014/main" id="{0C068E30-68AB-164D-C088-29D2FD8DF063}"/>
-              </a:ext>
-            </a:extLst>
-          </p:cNvPr>
-          <p:cNvCxnSpPr>
-            <a:cxnSpLocks/>
-          </p:cNvCxnSpPr>
-          <p:nvPr/>
-        </p:nvCxnSpPr>
-        <p:spPr>
-          <a:xfrm>
-            <a:off x="838200" y="2358690"/>
-            <a:ext cx="8263597" cy="0"/>
-          </a:xfrm>
-          <a:prstGeom prst="straightConnector1">
-            <a:avLst/>
-          </a:prstGeom>
-          <a:ln>
-            <a:tailEnd type="triangle"/>
-          </a:ln>
-        </p:spPr>
-        <p:style>
-          <a:lnRef idx="3">
-            <a:schemeClr val="dk1"/>
-          </a:lnRef>
-          <a:fillRef idx="0">
-            <a:schemeClr val="dk1"/>
-          </a:fillRef>
-          <a:effectRef idx="2">
-            <a:schemeClr val="dk1"/>
-          </a:effectRef>
-          <a:fontRef idx="minor">
-            <a:schemeClr val="tx1"/>
-          </a:fontRef>
-        </p:style>
-      </p:cxnSp>
-      <p:sp>
-        <p:nvSpPr>
-          <p:cNvPr id="56" name="Oval 55">
-            <a:extLst>
-              <a:ext uri="{FF2B5EF4-FFF2-40B4-BE49-F238E27FC236}">
-                <a16:creationId xmlns:a16="http://schemas.microsoft.com/office/drawing/2014/main" id="{22D07D75-CFA4-AECB-16A1-3A64A9133E1C}"/>
-              </a:ext>
-            </a:extLst>
-          </p:cNvPr>
-          <p:cNvSpPr/>
-          <p:nvPr/>
-        </p:nvSpPr>
-        <p:spPr>
-          <a:xfrm>
-            <a:off x="1655245" y="2197586"/>
-            <a:ext cx="323160" cy="322207"/>
-          </a:xfrm>
-          <a:prstGeom prst="ellipse">
-            <a:avLst/>
-          </a:prstGeom>
-          <a:solidFill>
-            <a:schemeClr val="accent6">
-              <a:lumMod val="40000"/>
-              <a:lumOff val="60000"/>
-            </a:schemeClr>
-          </a:solidFill>
-        </p:spPr>
-        <p:style>
-          <a:lnRef idx="2">
-            <a:schemeClr val="dk1"/>
-          </a:lnRef>
-          <a:fillRef idx="1">
-            <a:schemeClr val="lt1"/>
-          </a:fillRef>
-          <a:effectRef idx="0">
-            <a:schemeClr val="dk1"/>
-          </a:effectRef>
-          <a:fontRef idx="minor">
-            <a:schemeClr val="dk1"/>
-          </a:fontRef>
-        </p:style>
-        <p:txBody>
-          <a:bodyPr rtlCol="0" anchor="ctr"/>
-          <a:lstStyle/>
-          <a:p>
-            <a:pPr algn="ctr"/>
-            <a:r>
-              <a:rPr lang="nl-NL" noProof="0" dirty="0"/>
-              <a:t>R</a:t>
-            </a:r>
-          </a:p>
-        </p:txBody>
-      </p:sp>
-      <p:sp>
-        <p:nvSpPr>
-          <p:cNvPr id="57" name="Oval 56">
-            <a:extLst>
-              <a:ext uri="{FF2B5EF4-FFF2-40B4-BE49-F238E27FC236}">
-                <a16:creationId xmlns:a16="http://schemas.microsoft.com/office/drawing/2014/main" id="{E971EEBF-FE4B-D342-BAE4-992914FDB982}"/>
-              </a:ext>
-            </a:extLst>
-          </p:cNvPr>
-          <p:cNvSpPr/>
-          <p:nvPr/>
-        </p:nvSpPr>
-        <p:spPr>
-          <a:xfrm>
-            <a:off x="2958431" y="2197585"/>
-            <a:ext cx="323160" cy="322207"/>
-          </a:xfrm>
-          <a:prstGeom prst="ellipse">
-            <a:avLst/>
-          </a:prstGeom>
-          <a:solidFill>
-            <a:schemeClr val="accent6">
-              <a:lumMod val="40000"/>
-              <a:lumOff val="60000"/>
-            </a:schemeClr>
-          </a:solidFill>
-        </p:spPr>
-        <p:style>
-          <a:lnRef idx="2">
-            <a:schemeClr val="dk1"/>
-          </a:lnRef>
-          <a:fillRef idx="1">
-            <a:schemeClr val="lt1"/>
-          </a:fillRef>
-          <a:effectRef idx="0">
-            <a:schemeClr val="dk1"/>
-          </a:effectRef>
-          <a:fontRef idx="minor">
-            <a:schemeClr val="dk1"/>
-          </a:fontRef>
-        </p:style>
-        <p:txBody>
-          <a:bodyPr rtlCol="0" anchor="ctr"/>
-          <a:lstStyle/>
-          <a:p>
-            <a:pPr algn="ctr"/>
-            <a:r>
-              <a:rPr lang="nl-NL" dirty="0"/>
-              <a:t>R</a:t>
-            </a:r>
-            <a:endParaRPr lang="nl-NL" noProof="0" dirty="0"/>
-          </a:p>
-        </p:txBody>
-      </p:sp>
-      <p:sp>
-        <p:nvSpPr>
-          <p:cNvPr id="9" name="TextBox 8">
-            <a:extLst>
-              <a:ext uri="{FF2B5EF4-FFF2-40B4-BE49-F238E27FC236}">
-                <a16:creationId xmlns:a16="http://schemas.microsoft.com/office/drawing/2014/main" id="{5D65D298-6222-EDC4-67D3-C4E217FFA726}"/>
-              </a:ext>
-            </a:extLst>
-          </p:cNvPr>
-          <p:cNvSpPr txBox="1"/>
-          <p:nvPr/>
-        </p:nvSpPr>
-        <p:spPr>
-          <a:xfrm>
-            <a:off x="9368599" y="2135702"/>
-            <a:ext cx="654346" cy="369332"/>
-          </a:xfrm>
-          <a:prstGeom prst="rect">
-            <a:avLst/>
-          </a:prstGeom>
-          <a:noFill/>
-        </p:spPr>
-        <p:txBody>
-          <a:bodyPr wrap="none" rtlCol="0">
-            <a:spAutoFit/>
-          </a:bodyPr>
-          <a:lstStyle/>
-          <a:p>
-            <a:r>
-              <a:rPr lang="nl-NL" noProof="0" dirty="0" err="1"/>
-              <a:t>main</a:t>
-            </a:r>
-            <a:endParaRPr lang="nl-NL" noProof="0" dirty="0"/>
-          </a:p>
-        </p:txBody>
-      </p:sp>
-      <p:sp>
-        <p:nvSpPr>
-          <p:cNvPr id="14" name="TextBox 13">
-            <a:extLst>
-              <a:ext uri="{FF2B5EF4-FFF2-40B4-BE49-F238E27FC236}">
-                <a16:creationId xmlns:a16="http://schemas.microsoft.com/office/drawing/2014/main" id="{8298F92D-19E9-3ABD-525A-95ECB039B510}"/>
-              </a:ext>
-            </a:extLst>
-          </p:cNvPr>
-          <p:cNvSpPr txBox="1"/>
-          <p:nvPr/>
-        </p:nvSpPr>
-        <p:spPr>
-          <a:xfrm>
-            <a:off x="9368599" y="3170230"/>
-            <a:ext cx="983955" cy="369332"/>
-          </a:xfrm>
-          <a:prstGeom prst="rect">
-            <a:avLst/>
-          </a:prstGeom>
-          <a:noFill/>
-        </p:spPr>
-        <p:txBody>
-          <a:bodyPr wrap="square" rtlCol="0">
-            <a:spAutoFit/>
-          </a:bodyPr>
-          <a:lstStyle/>
-          <a:p>
-            <a:r>
-              <a:rPr lang="nl-NL" noProof="0" dirty="0" err="1"/>
-              <a:t>develop</a:t>
-            </a:r>
-            <a:endParaRPr lang="nl-NL" noProof="0" dirty="0"/>
-          </a:p>
-        </p:txBody>
-      </p:sp>
-      <p:sp>
-        <p:nvSpPr>
-          <p:cNvPr id="19" name="Oval 18">
-            <a:extLst>
-              <a:ext uri="{FF2B5EF4-FFF2-40B4-BE49-F238E27FC236}">
-                <a16:creationId xmlns:a16="http://schemas.microsoft.com/office/drawing/2014/main" id="{E0887BD7-A65B-243B-F6F4-1179CABED32B}"/>
-              </a:ext>
-            </a:extLst>
-          </p:cNvPr>
-          <p:cNvSpPr/>
-          <p:nvPr/>
-        </p:nvSpPr>
-        <p:spPr>
-          <a:xfrm>
-            <a:off x="3881788" y="3180896"/>
-            <a:ext cx="323160" cy="322207"/>
-          </a:xfrm>
-          <a:prstGeom prst="ellipse">
-            <a:avLst/>
-          </a:prstGeom>
-          <a:solidFill>
-            <a:schemeClr val="accent5">
-              <a:lumMod val="40000"/>
-              <a:lumOff val="60000"/>
-            </a:schemeClr>
-          </a:solidFill>
-        </p:spPr>
-        <p:style>
-          <a:lnRef idx="2">
-            <a:schemeClr val="dk1"/>
-          </a:lnRef>
-          <a:fillRef idx="1">
-            <a:schemeClr val="lt1"/>
-          </a:fillRef>
-          <a:effectRef idx="0">
-            <a:schemeClr val="dk1"/>
-          </a:effectRef>
-          <a:fontRef idx="minor">
-            <a:schemeClr val="dk1"/>
-          </a:fontRef>
-        </p:style>
-        <p:txBody>
-          <a:bodyPr rtlCol="0" anchor="ctr"/>
-          <a:lstStyle/>
-          <a:p>
-            <a:pPr algn="ctr"/>
-            <a:r>
-              <a:rPr lang="nl-NL" noProof="0" dirty="0"/>
-              <a:t>F</a:t>
-            </a:r>
-          </a:p>
-        </p:txBody>
-      </p:sp>
-      <p:cxnSp>
-        <p:nvCxnSpPr>
-          <p:cNvPr id="25" name="Connector: Elbow 24">
-            <a:extLst>
-              <a:ext uri="{FF2B5EF4-FFF2-40B4-BE49-F238E27FC236}">
-                <a16:creationId xmlns:a16="http://schemas.microsoft.com/office/drawing/2014/main" id="{C6387BAB-B133-C29C-91EB-A5893681825E}"/>
-              </a:ext>
-            </a:extLst>
-          </p:cNvPr>
-          <p:cNvCxnSpPr>
-            <a:cxnSpLocks/>
-            <a:stCxn id="19" idx="4"/>
-          </p:cNvCxnSpPr>
-          <p:nvPr/>
-        </p:nvCxnSpPr>
-        <p:spPr>
-          <a:xfrm rot="16200000" flipH="1">
-            <a:off x="4983056" y="2563414"/>
-            <a:ext cx="843814" cy="2723191"/>
-          </a:xfrm>
-          <a:prstGeom prst="bentConnector2">
-            <a:avLst/>
-          </a:prstGeom>
-          <a:ln>
-            <a:tailEnd type="triangle"/>
-          </a:ln>
-        </p:spPr>
-        <p:style>
-          <a:lnRef idx="2">
-            <a:schemeClr val="dk1"/>
-          </a:lnRef>
-          <a:fillRef idx="0">
-            <a:schemeClr val="dk1"/>
-          </a:fillRef>
-          <a:effectRef idx="1">
-            <a:schemeClr val="dk1"/>
-          </a:effectRef>
-          <a:fontRef idx="minor">
-            <a:schemeClr val="tx1"/>
-          </a:fontRef>
-        </p:style>
-      </p:cxnSp>
-      <p:sp>
-        <p:nvSpPr>
-          <p:cNvPr id="23" name="Oval 22">
-            <a:extLst>
-              <a:ext uri="{FF2B5EF4-FFF2-40B4-BE49-F238E27FC236}">
-                <a16:creationId xmlns:a16="http://schemas.microsoft.com/office/drawing/2014/main" id="{C8F6207B-33AD-12B3-0CB6-2C1FF8863B6D}"/>
-              </a:ext>
-            </a:extLst>
-          </p:cNvPr>
-          <p:cNvSpPr/>
-          <p:nvPr/>
-        </p:nvSpPr>
-        <p:spPr>
-          <a:xfrm>
-            <a:off x="5594877" y="4185066"/>
-            <a:ext cx="323160" cy="322207"/>
-          </a:xfrm>
-          <a:prstGeom prst="ellipse">
-            <a:avLst/>
-          </a:prstGeom>
-          <a:solidFill>
-            <a:schemeClr val="accent2">
-              <a:lumMod val="40000"/>
-              <a:lumOff val="60000"/>
-            </a:schemeClr>
-          </a:solidFill>
-        </p:spPr>
-        <p:style>
-          <a:lnRef idx="2">
-            <a:schemeClr val="dk1"/>
-          </a:lnRef>
-          <a:fillRef idx="1">
-            <a:schemeClr val="lt1"/>
-          </a:fillRef>
-          <a:effectRef idx="0">
-            <a:schemeClr val="dk1"/>
-          </a:effectRef>
-          <a:fontRef idx="minor">
-            <a:schemeClr val="dk1"/>
-          </a:fontRef>
-        </p:style>
-        <p:txBody>
-          <a:bodyPr rtlCol="0" anchor="ctr"/>
-          <a:lstStyle/>
-          <a:p>
-            <a:pPr algn="ctr"/>
-            <a:r>
-              <a:rPr lang="nl-NL" noProof="0" dirty="0"/>
-              <a:t>C</a:t>
-            </a:r>
-          </a:p>
-        </p:txBody>
-      </p:sp>
-      <p:sp>
-        <p:nvSpPr>
-          <p:cNvPr id="27" name="TextBox 26">
-            <a:extLst>
-              <a:ext uri="{FF2B5EF4-FFF2-40B4-BE49-F238E27FC236}">
-                <a16:creationId xmlns:a16="http://schemas.microsoft.com/office/drawing/2014/main" id="{AFB37F0D-B26D-141A-FB69-CE83D935A3DF}"/>
-              </a:ext>
-            </a:extLst>
-          </p:cNvPr>
-          <p:cNvSpPr txBox="1"/>
-          <p:nvPr/>
-        </p:nvSpPr>
-        <p:spPr>
-          <a:xfrm>
-            <a:off x="9364700" y="4137941"/>
-            <a:ext cx="2001992" cy="369332"/>
-          </a:xfrm>
-          <a:prstGeom prst="rect">
-            <a:avLst/>
-          </a:prstGeom>
-          <a:noFill/>
-        </p:spPr>
-        <p:txBody>
-          <a:bodyPr wrap="square" rtlCol="0">
-            <a:spAutoFit/>
-          </a:bodyPr>
-          <a:lstStyle/>
-          <a:p>
-            <a:r>
-              <a:rPr lang="nl-NL" noProof="0" dirty="0"/>
-              <a:t>feature/unit-tests</a:t>
-            </a:r>
-          </a:p>
-        </p:txBody>
-      </p:sp>
-      <p:sp>
-        <p:nvSpPr>
-          <p:cNvPr id="3" name="Oval 2">
-            <a:extLst>
-              <a:ext uri="{FF2B5EF4-FFF2-40B4-BE49-F238E27FC236}">
-                <a16:creationId xmlns:a16="http://schemas.microsoft.com/office/drawing/2014/main" id="{90B7E3D0-3355-31D3-6D3E-887D8FD74EC5}"/>
-              </a:ext>
-            </a:extLst>
-          </p:cNvPr>
-          <p:cNvSpPr/>
-          <p:nvPr/>
-        </p:nvSpPr>
-        <p:spPr>
-          <a:xfrm>
-            <a:off x="4692200" y="4185066"/>
-            <a:ext cx="323160" cy="322207"/>
-          </a:xfrm>
-          <a:prstGeom prst="ellipse">
-            <a:avLst/>
-          </a:prstGeom>
-          <a:solidFill>
-            <a:schemeClr val="accent2">
-              <a:lumMod val="40000"/>
-              <a:lumOff val="60000"/>
-            </a:schemeClr>
-          </a:solidFill>
-        </p:spPr>
-        <p:style>
-          <a:lnRef idx="2">
-            <a:schemeClr val="dk1"/>
-          </a:lnRef>
-          <a:fillRef idx="1">
-            <a:schemeClr val="lt1"/>
-          </a:fillRef>
-          <a:effectRef idx="0">
-            <a:schemeClr val="dk1"/>
-          </a:effectRef>
-          <a:fontRef idx="minor">
-            <a:schemeClr val="dk1"/>
-          </a:fontRef>
-        </p:style>
-        <p:txBody>
-          <a:bodyPr rtlCol="0" anchor="ctr"/>
-          <a:lstStyle/>
-          <a:p>
-            <a:pPr algn="ctr"/>
-            <a:r>
-              <a:rPr lang="nl-NL" noProof="0" dirty="0"/>
-              <a:t>C</a:t>
-            </a:r>
-          </a:p>
-        </p:txBody>
-      </p:sp>
-      <p:sp>
-        <p:nvSpPr>
-          <p:cNvPr id="4" name="Oval 3">
-            <a:extLst>
-              <a:ext uri="{FF2B5EF4-FFF2-40B4-BE49-F238E27FC236}">
-                <a16:creationId xmlns:a16="http://schemas.microsoft.com/office/drawing/2014/main" id="{F090C77F-913A-4C8C-FB7D-E9CB212B4752}"/>
-              </a:ext>
-            </a:extLst>
-          </p:cNvPr>
-          <p:cNvSpPr/>
-          <p:nvPr/>
-        </p:nvSpPr>
-        <p:spPr>
-          <a:xfrm>
-            <a:off x="6497554" y="4185066"/>
-            <a:ext cx="323160" cy="322207"/>
-          </a:xfrm>
-          <a:prstGeom prst="ellipse">
-            <a:avLst/>
-          </a:prstGeom>
-          <a:solidFill>
-            <a:schemeClr val="accent2">
-              <a:lumMod val="40000"/>
-              <a:lumOff val="60000"/>
-            </a:schemeClr>
-          </a:solidFill>
-        </p:spPr>
-        <p:style>
-          <a:lnRef idx="2">
-            <a:schemeClr val="dk1"/>
-          </a:lnRef>
-          <a:fillRef idx="1">
-            <a:schemeClr val="lt1"/>
-          </a:fillRef>
-          <a:effectRef idx="0">
-            <a:schemeClr val="dk1"/>
-          </a:effectRef>
-          <a:fontRef idx="minor">
-            <a:schemeClr val="dk1"/>
-          </a:fontRef>
-        </p:style>
-        <p:txBody>
-          <a:bodyPr rtlCol="0" anchor="ctr"/>
-          <a:lstStyle/>
-          <a:p>
-            <a:pPr algn="ctr"/>
-            <a:r>
-              <a:rPr lang="nl-NL" noProof="0" dirty="0"/>
-              <a:t>C</a:t>
-            </a:r>
-          </a:p>
-        </p:txBody>
-      </p:sp>
-      <p:cxnSp>
-        <p:nvCxnSpPr>
-          <p:cNvPr id="18" name="Straight Arrow Connector 17">
-            <a:extLst>
-              <a:ext uri="{FF2B5EF4-FFF2-40B4-BE49-F238E27FC236}">
-                <a16:creationId xmlns:a16="http://schemas.microsoft.com/office/drawing/2014/main" id="{FE4D6D7B-AC1B-219E-CF7F-9C3EC434F372}"/>
-              </a:ext>
-            </a:extLst>
-          </p:cNvPr>
-          <p:cNvCxnSpPr>
-            <a:cxnSpLocks/>
-            <a:endCxn id="15" idx="4"/>
-          </p:cNvCxnSpPr>
-          <p:nvPr/>
-        </p:nvCxnSpPr>
-        <p:spPr>
-          <a:xfrm flipV="1">
-            <a:off x="8032653" y="2511525"/>
-            <a:ext cx="0" cy="830471"/>
-          </a:xfrm>
-          <a:prstGeom prst="straightConnector1">
-            <a:avLst/>
-          </a:prstGeom>
-          <a:ln>
-            <a:tailEnd type="triangle"/>
-          </a:ln>
-        </p:spPr>
-        <p:style>
-          <a:lnRef idx="2">
-            <a:schemeClr val="accent1"/>
-          </a:lnRef>
-          <a:fillRef idx="0">
-            <a:schemeClr val="accent1"/>
-          </a:fillRef>
-          <a:effectRef idx="1">
-            <a:schemeClr val="accent1"/>
-          </a:effectRef>
-          <a:fontRef idx="minor">
-            <a:schemeClr val="tx1"/>
-          </a:fontRef>
-        </p:style>
-      </p:cxnSp>
-      <p:sp>
-        <p:nvSpPr>
-          <p:cNvPr id="6" name="Oval 5">
-            <a:extLst>
-              <a:ext uri="{FF2B5EF4-FFF2-40B4-BE49-F238E27FC236}">
-                <a16:creationId xmlns:a16="http://schemas.microsoft.com/office/drawing/2014/main" id="{362C010C-F26C-7397-5380-69E9F1C41EE3}"/>
-              </a:ext>
-            </a:extLst>
-          </p:cNvPr>
-          <p:cNvSpPr/>
-          <p:nvPr/>
-        </p:nvSpPr>
-        <p:spPr>
-          <a:xfrm>
-            <a:off x="7153621" y="3179723"/>
-            <a:ext cx="323160" cy="322207"/>
-          </a:xfrm>
-          <a:prstGeom prst="ellipse">
-            <a:avLst/>
-          </a:prstGeom>
-          <a:solidFill>
-            <a:schemeClr val="accent5">
-              <a:lumMod val="40000"/>
-              <a:lumOff val="60000"/>
-            </a:schemeClr>
-          </a:solidFill>
-        </p:spPr>
-        <p:style>
-          <a:lnRef idx="2">
-            <a:schemeClr val="dk1"/>
-          </a:lnRef>
-          <a:fillRef idx="1">
-            <a:schemeClr val="lt1"/>
-          </a:fillRef>
-          <a:effectRef idx="0">
-            <a:schemeClr val="dk1"/>
-          </a:effectRef>
-          <a:fontRef idx="minor">
-            <a:schemeClr val="dk1"/>
-          </a:fontRef>
-        </p:style>
-        <p:txBody>
-          <a:bodyPr rtlCol="0" anchor="ctr"/>
-          <a:lstStyle/>
-          <a:p>
-            <a:pPr algn="ctr"/>
-            <a:r>
-              <a:rPr lang="nl-NL" noProof="0" dirty="0"/>
-              <a:t>F</a:t>
-            </a:r>
-          </a:p>
-        </p:txBody>
-      </p:sp>
-      <p:sp>
-        <p:nvSpPr>
-          <p:cNvPr id="12" name="TextBox 11">
-            <a:extLst>
-              <a:ext uri="{FF2B5EF4-FFF2-40B4-BE49-F238E27FC236}">
-                <a16:creationId xmlns:a16="http://schemas.microsoft.com/office/drawing/2014/main" id="{709531D4-DA9F-9D5A-26FF-B3802C5E8347}"/>
-              </a:ext>
-            </a:extLst>
-          </p:cNvPr>
-          <p:cNvSpPr txBox="1"/>
-          <p:nvPr/>
-        </p:nvSpPr>
-        <p:spPr>
-          <a:xfrm>
-            <a:off x="7371273" y="3669228"/>
-            <a:ext cx="840295" cy="369332"/>
-          </a:xfrm>
-          <a:prstGeom prst="rect">
-            <a:avLst/>
-          </a:prstGeom>
-          <a:noFill/>
-        </p:spPr>
-        <p:txBody>
-          <a:bodyPr wrap="none" rtlCol="0">
-            <a:spAutoFit/>
-          </a:bodyPr>
-          <a:lstStyle/>
-          <a:p>
-            <a:r>
-              <a:rPr lang="nl-NL" dirty="0">
-                <a:solidFill>
-                  <a:schemeClr val="accent2">
-                    <a:lumMod val="75000"/>
-                  </a:schemeClr>
-                </a:solidFill>
-              </a:rPr>
-              <a:t>squash</a:t>
-            </a:r>
-          </a:p>
-        </p:txBody>
-      </p:sp>
-      <p:sp>
-        <p:nvSpPr>
-          <p:cNvPr id="13" name="TextBox 12">
-            <a:extLst>
-              <a:ext uri="{FF2B5EF4-FFF2-40B4-BE49-F238E27FC236}">
-                <a16:creationId xmlns:a16="http://schemas.microsoft.com/office/drawing/2014/main" id="{42B2B121-09A0-8857-9469-BA498167D6B9}"/>
-              </a:ext>
-            </a:extLst>
-          </p:cNvPr>
-          <p:cNvSpPr txBox="1"/>
-          <p:nvPr/>
-        </p:nvSpPr>
-        <p:spPr>
-          <a:xfrm>
-            <a:off x="8032653" y="2665677"/>
-            <a:ext cx="783933" cy="369332"/>
-          </a:xfrm>
-          <a:prstGeom prst="rect">
-            <a:avLst/>
-          </a:prstGeom>
-          <a:noFill/>
-        </p:spPr>
-        <p:txBody>
-          <a:bodyPr wrap="none" rtlCol="0">
-            <a:spAutoFit/>
-          </a:bodyPr>
-          <a:lstStyle/>
-          <a:p>
-            <a:r>
-              <a:rPr lang="nl-NL" dirty="0" err="1">
-                <a:solidFill>
-                  <a:schemeClr val="accent5">
-                    <a:lumMod val="50000"/>
-                  </a:schemeClr>
-                </a:solidFill>
-              </a:rPr>
-              <a:t>merge</a:t>
-            </a:r>
-            <a:endParaRPr lang="nl-NL" dirty="0">
-              <a:solidFill>
-                <a:schemeClr val="accent5">
-                  <a:lumMod val="50000"/>
-                </a:schemeClr>
-              </a:solidFill>
-            </a:endParaRPr>
-          </a:p>
-        </p:txBody>
-      </p:sp>
-      <p:sp>
-        <p:nvSpPr>
-          <p:cNvPr id="15" name="Oval 14">
-            <a:extLst>
-              <a:ext uri="{FF2B5EF4-FFF2-40B4-BE49-F238E27FC236}">
-                <a16:creationId xmlns:a16="http://schemas.microsoft.com/office/drawing/2014/main" id="{CA89D24C-478A-4247-501A-13015190EEA7}"/>
-              </a:ext>
-            </a:extLst>
-          </p:cNvPr>
-          <p:cNvSpPr/>
-          <p:nvPr/>
-        </p:nvSpPr>
-        <p:spPr>
-          <a:xfrm>
-            <a:off x="7871073" y="2189318"/>
-            <a:ext cx="323160" cy="322207"/>
-          </a:xfrm>
-          <a:prstGeom prst="ellipse">
-            <a:avLst/>
-          </a:prstGeom>
-          <a:solidFill>
-            <a:schemeClr val="accent6">
-              <a:lumMod val="40000"/>
-              <a:lumOff val="60000"/>
-            </a:schemeClr>
-          </a:solidFill>
-        </p:spPr>
-        <p:style>
-          <a:lnRef idx="2">
-            <a:schemeClr val="dk1"/>
-          </a:lnRef>
-          <a:fillRef idx="1">
-            <a:schemeClr val="lt1"/>
-          </a:fillRef>
-          <a:effectRef idx="0">
-            <a:schemeClr val="dk1"/>
-          </a:effectRef>
-          <a:fontRef idx="minor">
-            <a:schemeClr val="dk1"/>
-          </a:fontRef>
-        </p:style>
-        <p:txBody>
-          <a:bodyPr rtlCol="0" anchor="ctr"/>
-          <a:lstStyle/>
-          <a:p>
-            <a:pPr algn="ctr"/>
-            <a:r>
-              <a:rPr lang="nl-NL" noProof="0" dirty="0"/>
-              <a:t>R</a:t>
-            </a:r>
-          </a:p>
-        </p:txBody>
-      </p:sp>
-    </p:spTree>
-    <p:extLst>
-      <p:ext uri="{BB962C8B-B14F-4D97-AF65-F5344CB8AC3E}">
-        <p14:creationId xmlns:p14="http://schemas.microsoft.com/office/powerpoint/2010/main" val="306344365"/>
-      </p:ext>
-    </p:extLst>
-  </p:cSld>
-  <p:clrMapOvr>
-    <a:masterClrMapping/>
-  </p:clrMapOvr>
-</p:sld>
-</file>
-
 <file path=ppt/slides/slide6.xml><?xml version="1.0" encoding="utf-8"?>
 <p:sld xmlns:a="http://schemas.openxmlformats.org/drawingml/2006/main" xmlns:r="http://schemas.openxmlformats.org/officeDocument/2006/relationships" xmlns:p="http://schemas.openxmlformats.org/presentationml/2006/main">
   <p:cSld>
@@ -45917,6 +45574,913 @@
         <p:cNvPr id="1" name="">
           <a:extLst>
             <a:ext uri="{FF2B5EF4-FFF2-40B4-BE49-F238E27FC236}">
+              <a16:creationId xmlns:a16="http://schemas.microsoft.com/office/drawing/2014/main" id="{35EE07CD-44E1-A750-EA0F-2FBEF6197F7F}"/>
+            </a:ext>
+          </a:extLst>
+        </p:cNvPr>
+        <p:cNvGrpSpPr/>
+        <p:nvPr/>
+      </p:nvGrpSpPr>
+      <p:grpSpPr>
+        <a:xfrm>
+          <a:off x="0" y="0"/>
+          <a:ext cx="0" cy="0"/>
+          <a:chOff x="0" y="0"/>
+          <a:chExt cx="0" cy="0"/>
+        </a:xfrm>
+      </p:grpSpPr>
+      <p:cxnSp>
+        <p:nvCxnSpPr>
+          <p:cNvPr id="8" name="Connector: Elbow 7">
+            <a:extLst>
+              <a:ext uri="{FF2B5EF4-FFF2-40B4-BE49-F238E27FC236}">
+                <a16:creationId xmlns:a16="http://schemas.microsoft.com/office/drawing/2014/main" id="{C15B913B-B4AE-52DB-60ED-77AD8EF7A7E7}"/>
+              </a:ext>
+            </a:extLst>
+          </p:cNvPr>
+          <p:cNvCxnSpPr>
+            <a:cxnSpLocks/>
+            <a:stCxn id="4" idx="6"/>
+            <a:endCxn id="6" idx="4"/>
+          </p:cNvCxnSpPr>
+          <p:nvPr/>
+        </p:nvCxnSpPr>
+        <p:spPr>
+          <a:xfrm flipV="1">
+            <a:off x="6820714" y="3501930"/>
+            <a:ext cx="494487" cy="844240"/>
+          </a:xfrm>
+          <a:prstGeom prst="bentConnector2">
+            <a:avLst/>
+          </a:prstGeom>
+          <a:ln>
+            <a:tailEnd type="triangle"/>
+          </a:ln>
+        </p:spPr>
+        <p:style>
+          <a:lnRef idx="2">
+            <a:schemeClr val="accent2"/>
+          </a:lnRef>
+          <a:fillRef idx="0">
+            <a:schemeClr val="accent2"/>
+          </a:fillRef>
+          <a:effectRef idx="1">
+            <a:schemeClr val="accent2"/>
+          </a:effectRef>
+          <a:fontRef idx="minor">
+            <a:schemeClr val="tx1"/>
+          </a:fontRef>
+        </p:style>
+      </p:cxnSp>
+      <p:cxnSp>
+        <p:nvCxnSpPr>
+          <p:cNvPr id="20" name="Connector: Elbow 19">
+            <a:extLst>
+              <a:ext uri="{FF2B5EF4-FFF2-40B4-BE49-F238E27FC236}">
+                <a16:creationId xmlns:a16="http://schemas.microsoft.com/office/drawing/2014/main" id="{66327ADD-4941-1AD4-2145-031E932DFAE3}"/>
+              </a:ext>
+            </a:extLst>
+          </p:cNvPr>
+          <p:cNvCxnSpPr>
+            <a:cxnSpLocks/>
+          </p:cNvCxnSpPr>
+          <p:nvPr/>
+        </p:nvCxnSpPr>
+        <p:spPr>
+          <a:xfrm>
+            <a:off x="3120010" y="2512757"/>
+            <a:ext cx="5981787" cy="835107"/>
+          </a:xfrm>
+          <a:prstGeom prst="bentConnector3">
+            <a:avLst>
+              <a:gd name="adj1" fmla="val 25"/>
+            </a:avLst>
+          </a:prstGeom>
+          <a:ln>
+            <a:tailEnd type="triangle"/>
+          </a:ln>
+        </p:spPr>
+        <p:style>
+          <a:lnRef idx="2">
+            <a:schemeClr val="dk1"/>
+          </a:lnRef>
+          <a:fillRef idx="0">
+            <a:schemeClr val="dk1"/>
+          </a:fillRef>
+          <a:effectRef idx="1">
+            <a:schemeClr val="dk1"/>
+          </a:effectRef>
+          <a:fontRef idx="minor">
+            <a:schemeClr val="tx1"/>
+          </a:fontRef>
+        </p:style>
+      </p:cxnSp>
+      <p:sp>
+        <p:nvSpPr>
+          <p:cNvPr id="2" name="Title 1">
+            <a:extLst>
+              <a:ext uri="{FF2B5EF4-FFF2-40B4-BE49-F238E27FC236}">
+                <a16:creationId xmlns:a16="http://schemas.microsoft.com/office/drawing/2014/main" id="{654E7051-0F94-8B07-4C46-D9058DA17BA4}"/>
+              </a:ext>
+            </a:extLst>
+          </p:cNvPr>
+          <p:cNvSpPr>
+            <a:spLocks noGrp="1"/>
+          </p:cNvSpPr>
+          <p:nvPr>
+            <p:ph type="title"/>
+          </p:nvPr>
+        </p:nvSpPr>
+        <p:spPr>
+          <a:xfrm>
+            <a:off x="838200" y="365126"/>
+            <a:ext cx="10515600" cy="718608"/>
+          </a:xfrm>
+        </p:spPr>
+        <p:txBody>
+          <a:bodyPr>
+            <a:normAutofit/>
+          </a:bodyPr>
+          <a:lstStyle/>
+          <a:p>
+            <a:r>
+              <a:rPr lang="nl-NL" sz="3600" noProof="0" dirty="0" err="1"/>
+              <a:t>Merge</a:t>
+            </a:r>
+            <a:r>
+              <a:rPr lang="nl-NL" sz="3600" noProof="0" dirty="0"/>
+              <a:t> types en branches</a:t>
+            </a:r>
+          </a:p>
+        </p:txBody>
+      </p:sp>
+      <p:cxnSp>
+        <p:nvCxnSpPr>
+          <p:cNvPr id="5" name="Straight Arrow Connector 4">
+            <a:extLst>
+              <a:ext uri="{FF2B5EF4-FFF2-40B4-BE49-F238E27FC236}">
+                <a16:creationId xmlns:a16="http://schemas.microsoft.com/office/drawing/2014/main" id="{0C068E30-68AB-164D-C088-29D2FD8DF063}"/>
+              </a:ext>
+            </a:extLst>
+          </p:cNvPr>
+          <p:cNvCxnSpPr>
+            <a:cxnSpLocks/>
+          </p:cNvCxnSpPr>
+          <p:nvPr/>
+        </p:nvCxnSpPr>
+        <p:spPr>
+          <a:xfrm>
+            <a:off x="838200" y="2358690"/>
+            <a:ext cx="8263597" cy="0"/>
+          </a:xfrm>
+          <a:prstGeom prst="straightConnector1">
+            <a:avLst/>
+          </a:prstGeom>
+          <a:ln>
+            <a:tailEnd type="triangle"/>
+          </a:ln>
+        </p:spPr>
+        <p:style>
+          <a:lnRef idx="3">
+            <a:schemeClr val="dk1"/>
+          </a:lnRef>
+          <a:fillRef idx="0">
+            <a:schemeClr val="dk1"/>
+          </a:fillRef>
+          <a:effectRef idx="2">
+            <a:schemeClr val="dk1"/>
+          </a:effectRef>
+          <a:fontRef idx="minor">
+            <a:schemeClr val="tx1"/>
+          </a:fontRef>
+        </p:style>
+      </p:cxnSp>
+      <p:sp>
+        <p:nvSpPr>
+          <p:cNvPr id="56" name="Oval 55">
+            <a:extLst>
+              <a:ext uri="{FF2B5EF4-FFF2-40B4-BE49-F238E27FC236}">
+                <a16:creationId xmlns:a16="http://schemas.microsoft.com/office/drawing/2014/main" id="{22D07D75-CFA4-AECB-16A1-3A64A9133E1C}"/>
+              </a:ext>
+            </a:extLst>
+          </p:cNvPr>
+          <p:cNvSpPr/>
+          <p:nvPr/>
+        </p:nvSpPr>
+        <p:spPr>
+          <a:xfrm>
+            <a:off x="1655245" y="2197586"/>
+            <a:ext cx="323160" cy="322207"/>
+          </a:xfrm>
+          <a:prstGeom prst="ellipse">
+            <a:avLst/>
+          </a:prstGeom>
+          <a:solidFill>
+            <a:schemeClr val="accent6">
+              <a:lumMod val="40000"/>
+              <a:lumOff val="60000"/>
+            </a:schemeClr>
+          </a:solidFill>
+        </p:spPr>
+        <p:style>
+          <a:lnRef idx="2">
+            <a:schemeClr val="dk1"/>
+          </a:lnRef>
+          <a:fillRef idx="1">
+            <a:schemeClr val="lt1"/>
+          </a:fillRef>
+          <a:effectRef idx="0">
+            <a:schemeClr val="dk1"/>
+          </a:effectRef>
+          <a:fontRef idx="minor">
+            <a:schemeClr val="dk1"/>
+          </a:fontRef>
+        </p:style>
+        <p:txBody>
+          <a:bodyPr rtlCol="0" anchor="ctr"/>
+          <a:lstStyle/>
+          <a:p>
+            <a:pPr algn="ctr"/>
+            <a:r>
+              <a:rPr lang="nl-NL" noProof="0" dirty="0"/>
+              <a:t>R</a:t>
+            </a:r>
+          </a:p>
+        </p:txBody>
+      </p:sp>
+      <p:sp>
+        <p:nvSpPr>
+          <p:cNvPr id="57" name="Oval 56">
+            <a:extLst>
+              <a:ext uri="{FF2B5EF4-FFF2-40B4-BE49-F238E27FC236}">
+                <a16:creationId xmlns:a16="http://schemas.microsoft.com/office/drawing/2014/main" id="{E971EEBF-FE4B-D342-BAE4-992914FDB982}"/>
+              </a:ext>
+            </a:extLst>
+          </p:cNvPr>
+          <p:cNvSpPr/>
+          <p:nvPr/>
+        </p:nvSpPr>
+        <p:spPr>
+          <a:xfrm>
+            <a:off x="2958431" y="2197585"/>
+            <a:ext cx="323160" cy="322207"/>
+          </a:xfrm>
+          <a:prstGeom prst="ellipse">
+            <a:avLst/>
+          </a:prstGeom>
+          <a:solidFill>
+            <a:schemeClr val="accent6">
+              <a:lumMod val="40000"/>
+              <a:lumOff val="60000"/>
+            </a:schemeClr>
+          </a:solidFill>
+        </p:spPr>
+        <p:style>
+          <a:lnRef idx="2">
+            <a:schemeClr val="dk1"/>
+          </a:lnRef>
+          <a:fillRef idx="1">
+            <a:schemeClr val="lt1"/>
+          </a:fillRef>
+          <a:effectRef idx="0">
+            <a:schemeClr val="dk1"/>
+          </a:effectRef>
+          <a:fontRef idx="minor">
+            <a:schemeClr val="dk1"/>
+          </a:fontRef>
+        </p:style>
+        <p:txBody>
+          <a:bodyPr rtlCol="0" anchor="ctr"/>
+          <a:lstStyle/>
+          <a:p>
+            <a:pPr algn="ctr"/>
+            <a:r>
+              <a:rPr lang="nl-NL" dirty="0"/>
+              <a:t>R</a:t>
+            </a:r>
+            <a:endParaRPr lang="nl-NL" noProof="0" dirty="0"/>
+          </a:p>
+        </p:txBody>
+      </p:sp>
+      <p:sp>
+        <p:nvSpPr>
+          <p:cNvPr id="9" name="TextBox 8">
+            <a:extLst>
+              <a:ext uri="{FF2B5EF4-FFF2-40B4-BE49-F238E27FC236}">
+                <a16:creationId xmlns:a16="http://schemas.microsoft.com/office/drawing/2014/main" id="{5D65D298-6222-EDC4-67D3-C4E217FFA726}"/>
+              </a:ext>
+            </a:extLst>
+          </p:cNvPr>
+          <p:cNvSpPr txBox="1"/>
+          <p:nvPr/>
+        </p:nvSpPr>
+        <p:spPr>
+          <a:xfrm>
+            <a:off x="9368599" y="2135702"/>
+            <a:ext cx="654346" cy="369332"/>
+          </a:xfrm>
+          <a:prstGeom prst="rect">
+            <a:avLst/>
+          </a:prstGeom>
+          <a:noFill/>
+        </p:spPr>
+        <p:txBody>
+          <a:bodyPr wrap="none" rtlCol="0">
+            <a:spAutoFit/>
+          </a:bodyPr>
+          <a:lstStyle/>
+          <a:p>
+            <a:r>
+              <a:rPr lang="nl-NL" noProof="0" dirty="0" err="1"/>
+              <a:t>main</a:t>
+            </a:r>
+            <a:endParaRPr lang="nl-NL" noProof="0" dirty="0"/>
+          </a:p>
+        </p:txBody>
+      </p:sp>
+      <p:sp>
+        <p:nvSpPr>
+          <p:cNvPr id="14" name="TextBox 13">
+            <a:extLst>
+              <a:ext uri="{FF2B5EF4-FFF2-40B4-BE49-F238E27FC236}">
+                <a16:creationId xmlns:a16="http://schemas.microsoft.com/office/drawing/2014/main" id="{8298F92D-19E9-3ABD-525A-95ECB039B510}"/>
+              </a:ext>
+            </a:extLst>
+          </p:cNvPr>
+          <p:cNvSpPr txBox="1"/>
+          <p:nvPr/>
+        </p:nvSpPr>
+        <p:spPr>
+          <a:xfrm>
+            <a:off x="9368599" y="3170230"/>
+            <a:ext cx="983955" cy="369332"/>
+          </a:xfrm>
+          <a:prstGeom prst="rect">
+            <a:avLst/>
+          </a:prstGeom>
+          <a:noFill/>
+        </p:spPr>
+        <p:txBody>
+          <a:bodyPr wrap="square" rtlCol="0">
+            <a:spAutoFit/>
+          </a:bodyPr>
+          <a:lstStyle/>
+          <a:p>
+            <a:r>
+              <a:rPr lang="nl-NL" noProof="0" dirty="0" err="1"/>
+              <a:t>develop</a:t>
+            </a:r>
+            <a:endParaRPr lang="nl-NL" noProof="0" dirty="0"/>
+          </a:p>
+        </p:txBody>
+      </p:sp>
+      <p:sp>
+        <p:nvSpPr>
+          <p:cNvPr id="19" name="Oval 18">
+            <a:extLst>
+              <a:ext uri="{FF2B5EF4-FFF2-40B4-BE49-F238E27FC236}">
+                <a16:creationId xmlns:a16="http://schemas.microsoft.com/office/drawing/2014/main" id="{E0887BD7-A65B-243B-F6F4-1179CABED32B}"/>
+              </a:ext>
+            </a:extLst>
+          </p:cNvPr>
+          <p:cNvSpPr/>
+          <p:nvPr/>
+        </p:nvSpPr>
+        <p:spPr>
+          <a:xfrm>
+            <a:off x="3881788" y="3180896"/>
+            <a:ext cx="323160" cy="322207"/>
+          </a:xfrm>
+          <a:prstGeom prst="ellipse">
+            <a:avLst/>
+          </a:prstGeom>
+          <a:solidFill>
+            <a:schemeClr val="accent5">
+              <a:lumMod val="40000"/>
+              <a:lumOff val="60000"/>
+            </a:schemeClr>
+          </a:solidFill>
+        </p:spPr>
+        <p:style>
+          <a:lnRef idx="2">
+            <a:schemeClr val="dk1"/>
+          </a:lnRef>
+          <a:fillRef idx="1">
+            <a:schemeClr val="lt1"/>
+          </a:fillRef>
+          <a:effectRef idx="0">
+            <a:schemeClr val="dk1"/>
+          </a:effectRef>
+          <a:fontRef idx="minor">
+            <a:schemeClr val="dk1"/>
+          </a:fontRef>
+        </p:style>
+        <p:txBody>
+          <a:bodyPr rtlCol="0" anchor="ctr"/>
+          <a:lstStyle/>
+          <a:p>
+            <a:pPr algn="ctr"/>
+            <a:r>
+              <a:rPr lang="nl-NL" noProof="0" dirty="0"/>
+              <a:t>F</a:t>
+            </a:r>
+          </a:p>
+        </p:txBody>
+      </p:sp>
+      <p:cxnSp>
+        <p:nvCxnSpPr>
+          <p:cNvPr id="25" name="Connector: Elbow 24">
+            <a:extLst>
+              <a:ext uri="{FF2B5EF4-FFF2-40B4-BE49-F238E27FC236}">
+                <a16:creationId xmlns:a16="http://schemas.microsoft.com/office/drawing/2014/main" id="{C6387BAB-B133-C29C-91EB-A5893681825E}"/>
+              </a:ext>
+            </a:extLst>
+          </p:cNvPr>
+          <p:cNvCxnSpPr>
+            <a:cxnSpLocks/>
+            <a:stCxn id="19" idx="4"/>
+          </p:cNvCxnSpPr>
+          <p:nvPr/>
+        </p:nvCxnSpPr>
+        <p:spPr>
+          <a:xfrm rot="16200000" flipH="1">
+            <a:off x="4983056" y="2563414"/>
+            <a:ext cx="843814" cy="2723191"/>
+          </a:xfrm>
+          <a:prstGeom prst="bentConnector2">
+            <a:avLst/>
+          </a:prstGeom>
+          <a:ln>
+            <a:tailEnd type="triangle"/>
+          </a:ln>
+        </p:spPr>
+        <p:style>
+          <a:lnRef idx="2">
+            <a:schemeClr val="dk1"/>
+          </a:lnRef>
+          <a:fillRef idx="0">
+            <a:schemeClr val="dk1"/>
+          </a:fillRef>
+          <a:effectRef idx="1">
+            <a:schemeClr val="dk1"/>
+          </a:effectRef>
+          <a:fontRef idx="minor">
+            <a:schemeClr val="tx1"/>
+          </a:fontRef>
+        </p:style>
+      </p:cxnSp>
+      <p:sp>
+        <p:nvSpPr>
+          <p:cNvPr id="23" name="Oval 22">
+            <a:extLst>
+              <a:ext uri="{FF2B5EF4-FFF2-40B4-BE49-F238E27FC236}">
+                <a16:creationId xmlns:a16="http://schemas.microsoft.com/office/drawing/2014/main" id="{C8F6207B-33AD-12B3-0CB6-2C1FF8863B6D}"/>
+              </a:ext>
+            </a:extLst>
+          </p:cNvPr>
+          <p:cNvSpPr/>
+          <p:nvPr/>
+        </p:nvSpPr>
+        <p:spPr>
+          <a:xfrm>
+            <a:off x="5594877" y="4185066"/>
+            <a:ext cx="323160" cy="322207"/>
+          </a:xfrm>
+          <a:prstGeom prst="ellipse">
+            <a:avLst/>
+          </a:prstGeom>
+          <a:solidFill>
+            <a:schemeClr val="accent2">
+              <a:lumMod val="40000"/>
+              <a:lumOff val="60000"/>
+            </a:schemeClr>
+          </a:solidFill>
+        </p:spPr>
+        <p:style>
+          <a:lnRef idx="2">
+            <a:schemeClr val="dk1"/>
+          </a:lnRef>
+          <a:fillRef idx="1">
+            <a:schemeClr val="lt1"/>
+          </a:fillRef>
+          <a:effectRef idx="0">
+            <a:schemeClr val="dk1"/>
+          </a:effectRef>
+          <a:fontRef idx="minor">
+            <a:schemeClr val="dk1"/>
+          </a:fontRef>
+        </p:style>
+        <p:txBody>
+          <a:bodyPr rtlCol="0" anchor="ctr"/>
+          <a:lstStyle/>
+          <a:p>
+            <a:pPr algn="ctr"/>
+            <a:r>
+              <a:rPr lang="nl-NL" noProof="0" dirty="0"/>
+              <a:t>C</a:t>
+            </a:r>
+          </a:p>
+        </p:txBody>
+      </p:sp>
+      <p:sp>
+        <p:nvSpPr>
+          <p:cNvPr id="27" name="TextBox 26">
+            <a:extLst>
+              <a:ext uri="{FF2B5EF4-FFF2-40B4-BE49-F238E27FC236}">
+                <a16:creationId xmlns:a16="http://schemas.microsoft.com/office/drawing/2014/main" id="{AFB37F0D-B26D-141A-FB69-CE83D935A3DF}"/>
+              </a:ext>
+            </a:extLst>
+          </p:cNvPr>
+          <p:cNvSpPr txBox="1"/>
+          <p:nvPr/>
+        </p:nvSpPr>
+        <p:spPr>
+          <a:xfrm>
+            <a:off x="9364700" y="4137941"/>
+            <a:ext cx="2001992" cy="369332"/>
+          </a:xfrm>
+          <a:prstGeom prst="rect">
+            <a:avLst/>
+          </a:prstGeom>
+          <a:noFill/>
+        </p:spPr>
+        <p:txBody>
+          <a:bodyPr wrap="square" rtlCol="0">
+            <a:spAutoFit/>
+          </a:bodyPr>
+          <a:lstStyle/>
+          <a:p>
+            <a:r>
+              <a:rPr lang="nl-NL" noProof="0" dirty="0"/>
+              <a:t>feature/unit-tests</a:t>
+            </a:r>
+          </a:p>
+        </p:txBody>
+      </p:sp>
+      <p:sp>
+        <p:nvSpPr>
+          <p:cNvPr id="3" name="Oval 2">
+            <a:extLst>
+              <a:ext uri="{FF2B5EF4-FFF2-40B4-BE49-F238E27FC236}">
+                <a16:creationId xmlns:a16="http://schemas.microsoft.com/office/drawing/2014/main" id="{90B7E3D0-3355-31D3-6D3E-887D8FD74EC5}"/>
+              </a:ext>
+            </a:extLst>
+          </p:cNvPr>
+          <p:cNvSpPr/>
+          <p:nvPr/>
+        </p:nvSpPr>
+        <p:spPr>
+          <a:xfrm>
+            <a:off x="4692200" y="4185066"/>
+            <a:ext cx="323160" cy="322207"/>
+          </a:xfrm>
+          <a:prstGeom prst="ellipse">
+            <a:avLst/>
+          </a:prstGeom>
+          <a:solidFill>
+            <a:schemeClr val="accent2">
+              <a:lumMod val="40000"/>
+              <a:lumOff val="60000"/>
+            </a:schemeClr>
+          </a:solidFill>
+        </p:spPr>
+        <p:style>
+          <a:lnRef idx="2">
+            <a:schemeClr val="dk1"/>
+          </a:lnRef>
+          <a:fillRef idx="1">
+            <a:schemeClr val="lt1"/>
+          </a:fillRef>
+          <a:effectRef idx="0">
+            <a:schemeClr val="dk1"/>
+          </a:effectRef>
+          <a:fontRef idx="minor">
+            <a:schemeClr val="dk1"/>
+          </a:fontRef>
+        </p:style>
+        <p:txBody>
+          <a:bodyPr rtlCol="0" anchor="ctr"/>
+          <a:lstStyle/>
+          <a:p>
+            <a:pPr algn="ctr"/>
+            <a:r>
+              <a:rPr lang="nl-NL" noProof="0" dirty="0"/>
+              <a:t>C</a:t>
+            </a:r>
+          </a:p>
+        </p:txBody>
+      </p:sp>
+      <p:sp>
+        <p:nvSpPr>
+          <p:cNvPr id="4" name="Oval 3">
+            <a:extLst>
+              <a:ext uri="{FF2B5EF4-FFF2-40B4-BE49-F238E27FC236}">
+                <a16:creationId xmlns:a16="http://schemas.microsoft.com/office/drawing/2014/main" id="{F090C77F-913A-4C8C-FB7D-E9CB212B4752}"/>
+              </a:ext>
+            </a:extLst>
+          </p:cNvPr>
+          <p:cNvSpPr/>
+          <p:nvPr/>
+        </p:nvSpPr>
+        <p:spPr>
+          <a:xfrm>
+            <a:off x="6497554" y="4185066"/>
+            <a:ext cx="323160" cy="322207"/>
+          </a:xfrm>
+          <a:prstGeom prst="ellipse">
+            <a:avLst/>
+          </a:prstGeom>
+          <a:solidFill>
+            <a:schemeClr val="accent2">
+              <a:lumMod val="40000"/>
+              <a:lumOff val="60000"/>
+            </a:schemeClr>
+          </a:solidFill>
+        </p:spPr>
+        <p:style>
+          <a:lnRef idx="2">
+            <a:schemeClr val="dk1"/>
+          </a:lnRef>
+          <a:fillRef idx="1">
+            <a:schemeClr val="lt1"/>
+          </a:fillRef>
+          <a:effectRef idx="0">
+            <a:schemeClr val="dk1"/>
+          </a:effectRef>
+          <a:fontRef idx="minor">
+            <a:schemeClr val="dk1"/>
+          </a:fontRef>
+        </p:style>
+        <p:txBody>
+          <a:bodyPr rtlCol="0" anchor="ctr"/>
+          <a:lstStyle/>
+          <a:p>
+            <a:pPr algn="ctr"/>
+            <a:r>
+              <a:rPr lang="nl-NL" noProof="0" dirty="0"/>
+              <a:t>C</a:t>
+            </a:r>
+          </a:p>
+        </p:txBody>
+      </p:sp>
+      <p:cxnSp>
+        <p:nvCxnSpPr>
+          <p:cNvPr id="18" name="Straight Arrow Connector 17">
+            <a:extLst>
+              <a:ext uri="{FF2B5EF4-FFF2-40B4-BE49-F238E27FC236}">
+                <a16:creationId xmlns:a16="http://schemas.microsoft.com/office/drawing/2014/main" id="{FE4D6D7B-AC1B-219E-CF7F-9C3EC434F372}"/>
+              </a:ext>
+            </a:extLst>
+          </p:cNvPr>
+          <p:cNvCxnSpPr>
+            <a:cxnSpLocks/>
+            <a:endCxn id="15" idx="4"/>
+          </p:cNvCxnSpPr>
+          <p:nvPr/>
+        </p:nvCxnSpPr>
+        <p:spPr>
+          <a:xfrm flipV="1">
+            <a:off x="8032653" y="2511525"/>
+            <a:ext cx="0" cy="830471"/>
+          </a:xfrm>
+          <a:prstGeom prst="straightConnector1">
+            <a:avLst/>
+          </a:prstGeom>
+          <a:ln>
+            <a:tailEnd type="triangle"/>
+          </a:ln>
+        </p:spPr>
+        <p:style>
+          <a:lnRef idx="2">
+            <a:schemeClr val="accent1"/>
+          </a:lnRef>
+          <a:fillRef idx="0">
+            <a:schemeClr val="accent1"/>
+          </a:fillRef>
+          <a:effectRef idx="1">
+            <a:schemeClr val="accent1"/>
+          </a:effectRef>
+          <a:fontRef idx="minor">
+            <a:schemeClr val="tx1"/>
+          </a:fontRef>
+        </p:style>
+      </p:cxnSp>
+      <p:sp>
+        <p:nvSpPr>
+          <p:cNvPr id="6" name="Oval 5">
+            <a:extLst>
+              <a:ext uri="{FF2B5EF4-FFF2-40B4-BE49-F238E27FC236}">
+                <a16:creationId xmlns:a16="http://schemas.microsoft.com/office/drawing/2014/main" id="{362C010C-F26C-7397-5380-69E9F1C41EE3}"/>
+              </a:ext>
+            </a:extLst>
+          </p:cNvPr>
+          <p:cNvSpPr/>
+          <p:nvPr/>
+        </p:nvSpPr>
+        <p:spPr>
+          <a:xfrm>
+            <a:off x="7153621" y="3179723"/>
+            <a:ext cx="323160" cy="322207"/>
+          </a:xfrm>
+          <a:prstGeom prst="ellipse">
+            <a:avLst/>
+          </a:prstGeom>
+          <a:solidFill>
+            <a:schemeClr val="accent5">
+              <a:lumMod val="40000"/>
+              <a:lumOff val="60000"/>
+            </a:schemeClr>
+          </a:solidFill>
+        </p:spPr>
+        <p:style>
+          <a:lnRef idx="2">
+            <a:schemeClr val="dk1"/>
+          </a:lnRef>
+          <a:fillRef idx="1">
+            <a:schemeClr val="lt1"/>
+          </a:fillRef>
+          <a:effectRef idx="0">
+            <a:schemeClr val="dk1"/>
+          </a:effectRef>
+          <a:fontRef idx="minor">
+            <a:schemeClr val="dk1"/>
+          </a:fontRef>
+        </p:style>
+        <p:txBody>
+          <a:bodyPr rtlCol="0" anchor="ctr"/>
+          <a:lstStyle/>
+          <a:p>
+            <a:pPr algn="ctr"/>
+            <a:r>
+              <a:rPr lang="nl-NL" noProof="0" dirty="0"/>
+              <a:t>F</a:t>
+            </a:r>
+          </a:p>
+        </p:txBody>
+      </p:sp>
+      <p:sp>
+        <p:nvSpPr>
+          <p:cNvPr id="12" name="TextBox 11">
+            <a:extLst>
+              <a:ext uri="{FF2B5EF4-FFF2-40B4-BE49-F238E27FC236}">
+                <a16:creationId xmlns:a16="http://schemas.microsoft.com/office/drawing/2014/main" id="{709531D4-DA9F-9D5A-26FF-B3802C5E8347}"/>
+              </a:ext>
+            </a:extLst>
+          </p:cNvPr>
+          <p:cNvSpPr txBox="1"/>
+          <p:nvPr/>
+        </p:nvSpPr>
+        <p:spPr>
+          <a:xfrm>
+            <a:off x="7371273" y="3669228"/>
+            <a:ext cx="840295" cy="369332"/>
+          </a:xfrm>
+          <a:prstGeom prst="rect">
+            <a:avLst/>
+          </a:prstGeom>
+          <a:noFill/>
+        </p:spPr>
+        <p:txBody>
+          <a:bodyPr wrap="none" rtlCol="0">
+            <a:spAutoFit/>
+          </a:bodyPr>
+          <a:lstStyle/>
+          <a:p>
+            <a:r>
+              <a:rPr lang="nl-NL" dirty="0">
+                <a:solidFill>
+                  <a:schemeClr val="accent2">
+                    <a:lumMod val="75000"/>
+                  </a:schemeClr>
+                </a:solidFill>
+              </a:rPr>
+              <a:t>squash</a:t>
+            </a:r>
+          </a:p>
+        </p:txBody>
+      </p:sp>
+      <p:sp>
+        <p:nvSpPr>
+          <p:cNvPr id="13" name="TextBox 12">
+            <a:extLst>
+              <a:ext uri="{FF2B5EF4-FFF2-40B4-BE49-F238E27FC236}">
+                <a16:creationId xmlns:a16="http://schemas.microsoft.com/office/drawing/2014/main" id="{42B2B121-09A0-8857-9469-BA498167D6B9}"/>
+              </a:ext>
+            </a:extLst>
+          </p:cNvPr>
+          <p:cNvSpPr txBox="1"/>
+          <p:nvPr/>
+        </p:nvSpPr>
+        <p:spPr>
+          <a:xfrm>
+            <a:off x="8032653" y="2665677"/>
+            <a:ext cx="783933" cy="369332"/>
+          </a:xfrm>
+          <a:prstGeom prst="rect">
+            <a:avLst/>
+          </a:prstGeom>
+          <a:noFill/>
+        </p:spPr>
+        <p:txBody>
+          <a:bodyPr wrap="none" rtlCol="0">
+            <a:spAutoFit/>
+          </a:bodyPr>
+          <a:lstStyle/>
+          <a:p>
+            <a:r>
+              <a:rPr lang="nl-NL" dirty="0" err="1">
+                <a:solidFill>
+                  <a:schemeClr val="accent5">
+                    <a:lumMod val="50000"/>
+                  </a:schemeClr>
+                </a:solidFill>
+              </a:rPr>
+              <a:t>merge</a:t>
+            </a:r>
+            <a:endParaRPr lang="nl-NL" dirty="0">
+              <a:solidFill>
+                <a:schemeClr val="accent5">
+                  <a:lumMod val="50000"/>
+                </a:schemeClr>
+              </a:solidFill>
+            </a:endParaRPr>
+          </a:p>
+        </p:txBody>
+      </p:sp>
+      <p:sp>
+        <p:nvSpPr>
+          <p:cNvPr id="15" name="Oval 14">
+            <a:extLst>
+              <a:ext uri="{FF2B5EF4-FFF2-40B4-BE49-F238E27FC236}">
+                <a16:creationId xmlns:a16="http://schemas.microsoft.com/office/drawing/2014/main" id="{CA89D24C-478A-4247-501A-13015190EEA7}"/>
+              </a:ext>
+            </a:extLst>
+          </p:cNvPr>
+          <p:cNvSpPr/>
+          <p:nvPr/>
+        </p:nvSpPr>
+        <p:spPr>
+          <a:xfrm>
+            <a:off x="7871073" y="2189318"/>
+            <a:ext cx="323160" cy="322207"/>
+          </a:xfrm>
+          <a:prstGeom prst="ellipse">
+            <a:avLst/>
+          </a:prstGeom>
+          <a:solidFill>
+            <a:schemeClr val="accent6">
+              <a:lumMod val="40000"/>
+              <a:lumOff val="60000"/>
+            </a:schemeClr>
+          </a:solidFill>
+        </p:spPr>
+        <p:style>
+          <a:lnRef idx="2">
+            <a:schemeClr val="dk1"/>
+          </a:lnRef>
+          <a:fillRef idx="1">
+            <a:schemeClr val="lt1"/>
+          </a:fillRef>
+          <a:effectRef idx="0">
+            <a:schemeClr val="dk1"/>
+          </a:effectRef>
+          <a:fontRef idx="minor">
+            <a:schemeClr val="dk1"/>
+          </a:fontRef>
+        </p:style>
+        <p:txBody>
+          <a:bodyPr rtlCol="0" anchor="ctr"/>
+          <a:lstStyle/>
+          <a:p>
+            <a:pPr algn="ctr"/>
+            <a:r>
+              <a:rPr lang="nl-NL" noProof="0" dirty="0"/>
+              <a:t>R</a:t>
+            </a:r>
+          </a:p>
+        </p:txBody>
+      </p:sp>
+    </p:spTree>
+    <p:extLst>
+      <p:ext uri="{BB962C8B-B14F-4D97-AF65-F5344CB8AC3E}">
+        <p14:creationId xmlns:p14="http://schemas.microsoft.com/office/powerpoint/2010/main" val="306344365"/>
+      </p:ext>
+    </p:extLst>
+  </p:cSld>
+  <p:clrMapOvr>
+    <a:masterClrMapping/>
+  </p:clrMapOvr>
+</p:sld>
+</file>
+
+<file path=ppt/slides/slide61.xml><?xml version="1.0" encoding="utf-8"?>
+<p:sld xmlns:a="http://schemas.openxmlformats.org/drawingml/2006/main" xmlns:r="http://schemas.openxmlformats.org/officeDocument/2006/relationships" xmlns:p="http://schemas.openxmlformats.org/presentationml/2006/main">
+  <p:cSld>
+    <p:spTree>
+      <p:nvGrpSpPr>
+        <p:cNvPr id="1" name="">
+          <a:extLst>
+            <a:ext uri="{FF2B5EF4-FFF2-40B4-BE49-F238E27FC236}">
               <a16:creationId xmlns:a16="http://schemas.microsoft.com/office/drawing/2014/main" id="{1268F17F-9DE9-F4F7-38C7-3CC8D403AE3C}"/>
             </a:ext>
           </a:extLst>
@@ -46002,7 +46566,7 @@
 </p:sld>
 </file>
 
-<file path=ppt/slides/slide61.xml><?xml version="1.0" encoding="utf-8"?>
+<file path=ppt/slides/slide62.xml><?xml version="1.0" encoding="utf-8"?>
 <p:sld xmlns:a="http://schemas.openxmlformats.org/drawingml/2006/main" xmlns:r="http://schemas.openxmlformats.org/officeDocument/2006/relationships" xmlns:p="http://schemas.openxmlformats.org/presentationml/2006/main">
   <p:cSld>
     <p:spTree>
@@ -46884,7 +47448,7 @@
 </p:sld>
 </file>
 
-<file path=ppt/slides/slide62.xml><?xml version="1.0" encoding="utf-8"?>
+<file path=ppt/slides/slide63.xml><?xml version="1.0" encoding="utf-8"?>
 <p:sld xmlns:a="http://schemas.openxmlformats.org/drawingml/2006/main" xmlns:r="http://schemas.openxmlformats.org/officeDocument/2006/relationships" xmlns:p="http://schemas.openxmlformats.org/presentationml/2006/main">
   <p:cSld>
     <p:spTree>
@@ -47883,7 +48447,7 @@
 </p:sld>
 </file>
 
-<file path=ppt/slides/slide63.xml><?xml version="1.0" encoding="utf-8"?>
+<file path=ppt/slides/slide64.xml><?xml version="1.0" encoding="utf-8"?>
 <p:sld xmlns:a="http://schemas.openxmlformats.org/drawingml/2006/main" xmlns:r="http://schemas.openxmlformats.org/officeDocument/2006/relationships" xmlns:p="http://schemas.openxmlformats.org/presentationml/2006/main">
   <p:cSld>
     <p:spTree>
@@ -48849,7 +49413,7 @@
 </p:sld>
 </file>
 
-<file path=ppt/slides/slide64.xml><?xml version="1.0" encoding="utf-8"?>
+<file path=ppt/slides/slide65.xml><?xml version="1.0" encoding="utf-8"?>
 <p:sld xmlns:a="http://schemas.openxmlformats.org/drawingml/2006/main" xmlns:r="http://schemas.openxmlformats.org/officeDocument/2006/relationships" xmlns:p="http://schemas.openxmlformats.org/presentationml/2006/main">
   <p:cSld>
     <p:spTree>
@@ -49157,7 +49721,7 @@
 </p:sld>
 </file>
 
-<file path=ppt/slides/slide65.xml><?xml version="1.0" encoding="utf-8"?>
+<file path=ppt/slides/slide66.xml><?xml version="1.0" encoding="utf-8"?>
 <p:sld xmlns:a="http://schemas.openxmlformats.org/drawingml/2006/main" xmlns:r="http://schemas.openxmlformats.org/officeDocument/2006/relationships" xmlns:p="http://schemas.openxmlformats.org/presentationml/2006/main">
   <p:cSld>
     <p:spTree>
@@ -49608,7 +50172,7 @@
 </p:sld>
 </file>
 
-<file path=ppt/slides/slide66.xml><?xml version="1.0" encoding="utf-8"?>
+<file path=ppt/slides/slide67.xml><?xml version="1.0" encoding="utf-8"?>
 <p:sld xmlns:a="http://schemas.openxmlformats.org/drawingml/2006/main" xmlns:r="http://schemas.openxmlformats.org/officeDocument/2006/relationships" xmlns:p="http://schemas.openxmlformats.org/presentationml/2006/main">
   <p:cSld>
     <p:spTree>
@@ -50290,7 +50854,7 @@
 </p:sld>
 </file>
 
-<file path=ppt/slides/slide67.xml><?xml version="1.0" encoding="utf-8"?>
+<file path=ppt/slides/slide68.xml><?xml version="1.0" encoding="utf-8"?>
 <p:sld xmlns:a="http://schemas.openxmlformats.org/drawingml/2006/main" xmlns:r="http://schemas.openxmlformats.org/officeDocument/2006/relationships" xmlns:p="http://schemas.openxmlformats.org/presentationml/2006/main">
   <p:cSld>
     <p:spTree>
